--- a/decks/territory-review/Territory Review Template - Walmart (Chad).pptx
+++ b/decks/territory-review/Territory Review Template - Walmart (Chad).pptx
@@ -111,243 +111,6 @@
     </a:lvl9pPr>
   </p:defaultTextStyle>
 </p:presentation>
-</file>
-
-<file path=ppt/charts/chart1.xml><?xml version="1.0" encoding="utf-8"?>
-<c:chartSpace xmlns:c="http://schemas.openxmlformats.org/drawingml/2006/chart" xmlns:a="http://schemas.openxmlformats.org/drawingml/2006/main" xmlns:r="http://schemas.openxmlformats.org/officeDocument/2006/relationships">
-  <c:date1904 val="0"/>
-  <c:chart>
-    <c:autoTitleDeleted val="1"/>
-    <c:plotArea>
-      <c:barChart>
-        <c:barDir val="col"/>
-        <c:grouping val="clustered"/>
-        <c:ser>
-          <c:idx val="0"/>
-          <c:order val="0"/>
-          <c:tx>
-            <c:strRef>
-              <c:f>Sheet1!$B$1</c:f>
-              <c:strCache>
-                <c:ptCount val="1"/>
-                <c:pt idx="0">
-                  <c:v>Bookings</c:v>
-                </c:pt>
-              </c:strCache>
-            </c:strRef>
-          </c:tx>
-          <c:spPr>
-            <a:solidFill>
-              <a:srgbClr val="3C7D4D"/>
-            </a:solidFill>
-          </c:spPr>
-          <c:cat>
-            <c:strRef>
-              <c:f>Sheet1!$A$2:$A$5</c:f>
-              <c:strCache>
-                <c:ptCount val="4"/>
-                <c:pt idx="0">
-                  <c:v>Q4 2025</c:v>
-                </c:pt>
-                <c:pt idx="1">
-                  <c:v>Q1 2026</c:v>
-                </c:pt>
-                <c:pt idx="2">
-                  <c:v>Q2 2026</c:v>
-                </c:pt>
-                <c:pt idx="3">
-                  <c:v>Q3 2026</c:v>
-                </c:pt>
-              </c:strCache>
-            </c:strRef>
-          </c:cat>
-          <c:val>
-            <c:numRef>
-              <c:f>Sheet1!$B$2:$B$5</c:f>
-              <c:numCache>
-                <c:formatCode>General</c:formatCode>
-                <c:ptCount val="4"/>
-                <c:pt idx="0">
-                  <c:v>850</c:v>
-                </c:pt>
-                <c:pt idx="1">
-                  <c:v>920</c:v>
-                </c:pt>
-                <c:pt idx="2">
-                  <c:v>780</c:v>
-                </c:pt>
-                <c:pt idx="3">
-                  <c:v>1010</c:v>
-                </c:pt>
-              </c:numCache>
-            </c:numRef>
-          </c:val>
-        </c:ser>
-        <c:ser>
-          <c:idx val="1"/>
-          <c:order val="1"/>
-          <c:tx>
-            <c:strRef>
-              <c:f>Sheet1!$C$1</c:f>
-              <c:strCache>
-                <c:ptCount val="1"/>
-                <c:pt idx="0">
-                  <c:v>Quotes</c:v>
-                </c:pt>
-              </c:strCache>
-            </c:strRef>
-          </c:tx>
-          <c:spPr>
-            <a:solidFill>
-              <a:srgbClr val="5B6670"/>
-            </a:solidFill>
-          </c:spPr>
-          <c:cat>
-            <c:strRef>
-              <c:f>Sheet1!$A$2:$A$5</c:f>
-              <c:strCache>
-                <c:ptCount val="4"/>
-                <c:pt idx="0">
-                  <c:v>Q4 2025</c:v>
-                </c:pt>
-                <c:pt idx="1">
-                  <c:v>Q1 2026</c:v>
-                </c:pt>
-                <c:pt idx="2">
-                  <c:v>Q2 2026</c:v>
-                </c:pt>
-                <c:pt idx="3">
-                  <c:v>Q3 2026</c:v>
-                </c:pt>
-              </c:strCache>
-            </c:strRef>
-          </c:cat>
-          <c:val>
-            <c:numRef>
-              <c:f>Sheet1!$C$2:$C$5</c:f>
-              <c:numCache>
-                <c:formatCode>General</c:formatCode>
-                <c:ptCount val="4"/>
-                <c:pt idx="0">
-                  <c:v>2400</c:v>
-                </c:pt>
-                <c:pt idx="1">
-                  <c:v>2650</c:v>
-                </c:pt>
-                <c:pt idx="2">
-                  <c:v>2100</c:v>
-                </c:pt>
-                <c:pt idx="3">
-                  <c:v>2900</c:v>
-                </c:pt>
-              </c:numCache>
-            </c:numRef>
-          </c:val>
-        </c:ser>
-        <c:dLbls>
-          <c:numFmt formatCode="$#,##0&quot;K&quot;" sourceLinked="0"/>
-          <c:txPr>
-            <a:bodyPr/>
-            <a:lstStyle/>
-            <a:p>
-              <a:pPr>
-                <a:defRPr sz="900">
-                  <a:latin typeface="Arial"/>
-                </a:defRPr>
-              </a:pPr>
-            </a:p>
-          </c:txPr>
-          <c:showLegendKey val="0"/>
-          <c:showVal val="1"/>
-          <c:showCatName val="0"/>
-          <c:showSerName val="0"/>
-          <c:showPercent val="0"/>
-          <c:showBubbleSize val="0"/>
-          <c:showLeaderLines val="1"/>
-        </c:dLbls>
-        <c:gapWidth val="55"/>
-        <c:overlap val="-10"/>
-        <c:axId val="-2068027336"/>
-        <c:axId val="-2113994440"/>
-      </c:barChart>
-      <c:catAx>
-        <c:axId val="-2068027336"/>
-        <c:scaling>
-          <c:orientation val="minMax"/>
-        </c:scaling>
-        <c:delete val="0"/>
-        <c:axPos val="b"/>
-        <c:majorTickMark val="out"/>
-        <c:minorTickMark val="none"/>
-        <c:tickLblPos val="nextTo"/>
-        <c:spPr>
-          <a:ln>
-            <a:solidFill>
-              <a:srgbClr val="E2E6E3"/>
-            </a:solidFill>
-          </a:ln>
-        </c:spPr>
-        <c:txPr>
-          <a:bodyPr/>
-          <a:lstStyle/>
-          <a:p>
-            <a:pPr>
-              <a:defRPr sz="1000">
-                <a:latin typeface="Arial"/>
-              </a:defRPr>
-            </a:pPr>
-          </a:p>
-        </c:txPr>
-        <c:crossAx val="-2113994440"/>
-        <c:crosses val="autoZero"/>
-        <c:auto val="1"/>
-        <c:lblAlgn val="ctr"/>
-        <c:lblOffset val="100"/>
-        <c:noMultiLvlLbl val="0"/>
-      </c:catAx>
-      <c:valAx>
-        <c:axId val="-2113994440"/>
-        <c:scaling/>
-        <c:delete/>
-        <c:axPos val="l"/>
-        <c:majorTickMark val="out"/>
-        <c:minorTickMark val="none"/>
-        <c:tickLblPos val="nextTo"/>
-        <c:crossAx val="-2068027336"/>
-        <c:crosses val="autoZero"/>
-      </c:valAx>
-    </c:plotArea>
-    <c:legend>
-      <c:legendPos val="b"/>
-      <c:overlay val="0"/>
-      <c:txPr>
-        <a:bodyPr/>
-        <a:lstStyle/>
-        <a:p>
-          <a:pPr>
-            <a:defRPr sz="1000">
-              <a:latin typeface="Arial"/>
-            </a:defRPr>
-          </a:pPr>
-        </a:p>
-      </c:txPr>
-    </c:legend>
-    <c:dispBlanksAs val="gap"/>
-  </c:chart>
-  <c:txPr>
-    <a:bodyPr/>
-    <a:lstStyle/>
-    <a:p>
-      <a:pPr>
-        <a:defRPr sz="1800"/>
-      </a:pPr>
-      <a:endParaRPr lang="en-US"/>
-    </a:p>
-  </c:txPr>
-  <c:externalData r:id="rId1">
-    <c:autoUpdate val="0"/>
-  </c:externalData>
-</c:chartSpace>
 </file>
 
 <file path=ppt/notesMasters/notesMaster1.xml><?xml version="1.0" encoding="utf-8"?>
@@ -1024,7 +787,7 @@
           <a:lstStyle/>
           <a:p>
             <a:r>
-              <a:t>Slide 4. Three losses. One on price, one on product, one on speed and support. Who won, why, and whether we'd lose it again today. On the price loss, include the competitor's number if you have it. If you don't, say unknown. If you don't have a loss in one of the three buckets, say so on the slide.</a:t>
+              <a:t>Slide 4. Three losses. One on price, one on product, one on speed and support. Who won, why, and whether we'd lose it again today. On the price loss, include the competitor's number if you have it. If you don't, say unknown. On every loss, the lead time we quoted and the lead time the winner delivered. If you don't have a loss in one of the three buckets, say so on the slide.</a:t>
             </a:r>
           </a:p>
         </p:txBody>
@@ -1224,15 +987,9 @@
   <p:cSld name="FULL_VISUAL">
     <p:bg>
       <p:bgPr>
-        <a:blipFill dpi="0" rotWithShape="1">
-          <a:blip r:embed="rId2">
-            <a:lum/>
-          </a:blip>
-          <a:srcRect/>
-          <a:stretch>
-            <a:fillRect/>
-          </a:stretch>
-        </a:blipFill>
+        <a:solidFill>
+          <a:srgbClr val="FFFFFF"/>
+        </a:solidFill>
         <a:effectLst/>
       </p:bgPr>
     </p:bg>
@@ -1590,15 +1347,9 @@
   <p:cSld name="COMPARISON">
     <p:bg>
       <p:bgPr>
-        <a:blipFill dpi="0" rotWithShape="1">
-          <a:blip r:embed="rId2">
-            <a:lum/>
-          </a:blip>
-          <a:srcRect/>
-          <a:stretch>
-            <a:fillRect/>
-          </a:stretch>
-        </a:blipFill>
+        <a:solidFill>
+          <a:srgbClr val="FFFFFF"/>
+        </a:solidFill>
         <a:effectLst/>
       </p:bgPr>
     </p:bg>
@@ -2258,15 +2009,9 @@
   <p:cSld name="TIMELINE">
     <p:bg>
       <p:bgPr>
-        <a:blipFill dpi="0" rotWithShape="1">
-          <a:blip r:embed="rId2">
-            <a:lum/>
-          </a:blip>
-          <a:srcRect/>
-          <a:stretch>
-            <a:fillRect/>
-          </a:stretch>
-        </a:blipFill>
+        <a:solidFill>
+          <a:srgbClr val="FFFFFF"/>
+        </a:solidFill>
         <a:effectLst/>
       </p:bgPr>
     </p:bg>
@@ -3718,15 +3463,9 @@
   <p:cSld name="NEXT_STEPS">
     <p:bg>
       <p:bgPr>
-        <a:blipFill dpi="0" rotWithShape="1">
-          <a:blip r:embed="rId2">
-            <a:lum/>
-          </a:blip>
-          <a:srcRect/>
-          <a:stretch>
-            <a:fillRect/>
-          </a:stretch>
-        </a:blipFill>
+        <a:solidFill>
+          <a:srgbClr val="FFFFFF"/>
+        </a:solidFill>
         <a:effectLst/>
       </p:bgPr>
     </p:bg>
@@ -5186,15 +4925,9 @@
   <p:cSld name="AGENDA">
     <p:bg>
       <p:bgPr>
-        <a:blipFill dpi="0" rotWithShape="1">
-          <a:blip r:embed="rId2">
-            <a:lum/>
-          </a:blip>
-          <a:srcRect/>
-          <a:stretch>
-            <a:fillRect/>
-          </a:stretch>
-        </a:blipFill>
+        <a:solidFill>
+          <a:srgbClr val="FFFFFF"/>
+        </a:solidFill>
         <a:effectLst/>
       </p:bgPr>
     </p:bg>
@@ -6296,15 +6029,9 @@
   <p:cSld name="TITLE_CONTENT">
     <p:bg>
       <p:bgPr>
-        <a:blipFill dpi="0" rotWithShape="1">
-          <a:blip r:embed="rId2">
-            <a:lum/>
-          </a:blip>
-          <a:srcRect/>
-          <a:stretch>
-            <a:fillRect/>
-          </a:stretch>
-        </a:blipFill>
+        <a:solidFill>
+          <a:srgbClr val="FFFFFF"/>
+        </a:solidFill>
         <a:effectLst/>
       </p:bgPr>
     </p:bg>
@@ -6672,15 +6399,9 @@
   <p:cSld name="TWO_CONTENT">
     <p:bg>
       <p:bgPr>
-        <a:blipFill dpi="0" rotWithShape="1">
-          <a:blip r:embed="rId2">
-            <a:lum/>
-          </a:blip>
-          <a:srcRect/>
-          <a:stretch>
-            <a:fillRect/>
-          </a:stretch>
-        </a:blipFill>
+        <a:solidFill>
+          <a:srgbClr val="FFFFFF"/>
+        </a:solidFill>
         <a:effectLst/>
       </p:bgPr>
     </p:bg>
@@ -7253,15 +6974,9 @@
   <p:cSld name="THREE_CARDS">
     <p:bg>
       <p:bgPr>
-        <a:blipFill dpi="0" rotWithShape="1">
-          <a:blip r:embed="rId2">
-            <a:lum/>
-          </a:blip>
-          <a:srcRect/>
-          <a:stretch>
-            <a:fillRect/>
-          </a:stretch>
-        </a:blipFill>
+        <a:solidFill>
+          <a:srgbClr val="FFFFFF"/>
+        </a:solidFill>
         <a:effectLst/>
       </p:bgPr>
     </p:bg>
@@ -8131,15 +7846,9 @@
   <p:cSld name="BIG_NUMBERS">
     <p:bg>
       <p:bgPr>
-        <a:blipFill dpi="0" rotWithShape="1">
-          <a:blip r:embed="rId2">
-            <a:lum/>
-          </a:blip>
-          <a:srcRect/>
-          <a:stretch>
-            <a:fillRect/>
-          </a:stretch>
-        </a:blipFill>
+        <a:solidFill>
+          <a:srgbClr val="FFFFFF"/>
+        </a:solidFill>
         <a:effectLst/>
       </p:bgPr>
     </p:bg>
@@ -9053,15 +8762,9 @@
   <p:cSld name="CONTENT_VISUAL">
     <p:bg>
       <p:bgPr>
-        <a:blipFill dpi="0" rotWithShape="1">
-          <a:blip r:embed="rId2">
-            <a:lum/>
-          </a:blip>
-          <a:srcRect/>
-          <a:stretch>
-            <a:fillRect/>
-          </a:stretch>
-        </a:blipFill>
+        <a:solidFill>
+          <a:srgbClr val="FFFFFF"/>
+        </a:solidFill>
         <a:effectLst/>
       </p:bgPr>
     </p:bg>
@@ -9998,7 +9701,7 @@
           <a:lstStyle/>
           <a:p>
             <a:r>
-              <a:t>Source: bookings and quotes from [system], pulled [date]. Pre-filled by Nate.</a:t>
+              <a:t>Source: [system], pulled [date]. Hit rate is bookings divided by quotes. Lead time is the average we quoted that quarter.</a:t>
             </a:r>
           </a:p>
         </p:txBody>
@@ -10032,14 +9735,14 @@
                 </a:solidFill>
                 <a:latin typeface="Arial"/>
               </a:rPr>
-              <a:t>BOOKINGS AND QUOTES BY QUARTER ($K)  ·  PRE-FILLED</a:t>
+              <a:t>BY QUARTER  ·  PRE-FILLED</a:t>
             </a:r>
           </a:p>
         </p:txBody>
       </p:sp>
       <p:graphicFrame>
         <p:nvGraphicFramePr>
-          <p:cNvPr id="8" name="Chart 7"/>
+          <p:cNvPr id="8" name="Table 7"/>
           <p:cNvGraphicFramePr>
             <a:graphicFrameLocks noGrp="1"/>
           </p:cNvGraphicFramePr>
@@ -10047,11 +9750,1180 @@
         </p:nvGraphicFramePr>
         <p:xfrm>
           <a:off x="731520" y="2377440"/>
-          <a:ext cx="5120640" cy="1828800"/>
+          <a:ext cx="5120640" cy="1335024"/>
         </p:xfrm>
         <a:graphic>
-          <a:graphicData uri="http://schemas.openxmlformats.org/drawingml/2006/chart">
-            <c:chart xmlns:c="http://schemas.openxmlformats.org/drawingml/2006/chart" r:id="rId2"/>
+          <a:graphicData uri="http://schemas.openxmlformats.org/drawingml/2006/table">
+            <a:tbl>
+              <a:tblPr firstRow="0" bandRow="0"/>
+              <a:tblGrid>
+                <a:gridCol w="1005840"/>
+                <a:gridCol w="1005840"/>
+                <a:gridCol w="1005840"/>
+                <a:gridCol w="868680"/>
+                <a:gridCol w="1234440"/>
+              </a:tblGrid>
+              <a:tr h="274320">
+                <a:tc>
+                  <a:txBody>
+                    <a:bodyPr/>
+                    <a:lstStyle/>
+                    <a:p>
+                      <a:r>
+                        <a:rPr sz="1000" b="1">
+                          <a:solidFill>
+                            <a:srgbClr val="FFFFFF"/>
+                          </a:solidFill>
+                          <a:latin typeface="Arial"/>
+                        </a:rPr>
+                        <a:t>Quarter</a:t>
+                      </a:r>
+                    </a:p>
+                  </a:txBody>
+                  <a:tcPr marL="73152" marR="73152" marT="27432" marB="27432" anchor="ctr">
+                    <a:solidFill>
+                      <a:srgbClr val="3C7D4D"/>
+                    </a:solidFill>
+                    <a:lnL w="6350" cap="flat" cmpd="sng" algn="ctr">
+                      <a:solidFill>
+                        <a:srgbClr val="3C7D4D"/>
+                      </a:solidFill>
+                      <a:prstDash val="solid"/>
+                    </a:lnL>
+                    <a:lnR w="6350" cap="flat" cmpd="sng" algn="ctr">
+                      <a:solidFill>
+                        <a:srgbClr val="3C7D4D"/>
+                      </a:solidFill>
+                      <a:prstDash val="solid"/>
+                    </a:lnR>
+                    <a:lnT w="6350" cap="flat" cmpd="sng" algn="ctr">
+                      <a:solidFill>
+                        <a:srgbClr val="3C7D4D"/>
+                      </a:solidFill>
+                      <a:prstDash val="solid"/>
+                    </a:lnT>
+                    <a:lnB w="6350" cap="flat" cmpd="sng" algn="ctr">
+                      <a:solidFill>
+                        <a:srgbClr val="3C7D4D"/>
+                      </a:solidFill>
+                      <a:prstDash val="solid"/>
+                    </a:lnB>
+                  </a:tcPr>
+                </a:tc>
+                <a:tc>
+                  <a:txBody>
+                    <a:bodyPr/>
+                    <a:lstStyle/>
+                    <a:p>
+                      <a:r>
+                        <a:rPr sz="1000" b="1">
+                          <a:solidFill>
+                            <a:srgbClr val="FFFFFF"/>
+                          </a:solidFill>
+                          <a:latin typeface="Arial"/>
+                        </a:rPr>
+                        <a:t>Bookings</a:t>
+                      </a:r>
+                    </a:p>
+                  </a:txBody>
+                  <a:tcPr marL="73152" marR="73152" marT="27432" marB="27432" anchor="ctr">
+                    <a:solidFill>
+                      <a:srgbClr val="3C7D4D"/>
+                    </a:solidFill>
+                    <a:lnL w="6350" cap="flat" cmpd="sng" algn="ctr">
+                      <a:solidFill>
+                        <a:srgbClr val="3C7D4D"/>
+                      </a:solidFill>
+                      <a:prstDash val="solid"/>
+                    </a:lnL>
+                    <a:lnR w="6350" cap="flat" cmpd="sng" algn="ctr">
+                      <a:solidFill>
+                        <a:srgbClr val="3C7D4D"/>
+                      </a:solidFill>
+                      <a:prstDash val="solid"/>
+                    </a:lnR>
+                    <a:lnT w="6350" cap="flat" cmpd="sng" algn="ctr">
+                      <a:solidFill>
+                        <a:srgbClr val="3C7D4D"/>
+                      </a:solidFill>
+                      <a:prstDash val="solid"/>
+                    </a:lnT>
+                    <a:lnB w="6350" cap="flat" cmpd="sng" algn="ctr">
+                      <a:solidFill>
+                        <a:srgbClr val="3C7D4D"/>
+                      </a:solidFill>
+                      <a:prstDash val="solid"/>
+                    </a:lnB>
+                  </a:tcPr>
+                </a:tc>
+                <a:tc>
+                  <a:txBody>
+                    <a:bodyPr/>
+                    <a:lstStyle/>
+                    <a:p>
+                      <a:r>
+                        <a:rPr sz="1000" b="1">
+                          <a:solidFill>
+                            <a:srgbClr val="FFFFFF"/>
+                          </a:solidFill>
+                          <a:latin typeface="Arial"/>
+                        </a:rPr>
+                        <a:t>Quotes</a:t>
+                      </a:r>
+                    </a:p>
+                  </a:txBody>
+                  <a:tcPr marL="73152" marR="73152" marT="27432" marB="27432" anchor="ctr">
+                    <a:solidFill>
+                      <a:srgbClr val="3C7D4D"/>
+                    </a:solidFill>
+                    <a:lnL w="6350" cap="flat" cmpd="sng" algn="ctr">
+                      <a:solidFill>
+                        <a:srgbClr val="3C7D4D"/>
+                      </a:solidFill>
+                      <a:prstDash val="solid"/>
+                    </a:lnL>
+                    <a:lnR w="6350" cap="flat" cmpd="sng" algn="ctr">
+                      <a:solidFill>
+                        <a:srgbClr val="3C7D4D"/>
+                      </a:solidFill>
+                      <a:prstDash val="solid"/>
+                    </a:lnR>
+                    <a:lnT w="6350" cap="flat" cmpd="sng" algn="ctr">
+                      <a:solidFill>
+                        <a:srgbClr val="3C7D4D"/>
+                      </a:solidFill>
+                      <a:prstDash val="solid"/>
+                    </a:lnT>
+                    <a:lnB w="6350" cap="flat" cmpd="sng" algn="ctr">
+                      <a:solidFill>
+                        <a:srgbClr val="3C7D4D"/>
+                      </a:solidFill>
+                      <a:prstDash val="solid"/>
+                    </a:lnB>
+                  </a:tcPr>
+                </a:tc>
+                <a:tc>
+                  <a:txBody>
+                    <a:bodyPr/>
+                    <a:lstStyle/>
+                    <a:p>
+                      <a:r>
+                        <a:rPr sz="1000" b="1">
+                          <a:solidFill>
+                            <a:srgbClr val="FFFFFF"/>
+                          </a:solidFill>
+                          <a:latin typeface="Arial"/>
+                        </a:rPr>
+                        <a:t>Hit rate</a:t>
+                      </a:r>
+                    </a:p>
+                  </a:txBody>
+                  <a:tcPr marL="73152" marR="73152" marT="27432" marB="27432" anchor="ctr">
+                    <a:solidFill>
+                      <a:srgbClr val="3C7D4D"/>
+                    </a:solidFill>
+                    <a:lnL w="6350" cap="flat" cmpd="sng" algn="ctr">
+                      <a:solidFill>
+                        <a:srgbClr val="3C7D4D"/>
+                      </a:solidFill>
+                      <a:prstDash val="solid"/>
+                    </a:lnL>
+                    <a:lnR w="6350" cap="flat" cmpd="sng" algn="ctr">
+                      <a:solidFill>
+                        <a:srgbClr val="3C7D4D"/>
+                      </a:solidFill>
+                      <a:prstDash val="solid"/>
+                    </a:lnR>
+                    <a:lnT w="6350" cap="flat" cmpd="sng" algn="ctr">
+                      <a:solidFill>
+                        <a:srgbClr val="3C7D4D"/>
+                      </a:solidFill>
+                      <a:prstDash val="solid"/>
+                    </a:lnT>
+                    <a:lnB w="6350" cap="flat" cmpd="sng" algn="ctr">
+                      <a:solidFill>
+                        <a:srgbClr val="3C7D4D"/>
+                      </a:solidFill>
+                      <a:prstDash val="solid"/>
+                    </a:lnB>
+                  </a:tcPr>
+                </a:tc>
+                <a:tc>
+                  <a:txBody>
+                    <a:bodyPr/>
+                    <a:lstStyle/>
+                    <a:p>
+                      <a:r>
+                        <a:rPr sz="1000" b="1">
+                          <a:solidFill>
+                            <a:srgbClr val="FFFFFF"/>
+                          </a:solidFill>
+                          <a:latin typeface="Arial"/>
+                        </a:rPr>
+                        <a:t>Quoted lead time</a:t>
+                      </a:r>
+                    </a:p>
+                  </a:txBody>
+                  <a:tcPr marL="73152" marR="73152" marT="27432" marB="27432" anchor="ctr">
+                    <a:solidFill>
+                      <a:srgbClr val="3C7D4D"/>
+                    </a:solidFill>
+                    <a:lnL w="6350" cap="flat" cmpd="sng" algn="ctr">
+                      <a:solidFill>
+                        <a:srgbClr val="3C7D4D"/>
+                      </a:solidFill>
+                      <a:prstDash val="solid"/>
+                    </a:lnL>
+                    <a:lnR w="6350" cap="flat" cmpd="sng" algn="ctr">
+                      <a:solidFill>
+                        <a:srgbClr val="3C7D4D"/>
+                      </a:solidFill>
+                      <a:prstDash val="solid"/>
+                    </a:lnR>
+                    <a:lnT w="6350" cap="flat" cmpd="sng" algn="ctr">
+                      <a:solidFill>
+                        <a:srgbClr val="3C7D4D"/>
+                      </a:solidFill>
+                      <a:prstDash val="solid"/>
+                    </a:lnT>
+                    <a:lnB w="6350" cap="flat" cmpd="sng" algn="ctr">
+                      <a:solidFill>
+                        <a:srgbClr val="3C7D4D"/>
+                      </a:solidFill>
+                      <a:prstDash val="solid"/>
+                    </a:lnB>
+                  </a:tcPr>
+                </a:tc>
+              </a:tr>
+              <a:tr h="265176">
+                <a:tc>
+                  <a:txBody>
+                    <a:bodyPr/>
+                    <a:lstStyle/>
+                    <a:p>
+                      <a:r>
+                        <a:rPr sz="1000" b="1">
+                          <a:solidFill>
+                            <a:srgbClr val="15181A"/>
+                          </a:solidFill>
+                          <a:latin typeface="Arial"/>
+                        </a:rPr>
+                        <a:t>Q4 2025</a:t>
+                      </a:r>
+                    </a:p>
+                  </a:txBody>
+                  <a:tcPr marL="73152" marR="73152" marT="27432" marB="27432" anchor="t">
+                    <a:solidFill>
+                      <a:srgbClr val="FFFFFF"/>
+                    </a:solidFill>
+                    <a:lnL w="6350" cap="flat" cmpd="sng" algn="ctr">
+                      <a:solidFill>
+                        <a:srgbClr val="E2E6E3"/>
+                      </a:solidFill>
+                      <a:prstDash val="solid"/>
+                    </a:lnL>
+                    <a:lnR w="6350" cap="flat" cmpd="sng" algn="ctr">
+                      <a:solidFill>
+                        <a:srgbClr val="E2E6E3"/>
+                      </a:solidFill>
+                      <a:prstDash val="solid"/>
+                    </a:lnR>
+                    <a:lnT w="6350" cap="flat" cmpd="sng" algn="ctr">
+                      <a:solidFill>
+                        <a:srgbClr val="E2E6E3"/>
+                      </a:solidFill>
+                      <a:prstDash val="solid"/>
+                    </a:lnT>
+                    <a:lnB w="6350" cap="flat" cmpd="sng" algn="ctr">
+                      <a:solidFill>
+                        <a:srgbClr val="E2E6E3"/>
+                      </a:solidFill>
+                      <a:prstDash val="solid"/>
+                    </a:lnB>
+                  </a:tcPr>
+                </a:tc>
+                <a:tc>
+                  <a:txBody>
+                    <a:bodyPr/>
+                    <a:lstStyle/>
+                    <a:p>
+                      <a:r>
+                        <a:rPr sz="1000" b="0">
+                          <a:solidFill>
+                            <a:srgbClr val="5B6670"/>
+                          </a:solidFill>
+                          <a:latin typeface="Arial"/>
+                        </a:rPr>
+                        <a:t/>
+                      </a:r>
+                    </a:p>
+                  </a:txBody>
+                  <a:tcPr marL="73152" marR="73152" marT="27432" marB="27432" anchor="t">
+                    <a:solidFill>
+                      <a:srgbClr val="FFFFFF"/>
+                    </a:solidFill>
+                    <a:lnL w="6350" cap="flat" cmpd="sng" algn="ctr">
+                      <a:solidFill>
+                        <a:srgbClr val="E2E6E3"/>
+                      </a:solidFill>
+                      <a:prstDash val="solid"/>
+                    </a:lnL>
+                    <a:lnR w="6350" cap="flat" cmpd="sng" algn="ctr">
+                      <a:solidFill>
+                        <a:srgbClr val="E2E6E3"/>
+                      </a:solidFill>
+                      <a:prstDash val="solid"/>
+                    </a:lnR>
+                    <a:lnT w="6350" cap="flat" cmpd="sng" algn="ctr">
+                      <a:solidFill>
+                        <a:srgbClr val="E2E6E3"/>
+                      </a:solidFill>
+                      <a:prstDash val="solid"/>
+                    </a:lnT>
+                    <a:lnB w="6350" cap="flat" cmpd="sng" algn="ctr">
+                      <a:solidFill>
+                        <a:srgbClr val="E2E6E3"/>
+                      </a:solidFill>
+                      <a:prstDash val="solid"/>
+                    </a:lnB>
+                  </a:tcPr>
+                </a:tc>
+                <a:tc>
+                  <a:txBody>
+                    <a:bodyPr/>
+                    <a:lstStyle/>
+                    <a:p>
+                      <a:r>
+                        <a:rPr sz="1000" b="0">
+                          <a:solidFill>
+                            <a:srgbClr val="5B6670"/>
+                          </a:solidFill>
+                          <a:latin typeface="Arial"/>
+                        </a:rPr>
+                        <a:t/>
+                      </a:r>
+                    </a:p>
+                  </a:txBody>
+                  <a:tcPr marL="73152" marR="73152" marT="27432" marB="27432" anchor="t">
+                    <a:solidFill>
+                      <a:srgbClr val="FFFFFF"/>
+                    </a:solidFill>
+                    <a:lnL w="6350" cap="flat" cmpd="sng" algn="ctr">
+                      <a:solidFill>
+                        <a:srgbClr val="E2E6E3"/>
+                      </a:solidFill>
+                      <a:prstDash val="solid"/>
+                    </a:lnL>
+                    <a:lnR w="6350" cap="flat" cmpd="sng" algn="ctr">
+                      <a:solidFill>
+                        <a:srgbClr val="E2E6E3"/>
+                      </a:solidFill>
+                      <a:prstDash val="solid"/>
+                    </a:lnR>
+                    <a:lnT w="6350" cap="flat" cmpd="sng" algn="ctr">
+                      <a:solidFill>
+                        <a:srgbClr val="E2E6E3"/>
+                      </a:solidFill>
+                      <a:prstDash val="solid"/>
+                    </a:lnT>
+                    <a:lnB w="6350" cap="flat" cmpd="sng" algn="ctr">
+                      <a:solidFill>
+                        <a:srgbClr val="E2E6E3"/>
+                      </a:solidFill>
+                      <a:prstDash val="solid"/>
+                    </a:lnB>
+                  </a:tcPr>
+                </a:tc>
+                <a:tc>
+                  <a:txBody>
+                    <a:bodyPr/>
+                    <a:lstStyle/>
+                    <a:p>
+                      <a:r>
+                        <a:rPr sz="1000" b="0">
+                          <a:solidFill>
+                            <a:srgbClr val="5B6670"/>
+                          </a:solidFill>
+                          <a:latin typeface="Arial"/>
+                        </a:rPr>
+                        <a:t/>
+                      </a:r>
+                    </a:p>
+                  </a:txBody>
+                  <a:tcPr marL="73152" marR="73152" marT="27432" marB="27432" anchor="t">
+                    <a:solidFill>
+                      <a:srgbClr val="FFFFFF"/>
+                    </a:solidFill>
+                    <a:lnL w="6350" cap="flat" cmpd="sng" algn="ctr">
+                      <a:solidFill>
+                        <a:srgbClr val="E2E6E3"/>
+                      </a:solidFill>
+                      <a:prstDash val="solid"/>
+                    </a:lnL>
+                    <a:lnR w="6350" cap="flat" cmpd="sng" algn="ctr">
+                      <a:solidFill>
+                        <a:srgbClr val="E2E6E3"/>
+                      </a:solidFill>
+                      <a:prstDash val="solid"/>
+                    </a:lnR>
+                    <a:lnT w="6350" cap="flat" cmpd="sng" algn="ctr">
+                      <a:solidFill>
+                        <a:srgbClr val="E2E6E3"/>
+                      </a:solidFill>
+                      <a:prstDash val="solid"/>
+                    </a:lnT>
+                    <a:lnB w="6350" cap="flat" cmpd="sng" algn="ctr">
+                      <a:solidFill>
+                        <a:srgbClr val="E2E6E3"/>
+                      </a:solidFill>
+                      <a:prstDash val="solid"/>
+                    </a:lnB>
+                  </a:tcPr>
+                </a:tc>
+                <a:tc>
+                  <a:txBody>
+                    <a:bodyPr/>
+                    <a:lstStyle/>
+                    <a:p>
+                      <a:r>
+                        <a:rPr sz="1000" b="0">
+                          <a:solidFill>
+                            <a:srgbClr val="5B6670"/>
+                          </a:solidFill>
+                          <a:latin typeface="Arial"/>
+                        </a:rPr>
+                        <a:t/>
+                      </a:r>
+                    </a:p>
+                  </a:txBody>
+                  <a:tcPr marL="73152" marR="73152" marT="27432" marB="27432" anchor="t">
+                    <a:solidFill>
+                      <a:srgbClr val="FFFFFF"/>
+                    </a:solidFill>
+                    <a:lnL w="6350" cap="flat" cmpd="sng" algn="ctr">
+                      <a:solidFill>
+                        <a:srgbClr val="E2E6E3"/>
+                      </a:solidFill>
+                      <a:prstDash val="solid"/>
+                    </a:lnL>
+                    <a:lnR w="6350" cap="flat" cmpd="sng" algn="ctr">
+                      <a:solidFill>
+                        <a:srgbClr val="E2E6E3"/>
+                      </a:solidFill>
+                      <a:prstDash val="solid"/>
+                    </a:lnR>
+                    <a:lnT w="6350" cap="flat" cmpd="sng" algn="ctr">
+                      <a:solidFill>
+                        <a:srgbClr val="E2E6E3"/>
+                      </a:solidFill>
+                      <a:prstDash val="solid"/>
+                    </a:lnT>
+                    <a:lnB w="6350" cap="flat" cmpd="sng" algn="ctr">
+                      <a:solidFill>
+                        <a:srgbClr val="E2E6E3"/>
+                      </a:solidFill>
+                      <a:prstDash val="solid"/>
+                    </a:lnB>
+                  </a:tcPr>
+                </a:tc>
+              </a:tr>
+              <a:tr h="265176">
+                <a:tc>
+                  <a:txBody>
+                    <a:bodyPr/>
+                    <a:lstStyle/>
+                    <a:p>
+                      <a:r>
+                        <a:rPr sz="1000" b="1">
+                          <a:solidFill>
+                            <a:srgbClr val="15181A"/>
+                          </a:solidFill>
+                          <a:latin typeface="Arial"/>
+                        </a:rPr>
+                        <a:t>Q1 2026</a:t>
+                      </a:r>
+                    </a:p>
+                  </a:txBody>
+                  <a:tcPr marL="73152" marR="73152" marT="27432" marB="27432" anchor="t">
+                    <a:solidFill>
+                      <a:srgbClr val="FFFFFF"/>
+                    </a:solidFill>
+                    <a:lnL w="6350" cap="flat" cmpd="sng" algn="ctr">
+                      <a:solidFill>
+                        <a:srgbClr val="E2E6E3"/>
+                      </a:solidFill>
+                      <a:prstDash val="solid"/>
+                    </a:lnL>
+                    <a:lnR w="6350" cap="flat" cmpd="sng" algn="ctr">
+                      <a:solidFill>
+                        <a:srgbClr val="E2E6E3"/>
+                      </a:solidFill>
+                      <a:prstDash val="solid"/>
+                    </a:lnR>
+                    <a:lnT w="6350" cap="flat" cmpd="sng" algn="ctr">
+                      <a:solidFill>
+                        <a:srgbClr val="E2E6E3"/>
+                      </a:solidFill>
+                      <a:prstDash val="solid"/>
+                    </a:lnT>
+                    <a:lnB w="6350" cap="flat" cmpd="sng" algn="ctr">
+                      <a:solidFill>
+                        <a:srgbClr val="E2E6E3"/>
+                      </a:solidFill>
+                      <a:prstDash val="solid"/>
+                    </a:lnB>
+                  </a:tcPr>
+                </a:tc>
+                <a:tc>
+                  <a:txBody>
+                    <a:bodyPr/>
+                    <a:lstStyle/>
+                    <a:p>
+                      <a:r>
+                        <a:rPr sz="1000" b="0">
+                          <a:solidFill>
+                            <a:srgbClr val="5B6670"/>
+                          </a:solidFill>
+                          <a:latin typeface="Arial"/>
+                        </a:rPr>
+                        <a:t/>
+                      </a:r>
+                    </a:p>
+                  </a:txBody>
+                  <a:tcPr marL="73152" marR="73152" marT="27432" marB="27432" anchor="t">
+                    <a:solidFill>
+                      <a:srgbClr val="FFFFFF"/>
+                    </a:solidFill>
+                    <a:lnL w="6350" cap="flat" cmpd="sng" algn="ctr">
+                      <a:solidFill>
+                        <a:srgbClr val="E2E6E3"/>
+                      </a:solidFill>
+                      <a:prstDash val="solid"/>
+                    </a:lnL>
+                    <a:lnR w="6350" cap="flat" cmpd="sng" algn="ctr">
+                      <a:solidFill>
+                        <a:srgbClr val="E2E6E3"/>
+                      </a:solidFill>
+                      <a:prstDash val="solid"/>
+                    </a:lnR>
+                    <a:lnT w="6350" cap="flat" cmpd="sng" algn="ctr">
+                      <a:solidFill>
+                        <a:srgbClr val="E2E6E3"/>
+                      </a:solidFill>
+                      <a:prstDash val="solid"/>
+                    </a:lnT>
+                    <a:lnB w="6350" cap="flat" cmpd="sng" algn="ctr">
+                      <a:solidFill>
+                        <a:srgbClr val="E2E6E3"/>
+                      </a:solidFill>
+                      <a:prstDash val="solid"/>
+                    </a:lnB>
+                  </a:tcPr>
+                </a:tc>
+                <a:tc>
+                  <a:txBody>
+                    <a:bodyPr/>
+                    <a:lstStyle/>
+                    <a:p>
+                      <a:r>
+                        <a:rPr sz="1000" b="0">
+                          <a:solidFill>
+                            <a:srgbClr val="5B6670"/>
+                          </a:solidFill>
+                          <a:latin typeface="Arial"/>
+                        </a:rPr>
+                        <a:t/>
+                      </a:r>
+                    </a:p>
+                  </a:txBody>
+                  <a:tcPr marL="73152" marR="73152" marT="27432" marB="27432" anchor="t">
+                    <a:solidFill>
+                      <a:srgbClr val="FFFFFF"/>
+                    </a:solidFill>
+                    <a:lnL w="6350" cap="flat" cmpd="sng" algn="ctr">
+                      <a:solidFill>
+                        <a:srgbClr val="E2E6E3"/>
+                      </a:solidFill>
+                      <a:prstDash val="solid"/>
+                    </a:lnL>
+                    <a:lnR w="6350" cap="flat" cmpd="sng" algn="ctr">
+                      <a:solidFill>
+                        <a:srgbClr val="E2E6E3"/>
+                      </a:solidFill>
+                      <a:prstDash val="solid"/>
+                    </a:lnR>
+                    <a:lnT w="6350" cap="flat" cmpd="sng" algn="ctr">
+                      <a:solidFill>
+                        <a:srgbClr val="E2E6E3"/>
+                      </a:solidFill>
+                      <a:prstDash val="solid"/>
+                    </a:lnT>
+                    <a:lnB w="6350" cap="flat" cmpd="sng" algn="ctr">
+                      <a:solidFill>
+                        <a:srgbClr val="E2E6E3"/>
+                      </a:solidFill>
+                      <a:prstDash val="solid"/>
+                    </a:lnB>
+                  </a:tcPr>
+                </a:tc>
+                <a:tc>
+                  <a:txBody>
+                    <a:bodyPr/>
+                    <a:lstStyle/>
+                    <a:p>
+                      <a:r>
+                        <a:rPr sz="1000" b="0">
+                          <a:solidFill>
+                            <a:srgbClr val="5B6670"/>
+                          </a:solidFill>
+                          <a:latin typeface="Arial"/>
+                        </a:rPr>
+                        <a:t/>
+                      </a:r>
+                    </a:p>
+                  </a:txBody>
+                  <a:tcPr marL="73152" marR="73152" marT="27432" marB="27432" anchor="t">
+                    <a:solidFill>
+                      <a:srgbClr val="FFFFFF"/>
+                    </a:solidFill>
+                    <a:lnL w="6350" cap="flat" cmpd="sng" algn="ctr">
+                      <a:solidFill>
+                        <a:srgbClr val="E2E6E3"/>
+                      </a:solidFill>
+                      <a:prstDash val="solid"/>
+                    </a:lnL>
+                    <a:lnR w="6350" cap="flat" cmpd="sng" algn="ctr">
+                      <a:solidFill>
+                        <a:srgbClr val="E2E6E3"/>
+                      </a:solidFill>
+                      <a:prstDash val="solid"/>
+                    </a:lnR>
+                    <a:lnT w="6350" cap="flat" cmpd="sng" algn="ctr">
+                      <a:solidFill>
+                        <a:srgbClr val="E2E6E3"/>
+                      </a:solidFill>
+                      <a:prstDash val="solid"/>
+                    </a:lnT>
+                    <a:lnB w="6350" cap="flat" cmpd="sng" algn="ctr">
+                      <a:solidFill>
+                        <a:srgbClr val="E2E6E3"/>
+                      </a:solidFill>
+                      <a:prstDash val="solid"/>
+                    </a:lnB>
+                  </a:tcPr>
+                </a:tc>
+                <a:tc>
+                  <a:txBody>
+                    <a:bodyPr/>
+                    <a:lstStyle/>
+                    <a:p>
+                      <a:r>
+                        <a:rPr sz="1000" b="0">
+                          <a:solidFill>
+                            <a:srgbClr val="5B6670"/>
+                          </a:solidFill>
+                          <a:latin typeface="Arial"/>
+                        </a:rPr>
+                        <a:t/>
+                      </a:r>
+                    </a:p>
+                  </a:txBody>
+                  <a:tcPr marL="73152" marR="73152" marT="27432" marB="27432" anchor="t">
+                    <a:solidFill>
+                      <a:srgbClr val="FFFFFF"/>
+                    </a:solidFill>
+                    <a:lnL w="6350" cap="flat" cmpd="sng" algn="ctr">
+                      <a:solidFill>
+                        <a:srgbClr val="E2E6E3"/>
+                      </a:solidFill>
+                      <a:prstDash val="solid"/>
+                    </a:lnL>
+                    <a:lnR w="6350" cap="flat" cmpd="sng" algn="ctr">
+                      <a:solidFill>
+                        <a:srgbClr val="E2E6E3"/>
+                      </a:solidFill>
+                      <a:prstDash val="solid"/>
+                    </a:lnR>
+                    <a:lnT w="6350" cap="flat" cmpd="sng" algn="ctr">
+                      <a:solidFill>
+                        <a:srgbClr val="E2E6E3"/>
+                      </a:solidFill>
+                      <a:prstDash val="solid"/>
+                    </a:lnT>
+                    <a:lnB w="6350" cap="flat" cmpd="sng" algn="ctr">
+                      <a:solidFill>
+                        <a:srgbClr val="E2E6E3"/>
+                      </a:solidFill>
+                      <a:prstDash val="solid"/>
+                    </a:lnB>
+                  </a:tcPr>
+                </a:tc>
+              </a:tr>
+              <a:tr h="265176">
+                <a:tc>
+                  <a:txBody>
+                    <a:bodyPr/>
+                    <a:lstStyle/>
+                    <a:p>
+                      <a:r>
+                        <a:rPr sz="1000" b="1">
+                          <a:solidFill>
+                            <a:srgbClr val="15181A"/>
+                          </a:solidFill>
+                          <a:latin typeface="Arial"/>
+                        </a:rPr>
+                        <a:t>Q2 2026</a:t>
+                      </a:r>
+                    </a:p>
+                  </a:txBody>
+                  <a:tcPr marL="73152" marR="73152" marT="27432" marB="27432" anchor="t">
+                    <a:solidFill>
+                      <a:srgbClr val="FFFFFF"/>
+                    </a:solidFill>
+                    <a:lnL w="6350" cap="flat" cmpd="sng" algn="ctr">
+                      <a:solidFill>
+                        <a:srgbClr val="E2E6E3"/>
+                      </a:solidFill>
+                      <a:prstDash val="solid"/>
+                    </a:lnL>
+                    <a:lnR w="6350" cap="flat" cmpd="sng" algn="ctr">
+                      <a:solidFill>
+                        <a:srgbClr val="E2E6E3"/>
+                      </a:solidFill>
+                      <a:prstDash val="solid"/>
+                    </a:lnR>
+                    <a:lnT w="6350" cap="flat" cmpd="sng" algn="ctr">
+                      <a:solidFill>
+                        <a:srgbClr val="E2E6E3"/>
+                      </a:solidFill>
+                      <a:prstDash val="solid"/>
+                    </a:lnT>
+                    <a:lnB w="6350" cap="flat" cmpd="sng" algn="ctr">
+                      <a:solidFill>
+                        <a:srgbClr val="E2E6E3"/>
+                      </a:solidFill>
+                      <a:prstDash val="solid"/>
+                    </a:lnB>
+                  </a:tcPr>
+                </a:tc>
+                <a:tc>
+                  <a:txBody>
+                    <a:bodyPr/>
+                    <a:lstStyle/>
+                    <a:p>
+                      <a:r>
+                        <a:rPr sz="1000" b="0">
+                          <a:solidFill>
+                            <a:srgbClr val="5B6670"/>
+                          </a:solidFill>
+                          <a:latin typeface="Arial"/>
+                        </a:rPr>
+                        <a:t/>
+                      </a:r>
+                    </a:p>
+                  </a:txBody>
+                  <a:tcPr marL="73152" marR="73152" marT="27432" marB="27432" anchor="t">
+                    <a:solidFill>
+                      <a:srgbClr val="FFFFFF"/>
+                    </a:solidFill>
+                    <a:lnL w="6350" cap="flat" cmpd="sng" algn="ctr">
+                      <a:solidFill>
+                        <a:srgbClr val="E2E6E3"/>
+                      </a:solidFill>
+                      <a:prstDash val="solid"/>
+                    </a:lnL>
+                    <a:lnR w="6350" cap="flat" cmpd="sng" algn="ctr">
+                      <a:solidFill>
+                        <a:srgbClr val="E2E6E3"/>
+                      </a:solidFill>
+                      <a:prstDash val="solid"/>
+                    </a:lnR>
+                    <a:lnT w="6350" cap="flat" cmpd="sng" algn="ctr">
+                      <a:solidFill>
+                        <a:srgbClr val="E2E6E3"/>
+                      </a:solidFill>
+                      <a:prstDash val="solid"/>
+                    </a:lnT>
+                    <a:lnB w="6350" cap="flat" cmpd="sng" algn="ctr">
+                      <a:solidFill>
+                        <a:srgbClr val="E2E6E3"/>
+                      </a:solidFill>
+                      <a:prstDash val="solid"/>
+                    </a:lnB>
+                  </a:tcPr>
+                </a:tc>
+                <a:tc>
+                  <a:txBody>
+                    <a:bodyPr/>
+                    <a:lstStyle/>
+                    <a:p>
+                      <a:r>
+                        <a:rPr sz="1000" b="0">
+                          <a:solidFill>
+                            <a:srgbClr val="5B6670"/>
+                          </a:solidFill>
+                          <a:latin typeface="Arial"/>
+                        </a:rPr>
+                        <a:t/>
+                      </a:r>
+                    </a:p>
+                  </a:txBody>
+                  <a:tcPr marL="73152" marR="73152" marT="27432" marB="27432" anchor="t">
+                    <a:solidFill>
+                      <a:srgbClr val="FFFFFF"/>
+                    </a:solidFill>
+                    <a:lnL w="6350" cap="flat" cmpd="sng" algn="ctr">
+                      <a:solidFill>
+                        <a:srgbClr val="E2E6E3"/>
+                      </a:solidFill>
+                      <a:prstDash val="solid"/>
+                    </a:lnL>
+                    <a:lnR w="6350" cap="flat" cmpd="sng" algn="ctr">
+                      <a:solidFill>
+                        <a:srgbClr val="E2E6E3"/>
+                      </a:solidFill>
+                      <a:prstDash val="solid"/>
+                    </a:lnR>
+                    <a:lnT w="6350" cap="flat" cmpd="sng" algn="ctr">
+                      <a:solidFill>
+                        <a:srgbClr val="E2E6E3"/>
+                      </a:solidFill>
+                      <a:prstDash val="solid"/>
+                    </a:lnT>
+                    <a:lnB w="6350" cap="flat" cmpd="sng" algn="ctr">
+                      <a:solidFill>
+                        <a:srgbClr val="E2E6E3"/>
+                      </a:solidFill>
+                      <a:prstDash val="solid"/>
+                    </a:lnB>
+                  </a:tcPr>
+                </a:tc>
+                <a:tc>
+                  <a:txBody>
+                    <a:bodyPr/>
+                    <a:lstStyle/>
+                    <a:p>
+                      <a:r>
+                        <a:rPr sz="1000" b="0">
+                          <a:solidFill>
+                            <a:srgbClr val="5B6670"/>
+                          </a:solidFill>
+                          <a:latin typeface="Arial"/>
+                        </a:rPr>
+                        <a:t/>
+                      </a:r>
+                    </a:p>
+                  </a:txBody>
+                  <a:tcPr marL="73152" marR="73152" marT="27432" marB="27432" anchor="t">
+                    <a:solidFill>
+                      <a:srgbClr val="FFFFFF"/>
+                    </a:solidFill>
+                    <a:lnL w="6350" cap="flat" cmpd="sng" algn="ctr">
+                      <a:solidFill>
+                        <a:srgbClr val="E2E6E3"/>
+                      </a:solidFill>
+                      <a:prstDash val="solid"/>
+                    </a:lnL>
+                    <a:lnR w="6350" cap="flat" cmpd="sng" algn="ctr">
+                      <a:solidFill>
+                        <a:srgbClr val="E2E6E3"/>
+                      </a:solidFill>
+                      <a:prstDash val="solid"/>
+                    </a:lnR>
+                    <a:lnT w="6350" cap="flat" cmpd="sng" algn="ctr">
+                      <a:solidFill>
+                        <a:srgbClr val="E2E6E3"/>
+                      </a:solidFill>
+                      <a:prstDash val="solid"/>
+                    </a:lnT>
+                    <a:lnB w="6350" cap="flat" cmpd="sng" algn="ctr">
+                      <a:solidFill>
+                        <a:srgbClr val="E2E6E3"/>
+                      </a:solidFill>
+                      <a:prstDash val="solid"/>
+                    </a:lnB>
+                  </a:tcPr>
+                </a:tc>
+                <a:tc>
+                  <a:txBody>
+                    <a:bodyPr/>
+                    <a:lstStyle/>
+                    <a:p>
+                      <a:r>
+                        <a:rPr sz="1000" b="0">
+                          <a:solidFill>
+                            <a:srgbClr val="5B6670"/>
+                          </a:solidFill>
+                          <a:latin typeface="Arial"/>
+                        </a:rPr>
+                        <a:t/>
+                      </a:r>
+                    </a:p>
+                  </a:txBody>
+                  <a:tcPr marL="73152" marR="73152" marT="27432" marB="27432" anchor="t">
+                    <a:solidFill>
+                      <a:srgbClr val="FFFFFF"/>
+                    </a:solidFill>
+                    <a:lnL w="6350" cap="flat" cmpd="sng" algn="ctr">
+                      <a:solidFill>
+                        <a:srgbClr val="E2E6E3"/>
+                      </a:solidFill>
+                      <a:prstDash val="solid"/>
+                    </a:lnL>
+                    <a:lnR w="6350" cap="flat" cmpd="sng" algn="ctr">
+                      <a:solidFill>
+                        <a:srgbClr val="E2E6E3"/>
+                      </a:solidFill>
+                      <a:prstDash val="solid"/>
+                    </a:lnR>
+                    <a:lnT w="6350" cap="flat" cmpd="sng" algn="ctr">
+                      <a:solidFill>
+                        <a:srgbClr val="E2E6E3"/>
+                      </a:solidFill>
+                      <a:prstDash val="solid"/>
+                    </a:lnT>
+                    <a:lnB w="6350" cap="flat" cmpd="sng" algn="ctr">
+                      <a:solidFill>
+                        <a:srgbClr val="E2E6E3"/>
+                      </a:solidFill>
+                      <a:prstDash val="solid"/>
+                    </a:lnB>
+                  </a:tcPr>
+                </a:tc>
+              </a:tr>
+              <a:tr h="265176">
+                <a:tc>
+                  <a:txBody>
+                    <a:bodyPr/>
+                    <a:lstStyle/>
+                    <a:p>
+                      <a:r>
+                        <a:rPr sz="1000" b="1">
+                          <a:solidFill>
+                            <a:srgbClr val="15181A"/>
+                          </a:solidFill>
+                          <a:latin typeface="Arial"/>
+                        </a:rPr>
+                        <a:t>Q3 2026</a:t>
+                      </a:r>
+                    </a:p>
+                  </a:txBody>
+                  <a:tcPr marL="73152" marR="73152" marT="27432" marB="27432" anchor="t">
+                    <a:solidFill>
+                      <a:srgbClr val="FFFFFF"/>
+                    </a:solidFill>
+                    <a:lnL w="6350" cap="flat" cmpd="sng" algn="ctr">
+                      <a:solidFill>
+                        <a:srgbClr val="E2E6E3"/>
+                      </a:solidFill>
+                      <a:prstDash val="solid"/>
+                    </a:lnL>
+                    <a:lnR w="6350" cap="flat" cmpd="sng" algn="ctr">
+                      <a:solidFill>
+                        <a:srgbClr val="E2E6E3"/>
+                      </a:solidFill>
+                      <a:prstDash val="solid"/>
+                    </a:lnR>
+                    <a:lnT w="6350" cap="flat" cmpd="sng" algn="ctr">
+                      <a:solidFill>
+                        <a:srgbClr val="E2E6E3"/>
+                      </a:solidFill>
+                      <a:prstDash val="solid"/>
+                    </a:lnT>
+                    <a:lnB w="6350" cap="flat" cmpd="sng" algn="ctr">
+                      <a:solidFill>
+                        <a:srgbClr val="E2E6E3"/>
+                      </a:solidFill>
+                      <a:prstDash val="solid"/>
+                    </a:lnB>
+                  </a:tcPr>
+                </a:tc>
+                <a:tc>
+                  <a:txBody>
+                    <a:bodyPr/>
+                    <a:lstStyle/>
+                    <a:p>
+                      <a:r>
+                        <a:rPr sz="1000" b="0">
+                          <a:solidFill>
+                            <a:srgbClr val="5B6670"/>
+                          </a:solidFill>
+                          <a:latin typeface="Arial"/>
+                        </a:rPr>
+                        <a:t/>
+                      </a:r>
+                    </a:p>
+                  </a:txBody>
+                  <a:tcPr marL="73152" marR="73152" marT="27432" marB="27432" anchor="t">
+                    <a:solidFill>
+                      <a:srgbClr val="FFFFFF"/>
+                    </a:solidFill>
+                    <a:lnL w="6350" cap="flat" cmpd="sng" algn="ctr">
+                      <a:solidFill>
+                        <a:srgbClr val="E2E6E3"/>
+                      </a:solidFill>
+                      <a:prstDash val="solid"/>
+                    </a:lnL>
+                    <a:lnR w="6350" cap="flat" cmpd="sng" algn="ctr">
+                      <a:solidFill>
+                        <a:srgbClr val="E2E6E3"/>
+                      </a:solidFill>
+                      <a:prstDash val="solid"/>
+                    </a:lnR>
+                    <a:lnT w="6350" cap="flat" cmpd="sng" algn="ctr">
+                      <a:solidFill>
+                        <a:srgbClr val="E2E6E3"/>
+                      </a:solidFill>
+                      <a:prstDash val="solid"/>
+                    </a:lnT>
+                    <a:lnB w="6350" cap="flat" cmpd="sng" algn="ctr">
+                      <a:solidFill>
+                        <a:srgbClr val="E2E6E3"/>
+                      </a:solidFill>
+                      <a:prstDash val="solid"/>
+                    </a:lnB>
+                  </a:tcPr>
+                </a:tc>
+                <a:tc>
+                  <a:txBody>
+                    <a:bodyPr/>
+                    <a:lstStyle/>
+                    <a:p>
+                      <a:r>
+                        <a:rPr sz="1000" b="0">
+                          <a:solidFill>
+                            <a:srgbClr val="5B6670"/>
+                          </a:solidFill>
+                          <a:latin typeface="Arial"/>
+                        </a:rPr>
+                        <a:t/>
+                      </a:r>
+                    </a:p>
+                  </a:txBody>
+                  <a:tcPr marL="73152" marR="73152" marT="27432" marB="27432" anchor="t">
+                    <a:solidFill>
+                      <a:srgbClr val="FFFFFF"/>
+                    </a:solidFill>
+                    <a:lnL w="6350" cap="flat" cmpd="sng" algn="ctr">
+                      <a:solidFill>
+                        <a:srgbClr val="E2E6E3"/>
+                      </a:solidFill>
+                      <a:prstDash val="solid"/>
+                    </a:lnL>
+                    <a:lnR w="6350" cap="flat" cmpd="sng" algn="ctr">
+                      <a:solidFill>
+                        <a:srgbClr val="E2E6E3"/>
+                      </a:solidFill>
+                      <a:prstDash val="solid"/>
+                    </a:lnR>
+                    <a:lnT w="6350" cap="flat" cmpd="sng" algn="ctr">
+                      <a:solidFill>
+                        <a:srgbClr val="E2E6E3"/>
+                      </a:solidFill>
+                      <a:prstDash val="solid"/>
+                    </a:lnT>
+                    <a:lnB w="6350" cap="flat" cmpd="sng" algn="ctr">
+                      <a:solidFill>
+                        <a:srgbClr val="E2E6E3"/>
+                      </a:solidFill>
+                      <a:prstDash val="solid"/>
+                    </a:lnB>
+                  </a:tcPr>
+                </a:tc>
+                <a:tc>
+                  <a:txBody>
+                    <a:bodyPr/>
+                    <a:lstStyle/>
+                    <a:p>
+                      <a:r>
+                        <a:rPr sz="1000" b="0">
+                          <a:solidFill>
+                            <a:srgbClr val="5B6670"/>
+                          </a:solidFill>
+                          <a:latin typeface="Arial"/>
+                        </a:rPr>
+                        <a:t/>
+                      </a:r>
+                    </a:p>
+                  </a:txBody>
+                  <a:tcPr marL="73152" marR="73152" marT="27432" marB="27432" anchor="t">
+                    <a:solidFill>
+                      <a:srgbClr val="FFFFFF"/>
+                    </a:solidFill>
+                    <a:lnL w="6350" cap="flat" cmpd="sng" algn="ctr">
+                      <a:solidFill>
+                        <a:srgbClr val="E2E6E3"/>
+                      </a:solidFill>
+                      <a:prstDash val="solid"/>
+                    </a:lnL>
+                    <a:lnR w="6350" cap="flat" cmpd="sng" algn="ctr">
+                      <a:solidFill>
+                        <a:srgbClr val="E2E6E3"/>
+                      </a:solidFill>
+                      <a:prstDash val="solid"/>
+                    </a:lnR>
+                    <a:lnT w="6350" cap="flat" cmpd="sng" algn="ctr">
+                      <a:solidFill>
+                        <a:srgbClr val="E2E6E3"/>
+                      </a:solidFill>
+                      <a:prstDash val="solid"/>
+                    </a:lnT>
+                    <a:lnB w="6350" cap="flat" cmpd="sng" algn="ctr">
+                      <a:solidFill>
+                        <a:srgbClr val="E2E6E3"/>
+                      </a:solidFill>
+                      <a:prstDash val="solid"/>
+                    </a:lnB>
+                  </a:tcPr>
+                </a:tc>
+                <a:tc>
+                  <a:txBody>
+                    <a:bodyPr/>
+                    <a:lstStyle/>
+                    <a:p>
+                      <a:r>
+                        <a:rPr sz="1000" b="0">
+                          <a:solidFill>
+                            <a:srgbClr val="5B6670"/>
+                          </a:solidFill>
+                          <a:latin typeface="Arial"/>
+                        </a:rPr>
+                        <a:t/>
+                      </a:r>
+                    </a:p>
+                  </a:txBody>
+                  <a:tcPr marL="73152" marR="73152" marT="27432" marB="27432" anchor="t">
+                    <a:solidFill>
+                      <a:srgbClr val="FFFFFF"/>
+                    </a:solidFill>
+                    <a:lnL w="6350" cap="flat" cmpd="sng" algn="ctr">
+                      <a:solidFill>
+                        <a:srgbClr val="E2E6E3"/>
+                      </a:solidFill>
+                      <a:prstDash val="solid"/>
+                    </a:lnL>
+                    <a:lnR w="6350" cap="flat" cmpd="sng" algn="ctr">
+                      <a:solidFill>
+                        <a:srgbClr val="E2E6E3"/>
+                      </a:solidFill>
+                      <a:prstDash val="solid"/>
+                    </a:lnR>
+                    <a:lnT w="6350" cap="flat" cmpd="sng" algn="ctr">
+                      <a:solidFill>
+                        <a:srgbClr val="E2E6E3"/>
+                      </a:solidFill>
+                      <a:prstDash val="solid"/>
+                    </a:lnT>
+                    <a:lnB w="6350" cap="flat" cmpd="sng" algn="ctr">
+                      <a:solidFill>
+                        <a:srgbClr val="E2E6E3"/>
+                      </a:solidFill>
+                      <a:prstDash val="solid"/>
+                    </a:lnB>
+                  </a:tcPr>
+                </a:tc>
+              </a:tr>
+            </a:tbl>
           </a:graphicData>
         </a:graphic>
       </p:graphicFrame>
@@ -10063,7 +10935,7 @@
         </p:nvSpPr>
         <p:spPr>
           <a:xfrm>
-            <a:off x="731520" y="4315968"/>
+            <a:off x="731520" y="3931920"/>
             <a:ext cx="5120640" cy="237744"/>
           </a:xfrm>
           <a:prstGeom prst="rect">
@@ -10097,8 +10969,8 @@
         </p:nvSpPr>
         <p:spPr>
           <a:xfrm>
-            <a:off x="731520" y="4572000"/>
-            <a:ext cx="5120640" cy="1463040"/>
+            <a:off x="731520" y="4187952"/>
+            <a:ext cx="5120640" cy="1847088"/>
           </a:xfrm>
           <a:prstGeom prst="rect">
             <a:avLst/>
@@ -12774,32 +13646,38 @@
           <a:lstStyle/>
           <a:p>
             <a:r>
-              <a:t>Job: [dealer, account, job name]</a:t>
-            </a:r>
-          </a:p>
-          <a:p>
-            <a:r>
+              <a:rPr sz="1400"/>
+              <a:t>Job: [dealer, account, job]</a:t>
+            </a:r>
+          </a:p>
+          <a:p>
+            <a:r>
+              <a:rPr sz="1400"/>
               <a:t>Who won: [competitor]</a:t>
             </a:r>
           </a:p>
           <a:p>
             <a:r>
-              <a:t>Their number: [$ or unknown]</a:t>
-            </a:r>
-          </a:p>
-          <a:p>
-            <a:r>
-              <a:t>Our number: [$]</a:t>
-            </a:r>
-          </a:p>
-          <a:p>
-            <a:r>
+              <a:rPr sz="1400"/>
+              <a:t>Their price: [$ or unknown]</a:t>
+            </a:r>
+          </a:p>
+          <a:p>
+            <a:r>
+              <a:rPr sz="1400"/>
+              <a:t>Lead time: ours / theirs [wks]</a:t>
+            </a:r>
+          </a:p>
+          <a:p>
+            <a:r>
+              <a:rPr sz="1400"/>
               <a:t>Why: [ ]</a:t>
             </a:r>
           </a:p>
           <a:p>
             <a:r>
-              <a:t>Lose it again today: [yes or no]</a:t>
+              <a:rPr sz="1400"/>
+              <a:t>Lose it again today: [yes/no]</a:t>
             </a:r>
           </a:p>
         </p:txBody>
@@ -12841,26 +13719,37 @@
           <a:lstStyle/>
           <a:p>
             <a:r>
-              <a:t>Job: [dealer, account, job name]</a:t>
-            </a:r>
-          </a:p>
-          <a:p>
-            <a:r>
+              <a:rPr sz="1400"/>
+              <a:t>Job: [dealer, account, job]</a:t>
+            </a:r>
+          </a:p>
+          <a:p>
+            <a:r>
+              <a:rPr sz="1400"/>
               <a:t>Who won: [competitor]</a:t>
             </a:r>
           </a:p>
           <a:p>
             <a:r>
-              <a:t>Why: [what they had that we didn't]</a:t>
-            </a:r>
-          </a:p>
-          <a:p>
-            <a:r>
-              <a:t>Lose it again today: [yes or no]</a:t>
-            </a:r>
-          </a:p>
-          <a:p>
-            <a:r>
+              <a:rPr sz="1400"/>
+              <a:t>Why: [what they had, we didn't]</a:t>
+            </a:r>
+          </a:p>
+          <a:p>
+            <a:r>
+              <a:rPr sz="1400"/>
+              <a:t>Lead time: ours / theirs [wks]</a:t>
+            </a:r>
+          </a:p>
+          <a:p>
+            <a:r>
+              <a:rPr sz="1400"/>
+              <a:t>Lose it again today: [yes/no]</a:t>
+            </a:r>
+          </a:p>
+          <a:p>
+            <a:r>
+              <a:rPr sz="1400"/>
               <a:t>No product loss? Say so here.</a:t>
             </a:r>
           </a:p>
@@ -12903,26 +13792,37 @@
           <a:lstStyle/>
           <a:p>
             <a:r>
-              <a:t>Job: [dealer, account, job name]</a:t>
-            </a:r>
-          </a:p>
-          <a:p>
-            <a:r>
+              <a:rPr sz="1400"/>
+              <a:t>Job: [dealer, account, job]</a:t>
+            </a:r>
+          </a:p>
+          <a:p>
+            <a:r>
+              <a:rPr sz="1400"/>
               <a:t>Who won: [competitor]</a:t>
             </a:r>
           </a:p>
           <a:p>
             <a:r>
-              <a:t>Why: [lead time, quoting, service]</a:t>
-            </a:r>
-          </a:p>
-          <a:p>
-            <a:r>
-              <a:t>Lose it again today: [yes or no]</a:t>
-            </a:r>
-          </a:p>
-          <a:p>
-            <a:r>
+              <a:rPr sz="1400"/>
+              <a:t>Lead time: ours / theirs [wks]</a:t>
+            </a:r>
+          </a:p>
+          <a:p>
+            <a:r>
+              <a:rPr sz="1400"/>
+              <a:t>Why: [quoting or service]</a:t>
+            </a:r>
+          </a:p>
+          <a:p>
+            <a:r>
+              <a:rPr sz="1400"/>
+              <a:t>Lose it again today: [yes/no]</a:t>
+            </a:r>
+          </a:p>
+          <a:p>
+            <a:r>
+              <a:rPr sz="1400"/>
               <a:t>No speed loss? Say so here.</a:t>
             </a:r>
           </a:p>

--- a/decks/territory-review/Territory Review Template - Walmart (Chad).pptx
+++ b/decks/territory-review/Territory Review Template - Walmart (Chad).pptx
@@ -12,6 +12,7 @@
     <p:sldId id="260" r:id="rId11"/>
     <p:sldId id="261" r:id="rId12"/>
     <p:sldId id="262" r:id="rId13"/>
+    <p:sldId id="263" r:id="rId14"/>
   </p:sldIdLst>
   <p:notesMasterIdLst>
     <p:notesMasterId r:id="rId17"/>
@@ -507,7 +508,7 @@
           <a:lstStyle/>
           <a:p>
             <a:r>
-              <a:t>Ten minutes. Six slides. Real dealer, account, and job names. No new data pulls.</a:t>
+              <a:t>Twelve minutes, hard stop, then questions. Seven slides. Real dealer, account, and job names. Slides 1 and 2 are pre-filled by Nate. You bring the story.</a:t>
             </a:r>
           </a:p>
         </p:txBody>
@@ -577,7 +578,7 @@
           <a:lstStyle/>
           <a:p>
             <a:r>
-              <a:t>Slide 1. Bookings and quotes by quarter, top accounts, Excalibur dealers. Pre-filled. Add a couple of sentences on what the numbers don't show.</a:t>
+              <a:t>Slide 1. Pre-filled. Bookings by quarter this year against last year, quote count, and the company lead time that quarter. Lead times were 30-plus weeks in the first half and have been back to 5 to 10 weeks since summer. Add a couple of sentences on what the numbers don't show.</a:t>
             </a:r>
           </a:p>
         </p:txBody>
@@ -647,7 +648,7 @@
           <a:lstStyle/>
           <a:p>
             <a:r>
-              <a:t>Slide 2 for Chad. The Walmart relationship. Who the decision makers are and what they want from us.</a:t>
+              <a:t>Slide 2 for Chad. Who the decision makers are at Walmart and what they want from us.</a:t>
             </a:r>
           </a:p>
         </p:txBody>
@@ -717,7 +718,7 @@
           <a:lstStyle/>
           <a:p>
             <a:r>
-              <a:t>Slide 3. Three wins. One on price, one on product, one on speed and support. Why we won, and whether it's repeatable.</a:t>
+              <a:t>Slide 3 for Chad. Estimated share of Walmart rack spend by program against Unarco, Frazier, and Interlake, and the large projects in the pipe with timing.</a:t>
             </a:r>
           </a:p>
         </p:txBody>
@@ -787,7 +788,7 @@
           <a:lstStyle/>
           <a:p>
             <a:r>
-              <a:t>Slide 4. Three losses. One on price, one on product, one on speed and support. Who won, why, and whether we'd lose it again today. On the price loss, include the competitor's number if you have it. If you don't, say unknown. On every loss, the lead time we quoted and the lead time the winner delivered. If you don't have a loss in one of the three buckets, say so on the slide.</a:t>
+              <a:t>Slide 4. Three wins. One on price, one on product, one on speed and support. Why we won, and whether it's repeatable.</a:t>
             </a:r>
           </a:p>
         </p:txBody>
@@ -857,7 +858,7 @@
           <a:lstStyle/>
           <a:p>
             <a:r>
-              <a:t>Slide 5. What we do well and what we don't. One of each for the company, for marketing, and for sales direction. Nate: I mean that last one. I'd rather hear it in the room than not at all.</a:t>
+              <a:t>Slide 5. Three losses. One on price, one on product, one on speed and support. Who won, why, and whether we'd lose it again today. On the price loss, include the competitor's number if you have it. If you don't, say unknown. On every loss, the lead time we quoted and the lead time the winner delivered. If you don't have a loss in one of the three buckets, say so on the slide.</a:t>
             </a:r>
           </a:p>
         </p:txBody>
@@ -927,7 +928,77 @@
           <a:lstStyle/>
           <a:p>
             <a:r>
-              <a:t>Slide 6 for Chad. Where Walmart grows in 2027.</a:t>
+              <a:t>Slide 6. What we do well and what we don't. One of each for the company, for marketing, and for sales direction. Nate: I mean that last one. I'd rather hear it in the room than not at all.</a:t>
+            </a:r>
+          </a:p>
+        </p:txBody>
+      </p:sp>
+      <p:sp>
+        <p:nvSpPr>
+          <p:cNvPr id="4" name="Slide Number Placeholder 3"/>
+          <p:cNvSpPr>
+            <a:spLocks noGrp="1"/>
+          </p:cNvSpPr>
+          <p:nvPr>
+            <p:ph type="sldNum" idx="5" sz="quarter"/>
+          </p:nvPr>
+        </p:nvSpPr>
+        <p:spPr/>
+      </p:sp>
+    </p:spTree>
+  </p:cSld>
+  <p:clrMapOvr>
+    <a:masterClrMapping/>
+  </p:clrMapOvr>
+</p:notes>
+</file>
+
+<file path=ppt/notesSlides/notesSlide8.xml><?xml version="1.0" encoding="utf-8"?>
+<p:notes xmlns:a="http://schemas.openxmlformats.org/drawingml/2006/main" xmlns:p="http://schemas.openxmlformats.org/presentationml/2006/main" xmlns:r="http://schemas.openxmlformats.org/officeDocument/2006/relationships">
+  <p:cSld>
+    <p:spTree>
+      <p:nvGrpSpPr>
+        <p:cNvPr id="1" name=""/>
+        <p:cNvGrpSpPr/>
+        <p:nvPr/>
+      </p:nvGrpSpPr>
+      <p:grpSpPr>
+        <a:xfrm>
+          <a:off x="0" y="0"/>
+          <a:ext cx="0" cy="0"/>
+          <a:chOff x="0" y="0"/>
+          <a:chExt cx="0" cy="0"/>
+        </a:xfrm>
+      </p:grpSpPr>
+      <p:sp>
+        <p:nvSpPr>
+          <p:cNvPr id="2" name="Slide Image Placeholder 1"/>
+          <p:cNvSpPr>
+            <a:spLocks noGrp="1"/>
+          </p:cNvSpPr>
+          <p:nvPr>
+            <p:ph type="sldImg" idx="2"/>
+          </p:nvPr>
+        </p:nvSpPr>
+        <p:spPr/>
+      </p:sp>
+      <p:sp>
+        <p:nvSpPr>
+          <p:cNvPr id="3" name="Notes Placeholder 2"/>
+          <p:cNvSpPr>
+            <a:spLocks noGrp="1"/>
+          </p:cNvSpPr>
+          <p:nvPr>
+            <p:ph type="body" idx="3" sz="quarter"/>
+          </p:nvPr>
+        </p:nvSpPr>
+        <p:spPr/>
+        <p:txBody>
+          <a:bodyPr/>
+          <a:lstStyle/>
+          <a:p>
+            <a:r>
+              <a:t>Slide 7 for Chad. Where Walmart grows in 2027.</a:t>
             </a:r>
           </a:p>
         </p:txBody>
@@ -9638,7 +9709,7 @@
           <a:lstStyle/>
           <a:p>
             <a:r>
-              <a:t>TERRITORY REVIEW  ·  1 OF 6  ·  BY THE NUMBERS</a:t>
+              <a:t>TERRITORY REVIEW  ·  1 OF 7  ·  BY THE NUMBERS</a:t>
             </a:r>
           </a:p>
         </p:txBody>
@@ -9701,7 +9772,7 @@
           <a:lstStyle/>
           <a:p>
             <a:r>
-              <a:t>Source: [system], pulled [date]. Hit rate is bookings divided by quotes. Lead time is the average we quoted that quarter.</a:t>
+              <a:t>Source: [system], pulled [date]. Quote count, not quote dollars. Lead time is the quoted lead time from the plant that quarter.</a:t>
             </a:r>
           </a:p>
         </p:txBody>
@@ -9715,7 +9786,7 @@
         <p:spPr>
           <a:xfrm>
             <a:off x="731520" y="2121408"/>
-            <a:ext cx="5120640" cy="237744"/>
+            <a:ext cx="10725912" cy="237744"/>
           </a:xfrm>
           <a:prstGeom prst="rect">
             <a:avLst/>
@@ -9735,7 +9806,7 @@
                 </a:solidFill>
                 <a:latin typeface="Arial"/>
               </a:rPr>
-              <a:t>BY QUARTER  ·  PRE-FILLED</a:t>
+              <a:t>BOOKINGS BY QUARTER, WITH THE COMPANY LEAD TIME THAT QUARTER  ·  PRE-FILLED</a:t>
             </a:r>
           </a:p>
         </p:txBody>
@@ -9750,18 +9821,19 @@
         </p:nvGraphicFramePr>
         <p:xfrm>
           <a:off x="731520" y="2377440"/>
-          <a:ext cx="5120640" cy="1335024"/>
+          <a:ext cx="10725912" cy="1600200"/>
         </p:xfrm>
         <a:graphic>
           <a:graphicData uri="http://schemas.openxmlformats.org/drawingml/2006/table">
             <a:tbl>
               <a:tblPr firstRow="0" bandRow="0"/>
               <a:tblGrid>
-                <a:gridCol w="1005840"/>
-                <a:gridCol w="1005840"/>
-                <a:gridCol w="1005840"/>
-                <a:gridCol w="868680"/>
-                <a:gridCol w="1234440"/>
+                <a:gridCol w="1463040"/>
+                <a:gridCol w="1828800"/>
+                <a:gridCol w="1828800"/>
+                <a:gridCol w="1463040"/>
+                <a:gridCol w="1828800"/>
+                <a:gridCol w="2313432"/>
               </a:tblGrid>
               <a:tr h="274320">
                 <a:tc>
@@ -9822,7 +9894,7 @@
                           </a:solidFill>
                           <a:latin typeface="Arial"/>
                         </a:rPr>
-                        <a:t>Bookings</a:t>
+                        <a:t>Bookings 2025</a:t>
                       </a:r>
                     </a:p>
                   </a:txBody>
@@ -9868,7 +9940,7 @@
                           </a:solidFill>
                           <a:latin typeface="Arial"/>
                         </a:rPr>
-                        <a:t>Quotes</a:t>
+                        <a:t>Bookings 2026</a:t>
                       </a:r>
                     </a:p>
                   </a:txBody>
@@ -9914,7 +9986,7 @@
                           </a:solidFill>
                           <a:latin typeface="Arial"/>
                         </a:rPr>
-                        <a:t>Hit rate</a:t>
+                        <a:t>Change</a:t>
                       </a:r>
                     </a:p>
                   </a:txBody>
@@ -9960,7 +10032,53 @@
                           </a:solidFill>
                           <a:latin typeface="Arial"/>
                         </a:rPr>
-                        <a:t>Quoted lead time</a:t>
+                        <a:t>Quotes 2026 (count)</a:t>
+                      </a:r>
+                    </a:p>
+                  </a:txBody>
+                  <a:tcPr marL="73152" marR="73152" marT="27432" marB="27432" anchor="ctr">
+                    <a:solidFill>
+                      <a:srgbClr val="3C7D4D"/>
+                    </a:solidFill>
+                    <a:lnL w="6350" cap="flat" cmpd="sng" algn="ctr">
+                      <a:solidFill>
+                        <a:srgbClr val="3C7D4D"/>
+                      </a:solidFill>
+                      <a:prstDash val="solid"/>
+                    </a:lnL>
+                    <a:lnR w="6350" cap="flat" cmpd="sng" algn="ctr">
+                      <a:solidFill>
+                        <a:srgbClr val="3C7D4D"/>
+                      </a:solidFill>
+                      <a:prstDash val="solid"/>
+                    </a:lnR>
+                    <a:lnT w="6350" cap="flat" cmpd="sng" algn="ctr">
+                      <a:solidFill>
+                        <a:srgbClr val="3C7D4D"/>
+                      </a:solidFill>
+                      <a:prstDash val="solid"/>
+                    </a:lnT>
+                    <a:lnB w="6350" cap="flat" cmpd="sng" algn="ctr">
+                      <a:solidFill>
+                        <a:srgbClr val="3C7D4D"/>
+                      </a:solidFill>
+                      <a:prstDash val="solid"/>
+                    </a:lnB>
+                  </a:tcPr>
+                </a:tc>
+                <a:tc>
+                  <a:txBody>
+                    <a:bodyPr/>
+                    <a:lstStyle/>
+                    <a:p>
+                      <a:r>
+                        <a:rPr sz="1000" b="1">
+                          <a:solidFill>
+                            <a:srgbClr val="FFFFFF"/>
+                          </a:solidFill>
+                          <a:latin typeface="Arial"/>
+                        </a:rPr>
+                        <a:t>Company lead time (wks)</a:t>
                       </a:r>
                     </a:p>
                   </a:txBody>
@@ -10008,7 +10126,7 @@
                           </a:solidFill>
                           <a:latin typeface="Arial"/>
                         </a:rPr>
-                        <a:t>Q4 2025</a:t>
+                        <a:t>Q1</a:t>
                       </a:r>
                     </a:p>
                   </a:txBody>
@@ -10226,6 +10344,52 @@
                     </a:lnB>
                   </a:tcPr>
                 </a:tc>
+                <a:tc>
+                  <a:txBody>
+                    <a:bodyPr/>
+                    <a:lstStyle/>
+                    <a:p>
+                      <a:r>
+                        <a:rPr sz="1000" b="0">
+                          <a:solidFill>
+                            <a:srgbClr val="5B6670"/>
+                          </a:solidFill>
+                          <a:latin typeface="Arial"/>
+                        </a:rPr>
+                        <a:t/>
+                      </a:r>
+                    </a:p>
+                  </a:txBody>
+                  <a:tcPr marL="73152" marR="73152" marT="27432" marB="27432" anchor="t">
+                    <a:solidFill>
+                      <a:srgbClr val="FFFFFF"/>
+                    </a:solidFill>
+                    <a:lnL w="6350" cap="flat" cmpd="sng" algn="ctr">
+                      <a:solidFill>
+                        <a:srgbClr val="E2E6E3"/>
+                      </a:solidFill>
+                      <a:prstDash val="solid"/>
+                    </a:lnL>
+                    <a:lnR w="6350" cap="flat" cmpd="sng" algn="ctr">
+                      <a:solidFill>
+                        <a:srgbClr val="E2E6E3"/>
+                      </a:solidFill>
+                      <a:prstDash val="solid"/>
+                    </a:lnR>
+                    <a:lnT w="6350" cap="flat" cmpd="sng" algn="ctr">
+                      <a:solidFill>
+                        <a:srgbClr val="E2E6E3"/>
+                      </a:solidFill>
+                      <a:prstDash val="solid"/>
+                    </a:lnT>
+                    <a:lnB w="6350" cap="flat" cmpd="sng" algn="ctr">
+                      <a:solidFill>
+                        <a:srgbClr val="E2E6E3"/>
+                      </a:solidFill>
+                      <a:prstDash val="solid"/>
+                    </a:lnB>
+                  </a:tcPr>
+                </a:tc>
               </a:tr>
               <a:tr h="265176">
                 <a:tc>
@@ -10240,7 +10404,7 @@
                           </a:solidFill>
                           <a:latin typeface="Arial"/>
                         </a:rPr>
-                        <a:t>Q1 2026</a:t>
+                        <a:t>Q2</a:t>
                       </a:r>
                     </a:p>
                   </a:txBody>
@@ -10458,6 +10622,52 @@
                     </a:lnB>
                   </a:tcPr>
                 </a:tc>
+                <a:tc>
+                  <a:txBody>
+                    <a:bodyPr/>
+                    <a:lstStyle/>
+                    <a:p>
+                      <a:r>
+                        <a:rPr sz="1000" b="0">
+                          <a:solidFill>
+                            <a:srgbClr val="5B6670"/>
+                          </a:solidFill>
+                          <a:latin typeface="Arial"/>
+                        </a:rPr>
+                        <a:t/>
+                      </a:r>
+                    </a:p>
+                  </a:txBody>
+                  <a:tcPr marL="73152" marR="73152" marT="27432" marB="27432" anchor="t">
+                    <a:solidFill>
+                      <a:srgbClr val="FFFFFF"/>
+                    </a:solidFill>
+                    <a:lnL w="6350" cap="flat" cmpd="sng" algn="ctr">
+                      <a:solidFill>
+                        <a:srgbClr val="E2E6E3"/>
+                      </a:solidFill>
+                      <a:prstDash val="solid"/>
+                    </a:lnL>
+                    <a:lnR w="6350" cap="flat" cmpd="sng" algn="ctr">
+                      <a:solidFill>
+                        <a:srgbClr val="E2E6E3"/>
+                      </a:solidFill>
+                      <a:prstDash val="solid"/>
+                    </a:lnR>
+                    <a:lnT w="6350" cap="flat" cmpd="sng" algn="ctr">
+                      <a:solidFill>
+                        <a:srgbClr val="E2E6E3"/>
+                      </a:solidFill>
+                      <a:prstDash val="solid"/>
+                    </a:lnT>
+                    <a:lnB w="6350" cap="flat" cmpd="sng" algn="ctr">
+                      <a:solidFill>
+                        <a:srgbClr val="E2E6E3"/>
+                      </a:solidFill>
+                      <a:prstDash val="solid"/>
+                    </a:lnB>
+                  </a:tcPr>
+                </a:tc>
               </a:tr>
               <a:tr h="265176">
                 <a:tc>
@@ -10472,7 +10682,7 @@
                           </a:solidFill>
                           <a:latin typeface="Arial"/>
                         </a:rPr>
-                        <a:t>Q2 2026</a:t>
+                        <a:t>Q3</a:t>
                       </a:r>
                     </a:p>
                   </a:txBody>
@@ -10690,6 +10900,52 @@
                     </a:lnB>
                   </a:tcPr>
                 </a:tc>
+                <a:tc>
+                  <a:txBody>
+                    <a:bodyPr/>
+                    <a:lstStyle/>
+                    <a:p>
+                      <a:r>
+                        <a:rPr sz="1000" b="0">
+                          <a:solidFill>
+                            <a:srgbClr val="5B6670"/>
+                          </a:solidFill>
+                          <a:latin typeface="Arial"/>
+                        </a:rPr>
+                        <a:t/>
+                      </a:r>
+                    </a:p>
+                  </a:txBody>
+                  <a:tcPr marL="73152" marR="73152" marT="27432" marB="27432" anchor="t">
+                    <a:solidFill>
+                      <a:srgbClr val="FFFFFF"/>
+                    </a:solidFill>
+                    <a:lnL w="6350" cap="flat" cmpd="sng" algn="ctr">
+                      <a:solidFill>
+                        <a:srgbClr val="E2E6E3"/>
+                      </a:solidFill>
+                      <a:prstDash val="solid"/>
+                    </a:lnL>
+                    <a:lnR w="6350" cap="flat" cmpd="sng" algn="ctr">
+                      <a:solidFill>
+                        <a:srgbClr val="E2E6E3"/>
+                      </a:solidFill>
+                      <a:prstDash val="solid"/>
+                    </a:lnR>
+                    <a:lnT w="6350" cap="flat" cmpd="sng" algn="ctr">
+                      <a:solidFill>
+                        <a:srgbClr val="E2E6E3"/>
+                      </a:solidFill>
+                      <a:prstDash val="solid"/>
+                    </a:lnT>
+                    <a:lnB w="6350" cap="flat" cmpd="sng" algn="ctr">
+                      <a:solidFill>
+                        <a:srgbClr val="E2E6E3"/>
+                      </a:solidFill>
+                      <a:prstDash val="solid"/>
+                    </a:lnB>
+                  </a:tcPr>
+                </a:tc>
               </a:tr>
               <a:tr h="265176">
                 <a:tc>
@@ -10704,7 +10960,7 @@
                           </a:solidFill>
                           <a:latin typeface="Arial"/>
                         </a:rPr>
-                        <a:t>Q3 2026</a:t>
+                        <a:t>Q4 to date</a:t>
                       </a:r>
                     </a:p>
                   </a:txBody>
@@ -10922,223 +11178,47 @@
                     </a:lnB>
                   </a:tcPr>
                 </a:tc>
-              </a:tr>
-            </a:tbl>
-          </a:graphicData>
-        </a:graphic>
-      </p:graphicFrame>
-      <p:sp>
-        <p:nvSpPr>
-          <p:cNvPr id="9" name="TextBox 8"/>
-          <p:cNvSpPr txBox="1"/>
-          <p:nvPr/>
-        </p:nvSpPr>
-        <p:spPr>
-          <a:xfrm>
-            <a:off x="731520" y="3931920"/>
-            <a:ext cx="5120640" cy="237744"/>
-          </a:xfrm>
-          <a:prstGeom prst="rect">
-            <a:avLst/>
-          </a:prstGeom>
-          <a:noFill/>
-        </p:spPr>
-        <p:txBody>
-          <a:bodyPr wrap="square" anchor="t" lIns="0" rIns="0" tIns="0" bIns="0">
-            <a:noAutofit/>
-          </a:bodyPr>
-          <a:lstStyle/>
-          <a:p>
-            <a:r>
-              <a:rPr sz="1100" b="1">
-                <a:solidFill>
-                  <a:srgbClr val="3C7D4D"/>
-                </a:solidFill>
-                <a:latin typeface="Arial"/>
-              </a:rPr>
-              <a:t>WHAT THE NUMBERS DON'T SHOW  ·  YOU FILL THIS IN</a:t>
-            </a:r>
-          </a:p>
-        </p:txBody>
-      </p:sp>
-      <p:sp>
-        <p:nvSpPr>
-          <p:cNvPr id="10" name="TextBox 9"/>
-          <p:cNvSpPr txBox="1"/>
-          <p:nvPr/>
-        </p:nvSpPr>
-        <p:spPr>
-          <a:xfrm>
-            <a:off x="731520" y="4187952"/>
-            <a:ext cx="5120640" cy="1847088"/>
-          </a:xfrm>
-          <a:prstGeom prst="rect">
-            <a:avLst/>
-          </a:prstGeom>
-          <a:solidFill>
-            <a:srgbClr val="F2F5F2"/>
-          </a:solidFill>
-        </p:spPr>
-        <p:txBody>
-          <a:bodyPr wrap="square" anchor="t" tIns="54864" bIns="54864">
-            <a:noAutofit/>
-          </a:bodyPr>
-          <a:lstStyle/>
-          <a:p>
-            <a:r>
-              <a:rPr sz="1200" b="0">
-                <a:solidFill>
-                  <a:srgbClr val="5B6670"/>
-                </a:solidFill>
-                <a:latin typeface="Arial"/>
-              </a:rPr>
-              <a:t>[Two or three sentences. What is happening in the territory that bookings and quotes don't capture. A dealer in transition, a job that slipped a quarter, a competitor that showed up, a plant issue that cost you.]</a:t>
-            </a:r>
-          </a:p>
-        </p:txBody>
-      </p:sp>
-      <p:sp>
-        <p:nvSpPr>
-          <p:cNvPr id="11" name="TextBox 10"/>
-          <p:cNvSpPr txBox="1"/>
-          <p:nvPr/>
-        </p:nvSpPr>
-        <p:spPr>
-          <a:xfrm>
-            <a:off x="6519672" y="2121408"/>
-            <a:ext cx="4937760" cy="237744"/>
-          </a:xfrm>
-          <a:prstGeom prst="rect">
-            <a:avLst/>
-          </a:prstGeom>
-          <a:noFill/>
-        </p:spPr>
-        <p:txBody>
-          <a:bodyPr wrap="square" anchor="t" lIns="0" rIns="0" tIns="0" bIns="0">
-            <a:noAutofit/>
-          </a:bodyPr>
-          <a:lstStyle/>
-          <a:p>
-            <a:r>
-              <a:rPr sz="1100" b="1">
-                <a:solidFill>
-                  <a:srgbClr val="3C7D4D"/>
-                </a:solidFill>
-                <a:latin typeface="Arial"/>
-              </a:rPr>
-              <a:t>TOP ACCOUNTS, YTD BOOKINGS  ·  PRE-FILLED</a:t>
-            </a:r>
-          </a:p>
-        </p:txBody>
-      </p:sp>
-      <p:graphicFrame>
-        <p:nvGraphicFramePr>
-          <p:cNvPr id="12" name="Table 11"/>
-          <p:cNvGraphicFramePr>
-            <a:graphicFrameLocks noGrp="1"/>
-          </p:cNvGraphicFramePr>
-          <p:nvPr/>
-        </p:nvGraphicFramePr>
-        <p:xfrm>
-          <a:off x="6519672" y="2377440"/>
-          <a:ext cx="4937760" cy="1591056"/>
-        </p:xfrm>
-        <a:graphic>
-          <a:graphicData uri="http://schemas.openxmlformats.org/drawingml/2006/table">
-            <a:tbl>
-              <a:tblPr firstRow="0" bandRow="0"/>
-              <a:tblGrid>
-                <a:gridCol w="3108960"/>
-                <a:gridCol w="1828800"/>
-              </a:tblGrid>
-              <a:tr h="265176">
                 <a:tc>
                   <a:txBody>
                     <a:bodyPr/>
                     <a:lstStyle/>
                     <a:p>
                       <a:r>
-                        <a:rPr sz="1000" b="1">
+                        <a:rPr sz="1000" b="0">
                           <a:solidFill>
-                            <a:srgbClr val="FFFFFF"/>
+                            <a:srgbClr val="5B6670"/>
                           </a:solidFill>
                           <a:latin typeface="Arial"/>
                         </a:rPr>
-                        <a:t>Account</a:t>
+                        <a:t/>
                       </a:r>
                     </a:p>
                   </a:txBody>
-                  <a:tcPr marL="73152" marR="73152" marT="27432" marB="27432" anchor="ctr">
+                  <a:tcPr marL="73152" marR="73152" marT="27432" marB="27432" anchor="t">
                     <a:solidFill>
-                      <a:srgbClr val="3C7D4D"/>
+                      <a:srgbClr val="FFFFFF"/>
                     </a:solidFill>
                     <a:lnL w="6350" cap="flat" cmpd="sng" algn="ctr">
                       <a:solidFill>
-                        <a:srgbClr val="3C7D4D"/>
+                        <a:srgbClr val="E2E6E3"/>
                       </a:solidFill>
                       <a:prstDash val="solid"/>
                     </a:lnL>
                     <a:lnR w="6350" cap="flat" cmpd="sng" algn="ctr">
                       <a:solidFill>
-                        <a:srgbClr val="3C7D4D"/>
+                        <a:srgbClr val="E2E6E3"/>
                       </a:solidFill>
                       <a:prstDash val="solid"/>
                     </a:lnR>
                     <a:lnT w="6350" cap="flat" cmpd="sng" algn="ctr">
                       <a:solidFill>
-                        <a:srgbClr val="3C7D4D"/>
+                        <a:srgbClr val="E2E6E3"/>
                       </a:solidFill>
                       <a:prstDash val="solid"/>
                     </a:lnT>
                     <a:lnB w="6350" cap="flat" cmpd="sng" algn="ctr">
                       <a:solidFill>
-                        <a:srgbClr val="3C7D4D"/>
-                      </a:solidFill>
-                      <a:prstDash val="solid"/>
-                    </a:lnB>
-                  </a:tcPr>
-                </a:tc>
-                <a:tc>
-                  <a:txBody>
-                    <a:bodyPr/>
-                    <a:lstStyle/>
-                    <a:p>
-                      <a:r>
-                        <a:rPr sz="1000" b="1">
-                          <a:solidFill>
-                            <a:srgbClr val="FFFFFF"/>
-                          </a:solidFill>
-                          <a:latin typeface="Arial"/>
-                        </a:rPr>
-                        <a:t>YTD bookings</a:t>
-                      </a:r>
-                    </a:p>
-                  </a:txBody>
-                  <a:tcPr marL="73152" marR="73152" marT="27432" marB="27432" anchor="ctr">
-                    <a:solidFill>
-                      <a:srgbClr val="3C7D4D"/>
-                    </a:solidFill>
-                    <a:lnL w="6350" cap="flat" cmpd="sng" algn="ctr">
-                      <a:solidFill>
-                        <a:srgbClr val="3C7D4D"/>
-                      </a:solidFill>
-                      <a:prstDash val="solid"/>
-                    </a:lnL>
-                    <a:lnR w="6350" cap="flat" cmpd="sng" algn="ctr">
-                      <a:solidFill>
-                        <a:srgbClr val="3C7D4D"/>
-                      </a:solidFill>
-                      <a:prstDash val="solid"/>
-                    </a:lnR>
-                    <a:lnT w="6350" cap="flat" cmpd="sng" algn="ctr">
-                      <a:solidFill>
-                        <a:srgbClr val="3C7D4D"/>
-                      </a:solidFill>
-                      <a:prstDash val="solid"/>
-                    </a:lnT>
-                    <a:lnB w="6350" cap="flat" cmpd="sng" algn="ctr">
-                      <a:solidFill>
-                        <a:srgbClr val="3C7D4D"/>
+                        <a:srgbClr val="E2E6E3"/>
                       </a:solidFill>
                       <a:prstDash val="solid"/>
                     </a:lnB>
@@ -11158,7 +11238,7 @@
                           </a:solidFill>
                           <a:latin typeface="Arial"/>
                         </a:rPr>
-                        <a:t>1.  </a:t>
+                        <a:t>YTD</a:t>
                       </a:r>
                     </a:p>
                   </a:txBody>
@@ -11238,21 +11318,19 @@
                     </a:lnB>
                   </a:tcPr>
                 </a:tc>
-              </a:tr>
-              <a:tr h="265176">
                 <a:tc>
                   <a:txBody>
                     <a:bodyPr/>
                     <a:lstStyle/>
                     <a:p>
                       <a:r>
-                        <a:rPr sz="1000" b="1">
+                        <a:rPr sz="1000" b="0">
                           <a:solidFill>
-                            <a:srgbClr val="15181A"/>
+                            <a:srgbClr val="5B6670"/>
                           </a:solidFill>
                           <a:latin typeface="Arial"/>
                         </a:rPr>
-                        <a:t>2.  </a:t>
+                        <a:t/>
                       </a:r>
                     </a:p>
                   </a:txBody>
@@ -11332,21 +11410,19 @@
                     </a:lnB>
                   </a:tcPr>
                 </a:tc>
-              </a:tr>
-              <a:tr h="265176">
                 <a:tc>
                   <a:txBody>
                     <a:bodyPr/>
                     <a:lstStyle/>
                     <a:p>
                       <a:r>
-                        <a:rPr sz="1000" b="1">
+                        <a:rPr sz="1000" b="0">
                           <a:solidFill>
-                            <a:srgbClr val="15181A"/>
+                            <a:srgbClr val="5B6670"/>
                           </a:solidFill>
                           <a:latin typeface="Arial"/>
                         </a:rPr>
-                        <a:t>3.  </a:t>
+                        <a:t/>
                       </a:r>
                     </a:p>
                   </a:txBody>
@@ -11427,208 +11503,20 @@
                   </a:tcPr>
                 </a:tc>
               </a:tr>
-              <a:tr h="265176">
-                <a:tc>
-                  <a:txBody>
-                    <a:bodyPr/>
-                    <a:lstStyle/>
-                    <a:p>
-                      <a:r>
-                        <a:rPr sz="1000" b="1">
-                          <a:solidFill>
-                            <a:srgbClr val="15181A"/>
-                          </a:solidFill>
-                          <a:latin typeface="Arial"/>
-                        </a:rPr>
-                        <a:t>4.  </a:t>
-                      </a:r>
-                    </a:p>
-                  </a:txBody>
-                  <a:tcPr marL="73152" marR="73152" marT="27432" marB="27432" anchor="t">
-                    <a:solidFill>
-                      <a:srgbClr val="FFFFFF"/>
-                    </a:solidFill>
-                    <a:lnL w="6350" cap="flat" cmpd="sng" algn="ctr">
-                      <a:solidFill>
-                        <a:srgbClr val="E2E6E3"/>
-                      </a:solidFill>
-                      <a:prstDash val="solid"/>
-                    </a:lnL>
-                    <a:lnR w="6350" cap="flat" cmpd="sng" algn="ctr">
-                      <a:solidFill>
-                        <a:srgbClr val="E2E6E3"/>
-                      </a:solidFill>
-                      <a:prstDash val="solid"/>
-                    </a:lnR>
-                    <a:lnT w="6350" cap="flat" cmpd="sng" algn="ctr">
-                      <a:solidFill>
-                        <a:srgbClr val="E2E6E3"/>
-                      </a:solidFill>
-                      <a:prstDash val="solid"/>
-                    </a:lnT>
-                    <a:lnB w="6350" cap="flat" cmpd="sng" algn="ctr">
-                      <a:solidFill>
-                        <a:srgbClr val="E2E6E3"/>
-                      </a:solidFill>
-                      <a:prstDash val="solid"/>
-                    </a:lnB>
-                  </a:tcPr>
-                </a:tc>
-                <a:tc>
-                  <a:txBody>
-                    <a:bodyPr/>
-                    <a:lstStyle/>
-                    <a:p>
-                      <a:r>
-                        <a:rPr sz="1000" b="0">
-                          <a:solidFill>
-                            <a:srgbClr val="5B6670"/>
-                          </a:solidFill>
-                          <a:latin typeface="Arial"/>
-                        </a:rPr>
-                        <a:t/>
-                      </a:r>
-                    </a:p>
-                  </a:txBody>
-                  <a:tcPr marL="73152" marR="73152" marT="27432" marB="27432" anchor="t">
-                    <a:solidFill>
-                      <a:srgbClr val="FFFFFF"/>
-                    </a:solidFill>
-                    <a:lnL w="6350" cap="flat" cmpd="sng" algn="ctr">
-                      <a:solidFill>
-                        <a:srgbClr val="E2E6E3"/>
-                      </a:solidFill>
-                      <a:prstDash val="solid"/>
-                    </a:lnL>
-                    <a:lnR w="6350" cap="flat" cmpd="sng" algn="ctr">
-                      <a:solidFill>
-                        <a:srgbClr val="E2E6E3"/>
-                      </a:solidFill>
-                      <a:prstDash val="solid"/>
-                    </a:lnR>
-                    <a:lnT w="6350" cap="flat" cmpd="sng" algn="ctr">
-                      <a:solidFill>
-                        <a:srgbClr val="E2E6E3"/>
-                      </a:solidFill>
-                      <a:prstDash val="solid"/>
-                    </a:lnT>
-                    <a:lnB w="6350" cap="flat" cmpd="sng" algn="ctr">
-                      <a:solidFill>
-                        <a:srgbClr val="E2E6E3"/>
-                      </a:solidFill>
-                      <a:prstDash val="solid"/>
-                    </a:lnB>
-                  </a:tcPr>
-                </a:tc>
-              </a:tr>
-              <a:tr h="265176">
-                <a:tc>
-                  <a:txBody>
-                    <a:bodyPr/>
-                    <a:lstStyle/>
-                    <a:p>
-                      <a:r>
-                        <a:rPr sz="1000" b="1">
-                          <a:solidFill>
-                            <a:srgbClr val="15181A"/>
-                          </a:solidFill>
-                          <a:latin typeface="Arial"/>
-                        </a:rPr>
-                        <a:t>5.  </a:t>
-                      </a:r>
-                    </a:p>
-                  </a:txBody>
-                  <a:tcPr marL="73152" marR="73152" marT="27432" marB="27432" anchor="t">
-                    <a:solidFill>
-                      <a:srgbClr val="FFFFFF"/>
-                    </a:solidFill>
-                    <a:lnL w="6350" cap="flat" cmpd="sng" algn="ctr">
-                      <a:solidFill>
-                        <a:srgbClr val="E2E6E3"/>
-                      </a:solidFill>
-                      <a:prstDash val="solid"/>
-                    </a:lnL>
-                    <a:lnR w="6350" cap="flat" cmpd="sng" algn="ctr">
-                      <a:solidFill>
-                        <a:srgbClr val="E2E6E3"/>
-                      </a:solidFill>
-                      <a:prstDash val="solid"/>
-                    </a:lnR>
-                    <a:lnT w="6350" cap="flat" cmpd="sng" algn="ctr">
-                      <a:solidFill>
-                        <a:srgbClr val="E2E6E3"/>
-                      </a:solidFill>
-                      <a:prstDash val="solid"/>
-                    </a:lnT>
-                    <a:lnB w="6350" cap="flat" cmpd="sng" algn="ctr">
-                      <a:solidFill>
-                        <a:srgbClr val="E2E6E3"/>
-                      </a:solidFill>
-                      <a:prstDash val="solid"/>
-                    </a:lnB>
-                  </a:tcPr>
-                </a:tc>
-                <a:tc>
-                  <a:txBody>
-                    <a:bodyPr/>
-                    <a:lstStyle/>
-                    <a:p>
-                      <a:r>
-                        <a:rPr sz="1000" b="0">
-                          <a:solidFill>
-                            <a:srgbClr val="5B6670"/>
-                          </a:solidFill>
-                          <a:latin typeface="Arial"/>
-                        </a:rPr>
-                        <a:t/>
-                      </a:r>
-                    </a:p>
-                  </a:txBody>
-                  <a:tcPr marL="73152" marR="73152" marT="27432" marB="27432" anchor="t">
-                    <a:solidFill>
-                      <a:srgbClr val="FFFFFF"/>
-                    </a:solidFill>
-                    <a:lnL w="6350" cap="flat" cmpd="sng" algn="ctr">
-                      <a:solidFill>
-                        <a:srgbClr val="E2E6E3"/>
-                      </a:solidFill>
-                      <a:prstDash val="solid"/>
-                    </a:lnL>
-                    <a:lnR w="6350" cap="flat" cmpd="sng" algn="ctr">
-                      <a:solidFill>
-                        <a:srgbClr val="E2E6E3"/>
-                      </a:solidFill>
-                      <a:prstDash val="solid"/>
-                    </a:lnR>
-                    <a:lnT w="6350" cap="flat" cmpd="sng" algn="ctr">
-                      <a:solidFill>
-                        <a:srgbClr val="E2E6E3"/>
-                      </a:solidFill>
-                      <a:prstDash val="solid"/>
-                    </a:lnT>
-                    <a:lnB w="6350" cap="flat" cmpd="sng" algn="ctr">
-                      <a:solidFill>
-                        <a:srgbClr val="E2E6E3"/>
-                      </a:solidFill>
-                      <a:prstDash val="solid"/>
-                    </a:lnB>
-                  </a:tcPr>
-                </a:tc>
-              </a:tr>
             </a:tbl>
           </a:graphicData>
         </a:graphic>
       </p:graphicFrame>
       <p:sp>
         <p:nvSpPr>
-          <p:cNvPr id="13" name="TextBox 12"/>
+          <p:cNvPr id="9" name="TextBox 8"/>
           <p:cNvSpPr txBox="1"/>
           <p:nvPr/>
         </p:nvSpPr>
         <p:spPr>
           <a:xfrm>
-            <a:off x="6519672" y="4096512"/>
-            <a:ext cx="4937760" cy="237744"/>
+            <a:off x="731520" y="4407408"/>
+            <a:ext cx="10725912" cy="237744"/>
           </a:xfrm>
           <a:prstGeom prst="rect">
             <a:avLst/>
@@ -11648,411 +11536,47 @@
                 </a:solidFill>
                 <a:latin typeface="Arial"/>
               </a:rPr>
-              <a:t>EXCALIBUR DEALERS, YTD BOOKINGS  ·  PRE-FILLED</a:t>
-            </a:r>
-          </a:p>
-        </p:txBody>
-      </p:sp>
-      <p:graphicFrame>
-        <p:nvGraphicFramePr>
-          <p:cNvPr id="14" name="Table 13"/>
-          <p:cNvGraphicFramePr>
-            <a:graphicFrameLocks noGrp="1"/>
-          </p:cNvGraphicFramePr>
+              <a:t>WHAT THE NUMBERS DON'T SHOW  ·  YOU FILL THIS IN</a:t>
+            </a:r>
+          </a:p>
+        </p:txBody>
+      </p:sp>
+      <p:sp>
+        <p:nvSpPr>
+          <p:cNvPr id="10" name="TextBox 9"/>
+          <p:cNvSpPr txBox="1"/>
           <p:nvPr/>
-        </p:nvGraphicFramePr>
-        <p:xfrm>
-          <a:off x="6519672" y="4352544"/>
-          <a:ext cx="4937760" cy="1060704"/>
-        </p:xfrm>
-        <a:graphic>
-          <a:graphicData uri="http://schemas.openxmlformats.org/drawingml/2006/table">
-            <a:tbl>
-              <a:tblPr firstRow="0" bandRow="0"/>
-              <a:tblGrid>
-                <a:gridCol w="3108960"/>
-                <a:gridCol w="1828800"/>
-              </a:tblGrid>
-              <a:tr h="265176">
-                <a:tc>
-                  <a:txBody>
-                    <a:bodyPr/>
-                    <a:lstStyle/>
-                    <a:p>
-                      <a:r>
-                        <a:rPr sz="1000" b="1">
-                          <a:solidFill>
-                            <a:srgbClr val="FFFFFF"/>
-                          </a:solidFill>
-                          <a:latin typeface="Arial"/>
-                        </a:rPr>
-                        <a:t>Dealer</a:t>
-                      </a:r>
-                    </a:p>
-                  </a:txBody>
-                  <a:tcPr marL="73152" marR="73152" marT="27432" marB="27432" anchor="ctr">
-                    <a:solidFill>
-                      <a:srgbClr val="3C7D4D"/>
-                    </a:solidFill>
-                    <a:lnL w="6350" cap="flat" cmpd="sng" algn="ctr">
-                      <a:solidFill>
-                        <a:srgbClr val="3C7D4D"/>
-                      </a:solidFill>
-                      <a:prstDash val="solid"/>
-                    </a:lnL>
-                    <a:lnR w="6350" cap="flat" cmpd="sng" algn="ctr">
-                      <a:solidFill>
-                        <a:srgbClr val="3C7D4D"/>
-                      </a:solidFill>
-                      <a:prstDash val="solid"/>
-                    </a:lnR>
-                    <a:lnT w="6350" cap="flat" cmpd="sng" algn="ctr">
-                      <a:solidFill>
-                        <a:srgbClr val="3C7D4D"/>
-                      </a:solidFill>
-                      <a:prstDash val="solid"/>
-                    </a:lnT>
-                    <a:lnB w="6350" cap="flat" cmpd="sng" algn="ctr">
-                      <a:solidFill>
-                        <a:srgbClr val="3C7D4D"/>
-                      </a:solidFill>
-                      <a:prstDash val="solid"/>
-                    </a:lnB>
-                  </a:tcPr>
-                </a:tc>
-                <a:tc>
-                  <a:txBody>
-                    <a:bodyPr/>
-                    <a:lstStyle/>
-                    <a:p>
-                      <a:r>
-                        <a:rPr sz="1000" b="1">
-                          <a:solidFill>
-                            <a:srgbClr val="FFFFFF"/>
-                          </a:solidFill>
-                          <a:latin typeface="Arial"/>
-                        </a:rPr>
-                        <a:t>YTD bookings</a:t>
-                      </a:r>
-                    </a:p>
-                  </a:txBody>
-                  <a:tcPr marL="73152" marR="73152" marT="27432" marB="27432" anchor="ctr">
-                    <a:solidFill>
-                      <a:srgbClr val="3C7D4D"/>
-                    </a:solidFill>
-                    <a:lnL w="6350" cap="flat" cmpd="sng" algn="ctr">
-                      <a:solidFill>
-                        <a:srgbClr val="3C7D4D"/>
-                      </a:solidFill>
-                      <a:prstDash val="solid"/>
-                    </a:lnL>
-                    <a:lnR w="6350" cap="flat" cmpd="sng" algn="ctr">
-                      <a:solidFill>
-                        <a:srgbClr val="3C7D4D"/>
-                      </a:solidFill>
-                      <a:prstDash val="solid"/>
-                    </a:lnR>
-                    <a:lnT w="6350" cap="flat" cmpd="sng" algn="ctr">
-                      <a:solidFill>
-                        <a:srgbClr val="3C7D4D"/>
-                      </a:solidFill>
-                      <a:prstDash val="solid"/>
-                    </a:lnT>
-                    <a:lnB w="6350" cap="flat" cmpd="sng" algn="ctr">
-                      <a:solidFill>
-                        <a:srgbClr val="3C7D4D"/>
-                      </a:solidFill>
-                      <a:prstDash val="solid"/>
-                    </a:lnB>
-                  </a:tcPr>
-                </a:tc>
-              </a:tr>
-              <a:tr h="265176">
-                <a:tc>
-                  <a:txBody>
-                    <a:bodyPr/>
-                    <a:lstStyle/>
-                    <a:p>
-                      <a:r>
-                        <a:rPr sz="1000" b="1">
-                          <a:solidFill>
-                            <a:srgbClr val="15181A"/>
-                          </a:solidFill>
-                          <a:latin typeface="Arial"/>
-                        </a:rPr>
-                        <a:t/>
-                      </a:r>
-                    </a:p>
-                  </a:txBody>
-                  <a:tcPr marL="73152" marR="73152" marT="27432" marB="27432" anchor="t">
-                    <a:solidFill>
-                      <a:srgbClr val="FFFFFF"/>
-                    </a:solidFill>
-                    <a:lnL w="6350" cap="flat" cmpd="sng" algn="ctr">
-                      <a:solidFill>
-                        <a:srgbClr val="E2E6E3"/>
-                      </a:solidFill>
-                      <a:prstDash val="solid"/>
-                    </a:lnL>
-                    <a:lnR w="6350" cap="flat" cmpd="sng" algn="ctr">
-                      <a:solidFill>
-                        <a:srgbClr val="E2E6E3"/>
-                      </a:solidFill>
-                      <a:prstDash val="solid"/>
-                    </a:lnR>
-                    <a:lnT w="6350" cap="flat" cmpd="sng" algn="ctr">
-                      <a:solidFill>
-                        <a:srgbClr val="E2E6E3"/>
-                      </a:solidFill>
-                      <a:prstDash val="solid"/>
-                    </a:lnT>
-                    <a:lnB w="6350" cap="flat" cmpd="sng" algn="ctr">
-                      <a:solidFill>
-                        <a:srgbClr val="E2E6E3"/>
-                      </a:solidFill>
-                      <a:prstDash val="solid"/>
-                    </a:lnB>
-                  </a:tcPr>
-                </a:tc>
-                <a:tc>
-                  <a:txBody>
-                    <a:bodyPr/>
-                    <a:lstStyle/>
-                    <a:p>
-                      <a:r>
-                        <a:rPr sz="1000" b="0">
-                          <a:solidFill>
-                            <a:srgbClr val="5B6670"/>
-                          </a:solidFill>
-                          <a:latin typeface="Arial"/>
-                        </a:rPr>
-                        <a:t/>
-                      </a:r>
-                    </a:p>
-                  </a:txBody>
-                  <a:tcPr marL="73152" marR="73152" marT="27432" marB="27432" anchor="t">
-                    <a:solidFill>
-                      <a:srgbClr val="FFFFFF"/>
-                    </a:solidFill>
-                    <a:lnL w="6350" cap="flat" cmpd="sng" algn="ctr">
-                      <a:solidFill>
-                        <a:srgbClr val="E2E6E3"/>
-                      </a:solidFill>
-                      <a:prstDash val="solid"/>
-                    </a:lnL>
-                    <a:lnR w="6350" cap="flat" cmpd="sng" algn="ctr">
-                      <a:solidFill>
-                        <a:srgbClr val="E2E6E3"/>
-                      </a:solidFill>
-                      <a:prstDash val="solid"/>
-                    </a:lnR>
-                    <a:lnT w="6350" cap="flat" cmpd="sng" algn="ctr">
-                      <a:solidFill>
-                        <a:srgbClr val="E2E6E3"/>
-                      </a:solidFill>
-                      <a:prstDash val="solid"/>
-                    </a:lnT>
-                    <a:lnB w="6350" cap="flat" cmpd="sng" algn="ctr">
-                      <a:solidFill>
-                        <a:srgbClr val="E2E6E3"/>
-                      </a:solidFill>
-                      <a:prstDash val="solid"/>
-                    </a:lnB>
-                  </a:tcPr>
-                </a:tc>
-              </a:tr>
-              <a:tr h="265176">
-                <a:tc>
-                  <a:txBody>
-                    <a:bodyPr/>
-                    <a:lstStyle/>
-                    <a:p>
-                      <a:r>
-                        <a:rPr sz="1000" b="1">
-                          <a:solidFill>
-                            <a:srgbClr val="15181A"/>
-                          </a:solidFill>
-                          <a:latin typeface="Arial"/>
-                        </a:rPr>
-                        <a:t/>
-                      </a:r>
-                    </a:p>
-                  </a:txBody>
-                  <a:tcPr marL="73152" marR="73152" marT="27432" marB="27432" anchor="t">
-                    <a:solidFill>
-                      <a:srgbClr val="FFFFFF"/>
-                    </a:solidFill>
-                    <a:lnL w="6350" cap="flat" cmpd="sng" algn="ctr">
-                      <a:solidFill>
-                        <a:srgbClr val="E2E6E3"/>
-                      </a:solidFill>
-                      <a:prstDash val="solid"/>
-                    </a:lnL>
-                    <a:lnR w="6350" cap="flat" cmpd="sng" algn="ctr">
-                      <a:solidFill>
-                        <a:srgbClr val="E2E6E3"/>
-                      </a:solidFill>
-                      <a:prstDash val="solid"/>
-                    </a:lnR>
-                    <a:lnT w="6350" cap="flat" cmpd="sng" algn="ctr">
-                      <a:solidFill>
-                        <a:srgbClr val="E2E6E3"/>
-                      </a:solidFill>
-                      <a:prstDash val="solid"/>
-                    </a:lnT>
-                    <a:lnB w="6350" cap="flat" cmpd="sng" algn="ctr">
-                      <a:solidFill>
-                        <a:srgbClr val="E2E6E3"/>
-                      </a:solidFill>
-                      <a:prstDash val="solid"/>
-                    </a:lnB>
-                  </a:tcPr>
-                </a:tc>
-                <a:tc>
-                  <a:txBody>
-                    <a:bodyPr/>
-                    <a:lstStyle/>
-                    <a:p>
-                      <a:r>
-                        <a:rPr sz="1000" b="0">
-                          <a:solidFill>
-                            <a:srgbClr val="5B6670"/>
-                          </a:solidFill>
-                          <a:latin typeface="Arial"/>
-                        </a:rPr>
-                        <a:t/>
-                      </a:r>
-                    </a:p>
-                  </a:txBody>
-                  <a:tcPr marL="73152" marR="73152" marT="27432" marB="27432" anchor="t">
-                    <a:solidFill>
-                      <a:srgbClr val="FFFFFF"/>
-                    </a:solidFill>
-                    <a:lnL w="6350" cap="flat" cmpd="sng" algn="ctr">
-                      <a:solidFill>
-                        <a:srgbClr val="E2E6E3"/>
-                      </a:solidFill>
-                      <a:prstDash val="solid"/>
-                    </a:lnL>
-                    <a:lnR w="6350" cap="flat" cmpd="sng" algn="ctr">
-                      <a:solidFill>
-                        <a:srgbClr val="E2E6E3"/>
-                      </a:solidFill>
-                      <a:prstDash val="solid"/>
-                    </a:lnR>
-                    <a:lnT w="6350" cap="flat" cmpd="sng" algn="ctr">
-                      <a:solidFill>
-                        <a:srgbClr val="E2E6E3"/>
-                      </a:solidFill>
-                      <a:prstDash val="solid"/>
-                    </a:lnT>
-                    <a:lnB w="6350" cap="flat" cmpd="sng" algn="ctr">
-                      <a:solidFill>
-                        <a:srgbClr val="E2E6E3"/>
-                      </a:solidFill>
-                      <a:prstDash val="solid"/>
-                    </a:lnB>
-                  </a:tcPr>
-                </a:tc>
-              </a:tr>
-              <a:tr h="265176">
-                <a:tc>
-                  <a:txBody>
-                    <a:bodyPr/>
-                    <a:lstStyle/>
-                    <a:p>
-                      <a:r>
-                        <a:rPr sz="1000" b="1">
-                          <a:solidFill>
-                            <a:srgbClr val="15181A"/>
-                          </a:solidFill>
-                          <a:latin typeface="Arial"/>
-                        </a:rPr>
-                        <a:t/>
-                      </a:r>
-                    </a:p>
-                  </a:txBody>
-                  <a:tcPr marL="73152" marR="73152" marT="27432" marB="27432" anchor="t">
-                    <a:solidFill>
-                      <a:srgbClr val="FFFFFF"/>
-                    </a:solidFill>
-                    <a:lnL w="6350" cap="flat" cmpd="sng" algn="ctr">
-                      <a:solidFill>
-                        <a:srgbClr val="E2E6E3"/>
-                      </a:solidFill>
-                      <a:prstDash val="solid"/>
-                    </a:lnL>
-                    <a:lnR w="6350" cap="flat" cmpd="sng" algn="ctr">
-                      <a:solidFill>
-                        <a:srgbClr val="E2E6E3"/>
-                      </a:solidFill>
-                      <a:prstDash val="solid"/>
-                    </a:lnR>
-                    <a:lnT w="6350" cap="flat" cmpd="sng" algn="ctr">
-                      <a:solidFill>
-                        <a:srgbClr val="E2E6E3"/>
-                      </a:solidFill>
-                      <a:prstDash val="solid"/>
-                    </a:lnT>
-                    <a:lnB w="6350" cap="flat" cmpd="sng" algn="ctr">
-                      <a:solidFill>
-                        <a:srgbClr val="E2E6E3"/>
-                      </a:solidFill>
-                      <a:prstDash val="solid"/>
-                    </a:lnB>
-                  </a:tcPr>
-                </a:tc>
-                <a:tc>
-                  <a:txBody>
-                    <a:bodyPr/>
-                    <a:lstStyle/>
-                    <a:p>
-                      <a:r>
-                        <a:rPr sz="1000" b="0">
-                          <a:solidFill>
-                            <a:srgbClr val="5B6670"/>
-                          </a:solidFill>
-                          <a:latin typeface="Arial"/>
-                        </a:rPr>
-                        <a:t/>
-                      </a:r>
-                    </a:p>
-                  </a:txBody>
-                  <a:tcPr marL="73152" marR="73152" marT="27432" marB="27432" anchor="t">
-                    <a:solidFill>
-                      <a:srgbClr val="FFFFFF"/>
-                    </a:solidFill>
-                    <a:lnL w="6350" cap="flat" cmpd="sng" algn="ctr">
-                      <a:solidFill>
-                        <a:srgbClr val="E2E6E3"/>
-                      </a:solidFill>
-                      <a:prstDash val="solid"/>
-                    </a:lnL>
-                    <a:lnR w="6350" cap="flat" cmpd="sng" algn="ctr">
-                      <a:solidFill>
-                        <a:srgbClr val="E2E6E3"/>
-                      </a:solidFill>
-                      <a:prstDash val="solid"/>
-                    </a:lnR>
-                    <a:lnT w="6350" cap="flat" cmpd="sng" algn="ctr">
-                      <a:solidFill>
-                        <a:srgbClr val="E2E6E3"/>
-                      </a:solidFill>
-                      <a:prstDash val="solid"/>
-                    </a:lnT>
-                    <a:lnB w="6350" cap="flat" cmpd="sng" algn="ctr">
-                      <a:solidFill>
-                        <a:srgbClr val="E2E6E3"/>
-                      </a:solidFill>
-                      <a:prstDash val="solid"/>
-                    </a:lnB>
-                  </a:tcPr>
-                </a:tc>
-              </a:tr>
-            </a:tbl>
-          </a:graphicData>
-        </a:graphic>
-      </p:graphicFrame>
+        </p:nvSpPr>
+        <p:spPr>
+          <a:xfrm>
+            <a:off x="731520" y="4663440"/>
+            <a:ext cx="10725912" cy="1371600"/>
+          </a:xfrm>
+          <a:prstGeom prst="rect">
+            <a:avLst/>
+          </a:prstGeom>
+          <a:solidFill>
+            <a:srgbClr val="F2F5F2"/>
+          </a:solidFill>
+        </p:spPr>
+        <p:txBody>
+          <a:bodyPr wrap="square" anchor="t" tIns="54864" bIns="54864">
+            <a:noAutofit/>
+          </a:bodyPr>
+          <a:lstStyle/>
+          <a:p>
+            <a:r>
+              <a:rPr sz="1200" b="0">
+                <a:solidFill>
+                  <a:srgbClr val="5B6670"/>
+                </a:solidFill>
+                <a:latin typeface="Arial"/>
+              </a:rPr>
+              <a:t>[Two or three sentences. What happened in the territory that bookings don't capture. If bookings didn't come back when lead time did, say why. If they did, say what you did to get them back.]</a:t>
+            </a:r>
+          </a:p>
+        </p:txBody>
+      </p:sp>
     </p:spTree>
   </p:cSld>
   <p:clrMapOvr>
@@ -12087,7 +11611,7 @@
           <a:lstStyle/>
           <a:p>
             <a:r>
-              <a:t>TERRITORY REVIEW  ·  2 OF 6  ·  WALMART</a:t>
+              <a:t>TERRITORY REVIEW  ·  2 OF 7  ·  WALMART</a:t>
             </a:r>
           </a:p>
         </p:txBody>
@@ -13310,7 +12834,7 @@
           <a:lstStyle/>
           <a:p>
             <a:r>
-              <a:t>TERRITORY REVIEW  ·  3 OF 6  ·  WINS</a:t>
+              <a:t>TERRITORY REVIEW  ·  3 OF 7  ·  SHARE OF WALLET</a:t>
             </a:r>
           </a:p>
         </p:txBody>
@@ -13331,7 +12855,7 @@
           <a:lstStyle/>
           <a:p>
             <a:r>
-              <a:t>Three wins</a:t>
+              <a:t>Where Walmart's rack dollars go</a:t>
             </a:r>
           </a:p>
         </p:txBody>
@@ -13352,28 +12876,7 @@
           <a:lstStyle/>
           <a:p>
             <a:r>
-              <a:t>[One line. The pattern across the three, or the one we should be copying.]</a:t>
-            </a:r>
-          </a:p>
-        </p:txBody>
-      </p:sp>
-      <p:sp>
-        <p:nvSpPr>
-          <p:cNvPr id="5" name="Text Placeholder 4"/>
-          <p:cNvSpPr>
-            <a:spLocks noGrp="1"/>
-          </p:cNvSpPr>
-          <p:nvPr>
-            <p:ph type="body" idx="106"/>
-          </p:nvPr>
-        </p:nvSpPr>
-        <p:spPr/>
-        <p:txBody>
-          <a:bodyPr/>
-          <a:lstStyle/>
-          <a:p>
-            <a:r>
-              <a:t>Price</a:t>
+              <a:t>[One line. Our share, who has the rest, and why.]</a:t>
             </a:r>
           </a:p>
         </p:txBody>
@@ -13385,7 +12888,7 @@
             <a:spLocks noGrp="1"/>
           </p:cNvSpPr>
           <p:nvPr>
-            <p:ph type="body" idx="107"/>
+            <p:ph type="body" idx="104"/>
           </p:nvPr>
         </p:nvSpPr>
         <p:spPr/>
@@ -13394,140 +12897,2452 @@
           <a:lstStyle/>
           <a:p>
             <a:r>
-              <a:t>Job: [dealer, account, job name]</a:t>
-            </a:r>
-          </a:p>
-          <a:p>
-            <a:r>
-              <a:t>Size: [$ and product]</a:t>
-            </a:r>
-          </a:p>
-          <a:p>
-            <a:r>
-              <a:t>Why we won on price: [ ]</a:t>
-            </a:r>
-          </a:p>
-          <a:p>
-            <a:r>
-              <a:t>Repeatable: [yes or no, and why]</a:t>
-            </a:r>
-          </a:p>
-        </p:txBody>
-      </p:sp>
-      <p:sp>
-        <p:nvSpPr>
-          <p:cNvPr id="7" name="Text Placeholder 6"/>
-          <p:cNvSpPr>
-            <a:spLocks noGrp="1"/>
-          </p:cNvSpPr>
-          <p:nvPr>
-            <p:ph type="body" idx="111"/>
-          </p:nvPr>
-        </p:nvSpPr>
-        <p:spPr/>
-        <p:txBody>
-          <a:bodyPr/>
+              <a:t>Source: share figures are Chad's estimate unless noted.</a:t>
+            </a:r>
+          </a:p>
+        </p:txBody>
+      </p:sp>
+      <p:sp>
+        <p:nvSpPr>
+          <p:cNvPr id="7" name="TextBox 6"/>
+          <p:cNvSpPr txBox="1"/>
+          <p:nvPr/>
+        </p:nvSpPr>
+        <p:spPr>
+          <a:xfrm>
+            <a:off x="731520" y="2121408"/>
+            <a:ext cx="10725912" cy="237744"/>
+          </a:xfrm>
+          <a:prstGeom prst="rect">
+            <a:avLst/>
+          </a:prstGeom>
+          <a:noFill/>
+        </p:spPr>
+        <p:txBody>
+          <a:bodyPr wrap="square" anchor="t" lIns="0" rIns="0" tIns="0" bIns="0">
+            <a:noAutofit/>
+          </a:bodyPr>
           <a:lstStyle/>
           <a:p>
             <a:r>
-              <a:t>Product</a:t>
-            </a:r>
-          </a:p>
-        </p:txBody>
-      </p:sp>
-      <p:sp>
-        <p:nvSpPr>
-          <p:cNvPr id="8" name="Text Placeholder 7"/>
-          <p:cNvSpPr>
-            <a:spLocks noGrp="1"/>
-          </p:cNvSpPr>
-          <p:nvPr>
-            <p:ph type="body" idx="112"/>
-          </p:nvPr>
-        </p:nvSpPr>
-        <p:spPr/>
-        <p:txBody>
-          <a:bodyPr/>
+              <a:rPr sz="1100" b="1">
+                <a:solidFill>
+                  <a:srgbClr val="3C7D4D"/>
+                </a:solidFill>
+                <a:latin typeface="Arial"/>
+              </a:rPr>
+              <a:t>SHARE OF WALMART RACK SPEND BY PROGRAM  ·  YOUR ESTIMATE, SAY SO</a:t>
+            </a:r>
+          </a:p>
+        </p:txBody>
+      </p:sp>
+      <p:graphicFrame>
+        <p:nvGraphicFramePr>
+          <p:cNvPr id="8" name="Table 7"/>
+          <p:cNvGraphicFramePr>
+            <a:graphicFrameLocks noGrp="1"/>
+          </p:cNvGraphicFramePr>
+          <p:nvPr/>
+        </p:nvGraphicFramePr>
+        <p:xfrm>
+          <a:off x="731520" y="2377440"/>
+          <a:ext cx="10725912" cy="1335024"/>
+        </p:xfrm>
+        <a:graphic>
+          <a:graphicData uri="http://schemas.openxmlformats.org/drawingml/2006/table">
+            <a:tbl>
+              <a:tblPr firstRow="0" bandRow="0"/>
+              <a:tblGrid>
+                <a:gridCol w="2496312"/>
+                <a:gridCol w="1371600"/>
+                <a:gridCol w="1371600"/>
+                <a:gridCol w="1371600"/>
+                <a:gridCol w="1371600"/>
+                <a:gridCol w="2743200"/>
+              </a:tblGrid>
+              <a:tr h="274320">
+                <a:tc>
+                  <a:txBody>
+                    <a:bodyPr/>
+                    <a:lstStyle/>
+                    <a:p>
+                      <a:r>
+                        <a:rPr sz="1000" b="1">
+                          <a:solidFill>
+                            <a:srgbClr val="FFFFFF"/>
+                          </a:solidFill>
+                          <a:latin typeface="Arial"/>
+                        </a:rPr>
+                        <a:t>Program or format</a:t>
+                      </a:r>
+                    </a:p>
+                  </a:txBody>
+                  <a:tcPr marL="73152" marR="73152" marT="27432" marB="27432" anchor="ctr">
+                    <a:solidFill>
+                      <a:srgbClr val="3C7D4D"/>
+                    </a:solidFill>
+                    <a:lnL w="6350" cap="flat" cmpd="sng" algn="ctr">
+                      <a:solidFill>
+                        <a:srgbClr val="3C7D4D"/>
+                      </a:solidFill>
+                      <a:prstDash val="solid"/>
+                    </a:lnL>
+                    <a:lnR w="6350" cap="flat" cmpd="sng" algn="ctr">
+                      <a:solidFill>
+                        <a:srgbClr val="3C7D4D"/>
+                      </a:solidFill>
+                      <a:prstDash val="solid"/>
+                    </a:lnR>
+                    <a:lnT w="6350" cap="flat" cmpd="sng" algn="ctr">
+                      <a:solidFill>
+                        <a:srgbClr val="3C7D4D"/>
+                      </a:solidFill>
+                      <a:prstDash val="solid"/>
+                    </a:lnT>
+                    <a:lnB w="6350" cap="flat" cmpd="sng" algn="ctr">
+                      <a:solidFill>
+                        <a:srgbClr val="3C7D4D"/>
+                      </a:solidFill>
+                      <a:prstDash val="solid"/>
+                    </a:lnB>
+                  </a:tcPr>
+                </a:tc>
+                <a:tc>
+                  <a:txBody>
+                    <a:bodyPr/>
+                    <a:lstStyle/>
+                    <a:p>
+                      <a:r>
+                        <a:rPr sz="1000" b="1">
+                          <a:solidFill>
+                            <a:srgbClr val="FFFFFF"/>
+                          </a:solidFill>
+                          <a:latin typeface="Arial"/>
+                        </a:rPr>
+                        <a:t>Steel King</a:t>
+                      </a:r>
+                    </a:p>
+                  </a:txBody>
+                  <a:tcPr marL="73152" marR="73152" marT="27432" marB="27432" anchor="ctr">
+                    <a:solidFill>
+                      <a:srgbClr val="3C7D4D"/>
+                    </a:solidFill>
+                    <a:lnL w="6350" cap="flat" cmpd="sng" algn="ctr">
+                      <a:solidFill>
+                        <a:srgbClr val="3C7D4D"/>
+                      </a:solidFill>
+                      <a:prstDash val="solid"/>
+                    </a:lnL>
+                    <a:lnR w="6350" cap="flat" cmpd="sng" algn="ctr">
+                      <a:solidFill>
+                        <a:srgbClr val="3C7D4D"/>
+                      </a:solidFill>
+                      <a:prstDash val="solid"/>
+                    </a:lnR>
+                    <a:lnT w="6350" cap="flat" cmpd="sng" algn="ctr">
+                      <a:solidFill>
+                        <a:srgbClr val="3C7D4D"/>
+                      </a:solidFill>
+                      <a:prstDash val="solid"/>
+                    </a:lnT>
+                    <a:lnB w="6350" cap="flat" cmpd="sng" algn="ctr">
+                      <a:solidFill>
+                        <a:srgbClr val="3C7D4D"/>
+                      </a:solidFill>
+                      <a:prstDash val="solid"/>
+                    </a:lnB>
+                  </a:tcPr>
+                </a:tc>
+                <a:tc>
+                  <a:txBody>
+                    <a:bodyPr/>
+                    <a:lstStyle/>
+                    <a:p>
+                      <a:r>
+                        <a:rPr sz="1000" b="1">
+                          <a:solidFill>
+                            <a:srgbClr val="FFFFFF"/>
+                          </a:solidFill>
+                          <a:latin typeface="Arial"/>
+                        </a:rPr>
+                        <a:t>Unarco</a:t>
+                      </a:r>
+                    </a:p>
+                  </a:txBody>
+                  <a:tcPr marL="73152" marR="73152" marT="27432" marB="27432" anchor="ctr">
+                    <a:solidFill>
+                      <a:srgbClr val="3C7D4D"/>
+                    </a:solidFill>
+                    <a:lnL w="6350" cap="flat" cmpd="sng" algn="ctr">
+                      <a:solidFill>
+                        <a:srgbClr val="3C7D4D"/>
+                      </a:solidFill>
+                      <a:prstDash val="solid"/>
+                    </a:lnL>
+                    <a:lnR w="6350" cap="flat" cmpd="sng" algn="ctr">
+                      <a:solidFill>
+                        <a:srgbClr val="3C7D4D"/>
+                      </a:solidFill>
+                      <a:prstDash val="solid"/>
+                    </a:lnR>
+                    <a:lnT w="6350" cap="flat" cmpd="sng" algn="ctr">
+                      <a:solidFill>
+                        <a:srgbClr val="3C7D4D"/>
+                      </a:solidFill>
+                      <a:prstDash val="solid"/>
+                    </a:lnT>
+                    <a:lnB w="6350" cap="flat" cmpd="sng" algn="ctr">
+                      <a:solidFill>
+                        <a:srgbClr val="3C7D4D"/>
+                      </a:solidFill>
+                      <a:prstDash val="solid"/>
+                    </a:lnB>
+                  </a:tcPr>
+                </a:tc>
+                <a:tc>
+                  <a:txBody>
+                    <a:bodyPr/>
+                    <a:lstStyle/>
+                    <a:p>
+                      <a:r>
+                        <a:rPr sz="1000" b="1">
+                          <a:solidFill>
+                            <a:srgbClr val="FFFFFF"/>
+                          </a:solidFill>
+                          <a:latin typeface="Arial"/>
+                        </a:rPr>
+                        <a:t>Frazier</a:t>
+                      </a:r>
+                    </a:p>
+                  </a:txBody>
+                  <a:tcPr marL="73152" marR="73152" marT="27432" marB="27432" anchor="ctr">
+                    <a:solidFill>
+                      <a:srgbClr val="3C7D4D"/>
+                    </a:solidFill>
+                    <a:lnL w="6350" cap="flat" cmpd="sng" algn="ctr">
+                      <a:solidFill>
+                        <a:srgbClr val="3C7D4D"/>
+                      </a:solidFill>
+                      <a:prstDash val="solid"/>
+                    </a:lnL>
+                    <a:lnR w="6350" cap="flat" cmpd="sng" algn="ctr">
+                      <a:solidFill>
+                        <a:srgbClr val="3C7D4D"/>
+                      </a:solidFill>
+                      <a:prstDash val="solid"/>
+                    </a:lnR>
+                    <a:lnT w="6350" cap="flat" cmpd="sng" algn="ctr">
+                      <a:solidFill>
+                        <a:srgbClr val="3C7D4D"/>
+                      </a:solidFill>
+                      <a:prstDash val="solid"/>
+                    </a:lnT>
+                    <a:lnB w="6350" cap="flat" cmpd="sng" algn="ctr">
+                      <a:solidFill>
+                        <a:srgbClr val="3C7D4D"/>
+                      </a:solidFill>
+                      <a:prstDash val="solid"/>
+                    </a:lnB>
+                  </a:tcPr>
+                </a:tc>
+                <a:tc>
+                  <a:txBody>
+                    <a:bodyPr/>
+                    <a:lstStyle/>
+                    <a:p>
+                      <a:r>
+                        <a:rPr sz="1000" b="1">
+                          <a:solidFill>
+                            <a:srgbClr val="FFFFFF"/>
+                          </a:solidFill>
+                          <a:latin typeface="Arial"/>
+                        </a:rPr>
+                        <a:t>Interlake / other</a:t>
+                      </a:r>
+                    </a:p>
+                  </a:txBody>
+                  <a:tcPr marL="73152" marR="73152" marT="27432" marB="27432" anchor="ctr">
+                    <a:solidFill>
+                      <a:srgbClr val="3C7D4D"/>
+                    </a:solidFill>
+                    <a:lnL w="6350" cap="flat" cmpd="sng" algn="ctr">
+                      <a:solidFill>
+                        <a:srgbClr val="3C7D4D"/>
+                      </a:solidFill>
+                      <a:prstDash val="solid"/>
+                    </a:lnL>
+                    <a:lnR w="6350" cap="flat" cmpd="sng" algn="ctr">
+                      <a:solidFill>
+                        <a:srgbClr val="3C7D4D"/>
+                      </a:solidFill>
+                      <a:prstDash val="solid"/>
+                    </a:lnR>
+                    <a:lnT w="6350" cap="flat" cmpd="sng" algn="ctr">
+                      <a:solidFill>
+                        <a:srgbClr val="3C7D4D"/>
+                      </a:solidFill>
+                      <a:prstDash val="solid"/>
+                    </a:lnT>
+                    <a:lnB w="6350" cap="flat" cmpd="sng" algn="ctr">
+                      <a:solidFill>
+                        <a:srgbClr val="3C7D4D"/>
+                      </a:solidFill>
+                      <a:prstDash val="solid"/>
+                    </a:lnB>
+                  </a:tcPr>
+                </a:tc>
+                <a:tc>
+                  <a:txBody>
+                    <a:bodyPr/>
+                    <a:lstStyle/>
+                    <a:p>
+                      <a:r>
+                        <a:rPr sz="1000" b="1">
+                          <a:solidFill>
+                            <a:srgbClr val="FFFFFF"/>
+                          </a:solidFill>
+                          <a:latin typeface="Arial"/>
+                        </a:rPr>
+                        <a:t>Why they get it</a:t>
+                      </a:r>
+                    </a:p>
+                  </a:txBody>
+                  <a:tcPr marL="73152" marR="73152" marT="27432" marB="27432" anchor="ctr">
+                    <a:solidFill>
+                      <a:srgbClr val="3C7D4D"/>
+                    </a:solidFill>
+                    <a:lnL w="6350" cap="flat" cmpd="sng" algn="ctr">
+                      <a:solidFill>
+                        <a:srgbClr val="3C7D4D"/>
+                      </a:solidFill>
+                      <a:prstDash val="solid"/>
+                    </a:lnL>
+                    <a:lnR w="6350" cap="flat" cmpd="sng" algn="ctr">
+                      <a:solidFill>
+                        <a:srgbClr val="3C7D4D"/>
+                      </a:solidFill>
+                      <a:prstDash val="solid"/>
+                    </a:lnR>
+                    <a:lnT w="6350" cap="flat" cmpd="sng" algn="ctr">
+                      <a:solidFill>
+                        <a:srgbClr val="3C7D4D"/>
+                      </a:solidFill>
+                      <a:prstDash val="solid"/>
+                    </a:lnT>
+                    <a:lnB w="6350" cap="flat" cmpd="sng" algn="ctr">
+                      <a:solidFill>
+                        <a:srgbClr val="3C7D4D"/>
+                      </a:solidFill>
+                      <a:prstDash val="solid"/>
+                    </a:lnB>
+                  </a:tcPr>
+                </a:tc>
+              </a:tr>
+              <a:tr h="265176">
+                <a:tc>
+                  <a:txBody>
+                    <a:bodyPr/>
+                    <a:lstStyle/>
+                    <a:p>
+                      <a:r>
+                        <a:rPr sz="1000" b="1">
+                          <a:solidFill>
+                            <a:srgbClr val="15181A"/>
+                          </a:solidFill>
+                          <a:latin typeface="Arial"/>
+                        </a:rPr>
+                        <a:t>Ambient RDC</a:t>
+                      </a:r>
+                    </a:p>
+                  </a:txBody>
+                  <a:tcPr marL="73152" marR="73152" marT="27432" marB="27432" anchor="t">
+                    <a:solidFill>
+                      <a:srgbClr val="FFFFFF"/>
+                    </a:solidFill>
+                    <a:lnL w="6350" cap="flat" cmpd="sng" algn="ctr">
+                      <a:solidFill>
+                        <a:srgbClr val="E2E6E3"/>
+                      </a:solidFill>
+                      <a:prstDash val="solid"/>
+                    </a:lnL>
+                    <a:lnR w="6350" cap="flat" cmpd="sng" algn="ctr">
+                      <a:solidFill>
+                        <a:srgbClr val="E2E6E3"/>
+                      </a:solidFill>
+                      <a:prstDash val="solid"/>
+                    </a:lnR>
+                    <a:lnT w="6350" cap="flat" cmpd="sng" algn="ctr">
+                      <a:solidFill>
+                        <a:srgbClr val="E2E6E3"/>
+                      </a:solidFill>
+                      <a:prstDash val="solid"/>
+                    </a:lnT>
+                    <a:lnB w="6350" cap="flat" cmpd="sng" algn="ctr">
+                      <a:solidFill>
+                        <a:srgbClr val="E2E6E3"/>
+                      </a:solidFill>
+                      <a:prstDash val="solid"/>
+                    </a:lnB>
+                  </a:tcPr>
+                </a:tc>
+                <a:tc>
+                  <a:txBody>
+                    <a:bodyPr/>
+                    <a:lstStyle/>
+                    <a:p>
+                      <a:r>
+                        <a:rPr sz="1000" b="0">
+                          <a:solidFill>
+                            <a:srgbClr val="5B6670"/>
+                          </a:solidFill>
+                          <a:latin typeface="Arial"/>
+                        </a:rPr>
+                        <a:t/>
+                      </a:r>
+                    </a:p>
+                  </a:txBody>
+                  <a:tcPr marL="73152" marR="73152" marT="27432" marB="27432" anchor="t">
+                    <a:solidFill>
+                      <a:srgbClr val="FFFFFF"/>
+                    </a:solidFill>
+                    <a:lnL w="6350" cap="flat" cmpd="sng" algn="ctr">
+                      <a:solidFill>
+                        <a:srgbClr val="E2E6E3"/>
+                      </a:solidFill>
+                      <a:prstDash val="solid"/>
+                    </a:lnL>
+                    <a:lnR w="6350" cap="flat" cmpd="sng" algn="ctr">
+                      <a:solidFill>
+                        <a:srgbClr val="E2E6E3"/>
+                      </a:solidFill>
+                      <a:prstDash val="solid"/>
+                    </a:lnR>
+                    <a:lnT w="6350" cap="flat" cmpd="sng" algn="ctr">
+                      <a:solidFill>
+                        <a:srgbClr val="E2E6E3"/>
+                      </a:solidFill>
+                      <a:prstDash val="solid"/>
+                    </a:lnT>
+                    <a:lnB w="6350" cap="flat" cmpd="sng" algn="ctr">
+                      <a:solidFill>
+                        <a:srgbClr val="E2E6E3"/>
+                      </a:solidFill>
+                      <a:prstDash val="solid"/>
+                    </a:lnB>
+                  </a:tcPr>
+                </a:tc>
+                <a:tc>
+                  <a:txBody>
+                    <a:bodyPr/>
+                    <a:lstStyle/>
+                    <a:p>
+                      <a:r>
+                        <a:rPr sz="1000" b="0">
+                          <a:solidFill>
+                            <a:srgbClr val="5B6670"/>
+                          </a:solidFill>
+                          <a:latin typeface="Arial"/>
+                        </a:rPr>
+                        <a:t/>
+                      </a:r>
+                    </a:p>
+                  </a:txBody>
+                  <a:tcPr marL="73152" marR="73152" marT="27432" marB="27432" anchor="t">
+                    <a:solidFill>
+                      <a:srgbClr val="FFFFFF"/>
+                    </a:solidFill>
+                    <a:lnL w="6350" cap="flat" cmpd="sng" algn="ctr">
+                      <a:solidFill>
+                        <a:srgbClr val="E2E6E3"/>
+                      </a:solidFill>
+                      <a:prstDash val="solid"/>
+                    </a:lnL>
+                    <a:lnR w="6350" cap="flat" cmpd="sng" algn="ctr">
+                      <a:solidFill>
+                        <a:srgbClr val="E2E6E3"/>
+                      </a:solidFill>
+                      <a:prstDash val="solid"/>
+                    </a:lnR>
+                    <a:lnT w="6350" cap="flat" cmpd="sng" algn="ctr">
+                      <a:solidFill>
+                        <a:srgbClr val="E2E6E3"/>
+                      </a:solidFill>
+                      <a:prstDash val="solid"/>
+                    </a:lnT>
+                    <a:lnB w="6350" cap="flat" cmpd="sng" algn="ctr">
+                      <a:solidFill>
+                        <a:srgbClr val="E2E6E3"/>
+                      </a:solidFill>
+                      <a:prstDash val="solid"/>
+                    </a:lnB>
+                  </a:tcPr>
+                </a:tc>
+                <a:tc>
+                  <a:txBody>
+                    <a:bodyPr/>
+                    <a:lstStyle/>
+                    <a:p>
+                      <a:r>
+                        <a:rPr sz="1000" b="0">
+                          <a:solidFill>
+                            <a:srgbClr val="5B6670"/>
+                          </a:solidFill>
+                          <a:latin typeface="Arial"/>
+                        </a:rPr>
+                        <a:t/>
+                      </a:r>
+                    </a:p>
+                  </a:txBody>
+                  <a:tcPr marL="73152" marR="73152" marT="27432" marB="27432" anchor="t">
+                    <a:solidFill>
+                      <a:srgbClr val="FFFFFF"/>
+                    </a:solidFill>
+                    <a:lnL w="6350" cap="flat" cmpd="sng" algn="ctr">
+                      <a:solidFill>
+                        <a:srgbClr val="E2E6E3"/>
+                      </a:solidFill>
+                      <a:prstDash val="solid"/>
+                    </a:lnL>
+                    <a:lnR w="6350" cap="flat" cmpd="sng" algn="ctr">
+                      <a:solidFill>
+                        <a:srgbClr val="E2E6E3"/>
+                      </a:solidFill>
+                      <a:prstDash val="solid"/>
+                    </a:lnR>
+                    <a:lnT w="6350" cap="flat" cmpd="sng" algn="ctr">
+                      <a:solidFill>
+                        <a:srgbClr val="E2E6E3"/>
+                      </a:solidFill>
+                      <a:prstDash val="solid"/>
+                    </a:lnT>
+                    <a:lnB w="6350" cap="flat" cmpd="sng" algn="ctr">
+                      <a:solidFill>
+                        <a:srgbClr val="E2E6E3"/>
+                      </a:solidFill>
+                      <a:prstDash val="solid"/>
+                    </a:lnB>
+                  </a:tcPr>
+                </a:tc>
+                <a:tc>
+                  <a:txBody>
+                    <a:bodyPr/>
+                    <a:lstStyle/>
+                    <a:p>
+                      <a:r>
+                        <a:rPr sz="1000" b="0">
+                          <a:solidFill>
+                            <a:srgbClr val="5B6670"/>
+                          </a:solidFill>
+                          <a:latin typeface="Arial"/>
+                        </a:rPr>
+                        <a:t/>
+                      </a:r>
+                    </a:p>
+                  </a:txBody>
+                  <a:tcPr marL="73152" marR="73152" marT="27432" marB="27432" anchor="t">
+                    <a:solidFill>
+                      <a:srgbClr val="FFFFFF"/>
+                    </a:solidFill>
+                    <a:lnL w="6350" cap="flat" cmpd="sng" algn="ctr">
+                      <a:solidFill>
+                        <a:srgbClr val="E2E6E3"/>
+                      </a:solidFill>
+                      <a:prstDash val="solid"/>
+                    </a:lnL>
+                    <a:lnR w="6350" cap="flat" cmpd="sng" algn="ctr">
+                      <a:solidFill>
+                        <a:srgbClr val="E2E6E3"/>
+                      </a:solidFill>
+                      <a:prstDash val="solid"/>
+                    </a:lnR>
+                    <a:lnT w="6350" cap="flat" cmpd="sng" algn="ctr">
+                      <a:solidFill>
+                        <a:srgbClr val="E2E6E3"/>
+                      </a:solidFill>
+                      <a:prstDash val="solid"/>
+                    </a:lnT>
+                    <a:lnB w="6350" cap="flat" cmpd="sng" algn="ctr">
+                      <a:solidFill>
+                        <a:srgbClr val="E2E6E3"/>
+                      </a:solidFill>
+                      <a:prstDash val="solid"/>
+                    </a:lnB>
+                  </a:tcPr>
+                </a:tc>
+                <a:tc>
+                  <a:txBody>
+                    <a:bodyPr/>
+                    <a:lstStyle/>
+                    <a:p>
+                      <a:r>
+                        <a:rPr sz="1000" b="0">
+                          <a:solidFill>
+                            <a:srgbClr val="5B6670"/>
+                          </a:solidFill>
+                          <a:latin typeface="Arial"/>
+                        </a:rPr>
+                        <a:t/>
+                      </a:r>
+                    </a:p>
+                  </a:txBody>
+                  <a:tcPr marL="73152" marR="73152" marT="27432" marB="27432" anchor="t">
+                    <a:solidFill>
+                      <a:srgbClr val="FFFFFF"/>
+                    </a:solidFill>
+                    <a:lnL w="6350" cap="flat" cmpd="sng" algn="ctr">
+                      <a:solidFill>
+                        <a:srgbClr val="E2E6E3"/>
+                      </a:solidFill>
+                      <a:prstDash val="solid"/>
+                    </a:lnL>
+                    <a:lnR w="6350" cap="flat" cmpd="sng" algn="ctr">
+                      <a:solidFill>
+                        <a:srgbClr val="E2E6E3"/>
+                      </a:solidFill>
+                      <a:prstDash val="solid"/>
+                    </a:lnR>
+                    <a:lnT w="6350" cap="flat" cmpd="sng" algn="ctr">
+                      <a:solidFill>
+                        <a:srgbClr val="E2E6E3"/>
+                      </a:solidFill>
+                      <a:prstDash val="solid"/>
+                    </a:lnT>
+                    <a:lnB w="6350" cap="flat" cmpd="sng" algn="ctr">
+                      <a:solidFill>
+                        <a:srgbClr val="E2E6E3"/>
+                      </a:solidFill>
+                      <a:prstDash val="solid"/>
+                    </a:lnB>
+                  </a:tcPr>
+                </a:tc>
+              </a:tr>
+              <a:tr h="265176">
+                <a:tc>
+                  <a:txBody>
+                    <a:bodyPr/>
+                    <a:lstStyle/>
+                    <a:p>
+                      <a:r>
+                        <a:rPr sz="1000" b="1">
+                          <a:solidFill>
+                            <a:srgbClr val="15181A"/>
+                          </a:solidFill>
+                          <a:latin typeface="Arial"/>
+                        </a:rPr>
+                        <a:t>E-comm / fulfillment</a:t>
+                      </a:r>
+                    </a:p>
+                  </a:txBody>
+                  <a:tcPr marL="73152" marR="73152" marT="27432" marB="27432" anchor="t">
+                    <a:solidFill>
+                      <a:srgbClr val="FFFFFF"/>
+                    </a:solidFill>
+                    <a:lnL w="6350" cap="flat" cmpd="sng" algn="ctr">
+                      <a:solidFill>
+                        <a:srgbClr val="E2E6E3"/>
+                      </a:solidFill>
+                      <a:prstDash val="solid"/>
+                    </a:lnL>
+                    <a:lnR w="6350" cap="flat" cmpd="sng" algn="ctr">
+                      <a:solidFill>
+                        <a:srgbClr val="E2E6E3"/>
+                      </a:solidFill>
+                      <a:prstDash val="solid"/>
+                    </a:lnR>
+                    <a:lnT w="6350" cap="flat" cmpd="sng" algn="ctr">
+                      <a:solidFill>
+                        <a:srgbClr val="E2E6E3"/>
+                      </a:solidFill>
+                      <a:prstDash val="solid"/>
+                    </a:lnT>
+                    <a:lnB w="6350" cap="flat" cmpd="sng" algn="ctr">
+                      <a:solidFill>
+                        <a:srgbClr val="E2E6E3"/>
+                      </a:solidFill>
+                      <a:prstDash val="solid"/>
+                    </a:lnB>
+                  </a:tcPr>
+                </a:tc>
+                <a:tc>
+                  <a:txBody>
+                    <a:bodyPr/>
+                    <a:lstStyle/>
+                    <a:p>
+                      <a:r>
+                        <a:rPr sz="1000" b="0">
+                          <a:solidFill>
+                            <a:srgbClr val="5B6670"/>
+                          </a:solidFill>
+                          <a:latin typeface="Arial"/>
+                        </a:rPr>
+                        <a:t/>
+                      </a:r>
+                    </a:p>
+                  </a:txBody>
+                  <a:tcPr marL="73152" marR="73152" marT="27432" marB="27432" anchor="t">
+                    <a:solidFill>
+                      <a:srgbClr val="FFFFFF"/>
+                    </a:solidFill>
+                    <a:lnL w="6350" cap="flat" cmpd="sng" algn="ctr">
+                      <a:solidFill>
+                        <a:srgbClr val="E2E6E3"/>
+                      </a:solidFill>
+                      <a:prstDash val="solid"/>
+                    </a:lnL>
+                    <a:lnR w="6350" cap="flat" cmpd="sng" algn="ctr">
+                      <a:solidFill>
+                        <a:srgbClr val="E2E6E3"/>
+                      </a:solidFill>
+                      <a:prstDash val="solid"/>
+                    </a:lnR>
+                    <a:lnT w="6350" cap="flat" cmpd="sng" algn="ctr">
+                      <a:solidFill>
+                        <a:srgbClr val="E2E6E3"/>
+                      </a:solidFill>
+                      <a:prstDash val="solid"/>
+                    </a:lnT>
+                    <a:lnB w="6350" cap="flat" cmpd="sng" algn="ctr">
+                      <a:solidFill>
+                        <a:srgbClr val="E2E6E3"/>
+                      </a:solidFill>
+                      <a:prstDash val="solid"/>
+                    </a:lnB>
+                  </a:tcPr>
+                </a:tc>
+                <a:tc>
+                  <a:txBody>
+                    <a:bodyPr/>
+                    <a:lstStyle/>
+                    <a:p>
+                      <a:r>
+                        <a:rPr sz="1000" b="0">
+                          <a:solidFill>
+                            <a:srgbClr val="5B6670"/>
+                          </a:solidFill>
+                          <a:latin typeface="Arial"/>
+                        </a:rPr>
+                        <a:t/>
+                      </a:r>
+                    </a:p>
+                  </a:txBody>
+                  <a:tcPr marL="73152" marR="73152" marT="27432" marB="27432" anchor="t">
+                    <a:solidFill>
+                      <a:srgbClr val="FFFFFF"/>
+                    </a:solidFill>
+                    <a:lnL w="6350" cap="flat" cmpd="sng" algn="ctr">
+                      <a:solidFill>
+                        <a:srgbClr val="E2E6E3"/>
+                      </a:solidFill>
+                      <a:prstDash val="solid"/>
+                    </a:lnL>
+                    <a:lnR w="6350" cap="flat" cmpd="sng" algn="ctr">
+                      <a:solidFill>
+                        <a:srgbClr val="E2E6E3"/>
+                      </a:solidFill>
+                      <a:prstDash val="solid"/>
+                    </a:lnR>
+                    <a:lnT w="6350" cap="flat" cmpd="sng" algn="ctr">
+                      <a:solidFill>
+                        <a:srgbClr val="E2E6E3"/>
+                      </a:solidFill>
+                      <a:prstDash val="solid"/>
+                    </a:lnT>
+                    <a:lnB w="6350" cap="flat" cmpd="sng" algn="ctr">
+                      <a:solidFill>
+                        <a:srgbClr val="E2E6E3"/>
+                      </a:solidFill>
+                      <a:prstDash val="solid"/>
+                    </a:lnB>
+                  </a:tcPr>
+                </a:tc>
+                <a:tc>
+                  <a:txBody>
+                    <a:bodyPr/>
+                    <a:lstStyle/>
+                    <a:p>
+                      <a:r>
+                        <a:rPr sz="1000" b="0">
+                          <a:solidFill>
+                            <a:srgbClr val="5B6670"/>
+                          </a:solidFill>
+                          <a:latin typeface="Arial"/>
+                        </a:rPr>
+                        <a:t/>
+                      </a:r>
+                    </a:p>
+                  </a:txBody>
+                  <a:tcPr marL="73152" marR="73152" marT="27432" marB="27432" anchor="t">
+                    <a:solidFill>
+                      <a:srgbClr val="FFFFFF"/>
+                    </a:solidFill>
+                    <a:lnL w="6350" cap="flat" cmpd="sng" algn="ctr">
+                      <a:solidFill>
+                        <a:srgbClr val="E2E6E3"/>
+                      </a:solidFill>
+                      <a:prstDash val="solid"/>
+                    </a:lnL>
+                    <a:lnR w="6350" cap="flat" cmpd="sng" algn="ctr">
+                      <a:solidFill>
+                        <a:srgbClr val="E2E6E3"/>
+                      </a:solidFill>
+                      <a:prstDash val="solid"/>
+                    </a:lnR>
+                    <a:lnT w="6350" cap="flat" cmpd="sng" algn="ctr">
+                      <a:solidFill>
+                        <a:srgbClr val="E2E6E3"/>
+                      </a:solidFill>
+                      <a:prstDash val="solid"/>
+                    </a:lnT>
+                    <a:lnB w="6350" cap="flat" cmpd="sng" algn="ctr">
+                      <a:solidFill>
+                        <a:srgbClr val="E2E6E3"/>
+                      </a:solidFill>
+                      <a:prstDash val="solid"/>
+                    </a:lnB>
+                  </a:tcPr>
+                </a:tc>
+                <a:tc>
+                  <a:txBody>
+                    <a:bodyPr/>
+                    <a:lstStyle/>
+                    <a:p>
+                      <a:r>
+                        <a:rPr sz="1000" b="0">
+                          <a:solidFill>
+                            <a:srgbClr val="5B6670"/>
+                          </a:solidFill>
+                          <a:latin typeface="Arial"/>
+                        </a:rPr>
+                        <a:t/>
+                      </a:r>
+                    </a:p>
+                  </a:txBody>
+                  <a:tcPr marL="73152" marR="73152" marT="27432" marB="27432" anchor="t">
+                    <a:solidFill>
+                      <a:srgbClr val="FFFFFF"/>
+                    </a:solidFill>
+                    <a:lnL w="6350" cap="flat" cmpd="sng" algn="ctr">
+                      <a:solidFill>
+                        <a:srgbClr val="E2E6E3"/>
+                      </a:solidFill>
+                      <a:prstDash val="solid"/>
+                    </a:lnL>
+                    <a:lnR w="6350" cap="flat" cmpd="sng" algn="ctr">
+                      <a:solidFill>
+                        <a:srgbClr val="E2E6E3"/>
+                      </a:solidFill>
+                      <a:prstDash val="solid"/>
+                    </a:lnR>
+                    <a:lnT w="6350" cap="flat" cmpd="sng" algn="ctr">
+                      <a:solidFill>
+                        <a:srgbClr val="E2E6E3"/>
+                      </a:solidFill>
+                      <a:prstDash val="solid"/>
+                    </a:lnT>
+                    <a:lnB w="6350" cap="flat" cmpd="sng" algn="ctr">
+                      <a:solidFill>
+                        <a:srgbClr val="E2E6E3"/>
+                      </a:solidFill>
+                      <a:prstDash val="solid"/>
+                    </a:lnB>
+                  </a:tcPr>
+                </a:tc>
+                <a:tc>
+                  <a:txBody>
+                    <a:bodyPr/>
+                    <a:lstStyle/>
+                    <a:p>
+                      <a:r>
+                        <a:rPr sz="1000" b="0">
+                          <a:solidFill>
+                            <a:srgbClr val="5B6670"/>
+                          </a:solidFill>
+                          <a:latin typeface="Arial"/>
+                        </a:rPr>
+                        <a:t/>
+                      </a:r>
+                    </a:p>
+                  </a:txBody>
+                  <a:tcPr marL="73152" marR="73152" marT="27432" marB="27432" anchor="t">
+                    <a:solidFill>
+                      <a:srgbClr val="FFFFFF"/>
+                    </a:solidFill>
+                    <a:lnL w="6350" cap="flat" cmpd="sng" algn="ctr">
+                      <a:solidFill>
+                        <a:srgbClr val="E2E6E3"/>
+                      </a:solidFill>
+                      <a:prstDash val="solid"/>
+                    </a:lnL>
+                    <a:lnR w="6350" cap="flat" cmpd="sng" algn="ctr">
+                      <a:solidFill>
+                        <a:srgbClr val="E2E6E3"/>
+                      </a:solidFill>
+                      <a:prstDash val="solid"/>
+                    </a:lnR>
+                    <a:lnT w="6350" cap="flat" cmpd="sng" algn="ctr">
+                      <a:solidFill>
+                        <a:srgbClr val="E2E6E3"/>
+                      </a:solidFill>
+                      <a:prstDash val="solid"/>
+                    </a:lnT>
+                    <a:lnB w="6350" cap="flat" cmpd="sng" algn="ctr">
+                      <a:solidFill>
+                        <a:srgbClr val="E2E6E3"/>
+                      </a:solidFill>
+                      <a:prstDash val="solid"/>
+                    </a:lnB>
+                  </a:tcPr>
+                </a:tc>
+              </a:tr>
+              <a:tr h="265176">
+                <a:tc>
+                  <a:txBody>
+                    <a:bodyPr/>
+                    <a:lstStyle/>
+                    <a:p>
+                      <a:r>
+                        <a:rPr sz="1000" b="1">
+                          <a:solidFill>
+                            <a:srgbClr val="15181A"/>
+                          </a:solidFill>
+                          <a:latin typeface="Arial"/>
+                        </a:rPr>
+                        <a:t>Import centers</a:t>
+                      </a:r>
+                    </a:p>
+                  </a:txBody>
+                  <a:tcPr marL="73152" marR="73152" marT="27432" marB="27432" anchor="t">
+                    <a:solidFill>
+                      <a:srgbClr val="FFFFFF"/>
+                    </a:solidFill>
+                    <a:lnL w="6350" cap="flat" cmpd="sng" algn="ctr">
+                      <a:solidFill>
+                        <a:srgbClr val="E2E6E3"/>
+                      </a:solidFill>
+                      <a:prstDash val="solid"/>
+                    </a:lnL>
+                    <a:lnR w="6350" cap="flat" cmpd="sng" algn="ctr">
+                      <a:solidFill>
+                        <a:srgbClr val="E2E6E3"/>
+                      </a:solidFill>
+                      <a:prstDash val="solid"/>
+                    </a:lnR>
+                    <a:lnT w="6350" cap="flat" cmpd="sng" algn="ctr">
+                      <a:solidFill>
+                        <a:srgbClr val="E2E6E3"/>
+                      </a:solidFill>
+                      <a:prstDash val="solid"/>
+                    </a:lnT>
+                    <a:lnB w="6350" cap="flat" cmpd="sng" algn="ctr">
+                      <a:solidFill>
+                        <a:srgbClr val="E2E6E3"/>
+                      </a:solidFill>
+                      <a:prstDash val="solid"/>
+                    </a:lnB>
+                  </a:tcPr>
+                </a:tc>
+                <a:tc>
+                  <a:txBody>
+                    <a:bodyPr/>
+                    <a:lstStyle/>
+                    <a:p>
+                      <a:r>
+                        <a:rPr sz="1000" b="0">
+                          <a:solidFill>
+                            <a:srgbClr val="5B6670"/>
+                          </a:solidFill>
+                          <a:latin typeface="Arial"/>
+                        </a:rPr>
+                        <a:t/>
+                      </a:r>
+                    </a:p>
+                  </a:txBody>
+                  <a:tcPr marL="73152" marR="73152" marT="27432" marB="27432" anchor="t">
+                    <a:solidFill>
+                      <a:srgbClr val="FFFFFF"/>
+                    </a:solidFill>
+                    <a:lnL w="6350" cap="flat" cmpd="sng" algn="ctr">
+                      <a:solidFill>
+                        <a:srgbClr val="E2E6E3"/>
+                      </a:solidFill>
+                      <a:prstDash val="solid"/>
+                    </a:lnL>
+                    <a:lnR w="6350" cap="flat" cmpd="sng" algn="ctr">
+                      <a:solidFill>
+                        <a:srgbClr val="E2E6E3"/>
+                      </a:solidFill>
+                      <a:prstDash val="solid"/>
+                    </a:lnR>
+                    <a:lnT w="6350" cap="flat" cmpd="sng" algn="ctr">
+                      <a:solidFill>
+                        <a:srgbClr val="E2E6E3"/>
+                      </a:solidFill>
+                      <a:prstDash val="solid"/>
+                    </a:lnT>
+                    <a:lnB w="6350" cap="flat" cmpd="sng" algn="ctr">
+                      <a:solidFill>
+                        <a:srgbClr val="E2E6E3"/>
+                      </a:solidFill>
+                      <a:prstDash val="solid"/>
+                    </a:lnB>
+                  </a:tcPr>
+                </a:tc>
+                <a:tc>
+                  <a:txBody>
+                    <a:bodyPr/>
+                    <a:lstStyle/>
+                    <a:p>
+                      <a:r>
+                        <a:rPr sz="1000" b="0">
+                          <a:solidFill>
+                            <a:srgbClr val="5B6670"/>
+                          </a:solidFill>
+                          <a:latin typeface="Arial"/>
+                        </a:rPr>
+                        <a:t/>
+                      </a:r>
+                    </a:p>
+                  </a:txBody>
+                  <a:tcPr marL="73152" marR="73152" marT="27432" marB="27432" anchor="t">
+                    <a:solidFill>
+                      <a:srgbClr val="FFFFFF"/>
+                    </a:solidFill>
+                    <a:lnL w="6350" cap="flat" cmpd="sng" algn="ctr">
+                      <a:solidFill>
+                        <a:srgbClr val="E2E6E3"/>
+                      </a:solidFill>
+                      <a:prstDash val="solid"/>
+                    </a:lnL>
+                    <a:lnR w="6350" cap="flat" cmpd="sng" algn="ctr">
+                      <a:solidFill>
+                        <a:srgbClr val="E2E6E3"/>
+                      </a:solidFill>
+                      <a:prstDash val="solid"/>
+                    </a:lnR>
+                    <a:lnT w="6350" cap="flat" cmpd="sng" algn="ctr">
+                      <a:solidFill>
+                        <a:srgbClr val="E2E6E3"/>
+                      </a:solidFill>
+                      <a:prstDash val="solid"/>
+                    </a:lnT>
+                    <a:lnB w="6350" cap="flat" cmpd="sng" algn="ctr">
+                      <a:solidFill>
+                        <a:srgbClr val="E2E6E3"/>
+                      </a:solidFill>
+                      <a:prstDash val="solid"/>
+                    </a:lnB>
+                  </a:tcPr>
+                </a:tc>
+                <a:tc>
+                  <a:txBody>
+                    <a:bodyPr/>
+                    <a:lstStyle/>
+                    <a:p>
+                      <a:r>
+                        <a:rPr sz="1000" b="0">
+                          <a:solidFill>
+                            <a:srgbClr val="5B6670"/>
+                          </a:solidFill>
+                          <a:latin typeface="Arial"/>
+                        </a:rPr>
+                        <a:t/>
+                      </a:r>
+                    </a:p>
+                  </a:txBody>
+                  <a:tcPr marL="73152" marR="73152" marT="27432" marB="27432" anchor="t">
+                    <a:solidFill>
+                      <a:srgbClr val="FFFFFF"/>
+                    </a:solidFill>
+                    <a:lnL w="6350" cap="flat" cmpd="sng" algn="ctr">
+                      <a:solidFill>
+                        <a:srgbClr val="E2E6E3"/>
+                      </a:solidFill>
+                      <a:prstDash val="solid"/>
+                    </a:lnL>
+                    <a:lnR w="6350" cap="flat" cmpd="sng" algn="ctr">
+                      <a:solidFill>
+                        <a:srgbClr val="E2E6E3"/>
+                      </a:solidFill>
+                      <a:prstDash val="solid"/>
+                    </a:lnR>
+                    <a:lnT w="6350" cap="flat" cmpd="sng" algn="ctr">
+                      <a:solidFill>
+                        <a:srgbClr val="E2E6E3"/>
+                      </a:solidFill>
+                      <a:prstDash val="solid"/>
+                    </a:lnT>
+                    <a:lnB w="6350" cap="flat" cmpd="sng" algn="ctr">
+                      <a:solidFill>
+                        <a:srgbClr val="E2E6E3"/>
+                      </a:solidFill>
+                      <a:prstDash val="solid"/>
+                    </a:lnB>
+                  </a:tcPr>
+                </a:tc>
+                <a:tc>
+                  <a:txBody>
+                    <a:bodyPr/>
+                    <a:lstStyle/>
+                    <a:p>
+                      <a:r>
+                        <a:rPr sz="1000" b="0">
+                          <a:solidFill>
+                            <a:srgbClr val="5B6670"/>
+                          </a:solidFill>
+                          <a:latin typeface="Arial"/>
+                        </a:rPr>
+                        <a:t/>
+                      </a:r>
+                    </a:p>
+                  </a:txBody>
+                  <a:tcPr marL="73152" marR="73152" marT="27432" marB="27432" anchor="t">
+                    <a:solidFill>
+                      <a:srgbClr val="FFFFFF"/>
+                    </a:solidFill>
+                    <a:lnL w="6350" cap="flat" cmpd="sng" algn="ctr">
+                      <a:solidFill>
+                        <a:srgbClr val="E2E6E3"/>
+                      </a:solidFill>
+                      <a:prstDash val="solid"/>
+                    </a:lnL>
+                    <a:lnR w="6350" cap="flat" cmpd="sng" algn="ctr">
+                      <a:solidFill>
+                        <a:srgbClr val="E2E6E3"/>
+                      </a:solidFill>
+                      <a:prstDash val="solid"/>
+                    </a:lnR>
+                    <a:lnT w="6350" cap="flat" cmpd="sng" algn="ctr">
+                      <a:solidFill>
+                        <a:srgbClr val="E2E6E3"/>
+                      </a:solidFill>
+                      <a:prstDash val="solid"/>
+                    </a:lnT>
+                    <a:lnB w="6350" cap="flat" cmpd="sng" algn="ctr">
+                      <a:solidFill>
+                        <a:srgbClr val="E2E6E3"/>
+                      </a:solidFill>
+                      <a:prstDash val="solid"/>
+                    </a:lnB>
+                  </a:tcPr>
+                </a:tc>
+                <a:tc>
+                  <a:txBody>
+                    <a:bodyPr/>
+                    <a:lstStyle/>
+                    <a:p>
+                      <a:r>
+                        <a:rPr sz="1000" b="0">
+                          <a:solidFill>
+                            <a:srgbClr val="5B6670"/>
+                          </a:solidFill>
+                          <a:latin typeface="Arial"/>
+                        </a:rPr>
+                        <a:t/>
+                      </a:r>
+                    </a:p>
+                  </a:txBody>
+                  <a:tcPr marL="73152" marR="73152" marT="27432" marB="27432" anchor="t">
+                    <a:solidFill>
+                      <a:srgbClr val="FFFFFF"/>
+                    </a:solidFill>
+                    <a:lnL w="6350" cap="flat" cmpd="sng" algn="ctr">
+                      <a:solidFill>
+                        <a:srgbClr val="E2E6E3"/>
+                      </a:solidFill>
+                      <a:prstDash val="solid"/>
+                    </a:lnL>
+                    <a:lnR w="6350" cap="flat" cmpd="sng" algn="ctr">
+                      <a:solidFill>
+                        <a:srgbClr val="E2E6E3"/>
+                      </a:solidFill>
+                      <a:prstDash val="solid"/>
+                    </a:lnR>
+                    <a:lnT w="6350" cap="flat" cmpd="sng" algn="ctr">
+                      <a:solidFill>
+                        <a:srgbClr val="E2E6E3"/>
+                      </a:solidFill>
+                      <a:prstDash val="solid"/>
+                    </a:lnT>
+                    <a:lnB w="6350" cap="flat" cmpd="sng" algn="ctr">
+                      <a:solidFill>
+                        <a:srgbClr val="E2E6E3"/>
+                      </a:solidFill>
+                      <a:prstDash val="solid"/>
+                    </a:lnB>
+                  </a:tcPr>
+                </a:tc>
+              </a:tr>
+              <a:tr h="265176">
+                <a:tc>
+                  <a:txBody>
+                    <a:bodyPr/>
+                    <a:lstStyle/>
+                    <a:p>
+                      <a:r>
+                        <a:rPr sz="1000" b="1">
+                          <a:solidFill>
+                            <a:srgbClr val="15181A"/>
+                          </a:solidFill>
+                          <a:latin typeface="Arial"/>
+                        </a:rPr>
+                        <a:t>[Other]</a:t>
+                      </a:r>
+                    </a:p>
+                  </a:txBody>
+                  <a:tcPr marL="73152" marR="73152" marT="27432" marB="27432" anchor="t">
+                    <a:solidFill>
+                      <a:srgbClr val="FFFFFF"/>
+                    </a:solidFill>
+                    <a:lnL w="6350" cap="flat" cmpd="sng" algn="ctr">
+                      <a:solidFill>
+                        <a:srgbClr val="E2E6E3"/>
+                      </a:solidFill>
+                      <a:prstDash val="solid"/>
+                    </a:lnL>
+                    <a:lnR w="6350" cap="flat" cmpd="sng" algn="ctr">
+                      <a:solidFill>
+                        <a:srgbClr val="E2E6E3"/>
+                      </a:solidFill>
+                      <a:prstDash val="solid"/>
+                    </a:lnR>
+                    <a:lnT w="6350" cap="flat" cmpd="sng" algn="ctr">
+                      <a:solidFill>
+                        <a:srgbClr val="E2E6E3"/>
+                      </a:solidFill>
+                      <a:prstDash val="solid"/>
+                    </a:lnT>
+                    <a:lnB w="6350" cap="flat" cmpd="sng" algn="ctr">
+                      <a:solidFill>
+                        <a:srgbClr val="E2E6E3"/>
+                      </a:solidFill>
+                      <a:prstDash val="solid"/>
+                    </a:lnB>
+                  </a:tcPr>
+                </a:tc>
+                <a:tc>
+                  <a:txBody>
+                    <a:bodyPr/>
+                    <a:lstStyle/>
+                    <a:p>
+                      <a:r>
+                        <a:rPr sz="1000" b="0">
+                          <a:solidFill>
+                            <a:srgbClr val="5B6670"/>
+                          </a:solidFill>
+                          <a:latin typeface="Arial"/>
+                        </a:rPr>
+                        <a:t/>
+                      </a:r>
+                    </a:p>
+                  </a:txBody>
+                  <a:tcPr marL="73152" marR="73152" marT="27432" marB="27432" anchor="t">
+                    <a:solidFill>
+                      <a:srgbClr val="FFFFFF"/>
+                    </a:solidFill>
+                    <a:lnL w="6350" cap="flat" cmpd="sng" algn="ctr">
+                      <a:solidFill>
+                        <a:srgbClr val="E2E6E3"/>
+                      </a:solidFill>
+                      <a:prstDash val="solid"/>
+                    </a:lnL>
+                    <a:lnR w="6350" cap="flat" cmpd="sng" algn="ctr">
+                      <a:solidFill>
+                        <a:srgbClr val="E2E6E3"/>
+                      </a:solidFill>
+                      <a:prstDash val="solid"/>
+                    </a:lnR>
+                    <a:lnT w="6350" cap="flat" cmpd="sng" algn="ctr">
+                      <a:solidFill>
+                        <a:srgbClr val="E2E6E3"/>
+                      </a:solidFill>
+                      <a:prstDash val="solid"/>
+                    </a:lnT>
+                    <a:lnB w="6350" cap="flat" cmpd="sng" algn="ctr">
+                      <a:solidFill>
+                        <a:srgbClr val="E2E6E3"/>
+                      </a:solidFill>
+                      <a:prstDash val="solid"/>
+                    </a:lnB>
+                  </a:tcPr>
+                </a:tc>
+                <a:tc>
+                  <a:txBody>
+                    <a:bodyPr/>
+                    <a:lstStyle/>
+                    <a:p>
+                      <a:r>
+                        <a:rPr sz="1000" b="0">
+                          <a:solidFill>
+                            <a:srgbClr val="5B6670"/>
+                          </a:solidFill>
+                          <a:latin typeface="Arial"/>
+                        </a:rPr>
+                        <a:t/>
+                      </a:r>
+                    </a:p>
+                  </a:txBody>
+                  <a:tcPr marL="73152" marR="73152" marT="27432" marB="27432" anchor="t">
+                    <a:solidFill>
+                      <a:srgbClr val="FFFFFF"/>
+                    </a:solidFill>
+                    <a:lnL w="6350" cap="flat" cmpd="sng" algn="ctr">
+                      <a:solidFill>
+                        <a:srgbClr val="E2E6E3"/>
+                      </a:solidFill>
+                      <a:prstDash val="solid"/>
+                    </a:lnL>
+                    <a:lnR w="6350" cap="flat" cmpd="sng" algn="ctr">
+                      <a:solidFill>
+                        <a:srgbClr val="E2E6E3"/>
+                      </a:solidFill>
+                      <a:prstDash val="solid"/>
+                    </a:lnR>
+                    <a:lnT w="6350" cap="flat" cmpd="sng" algn="ctr">
+                      <a:solidFill>
+                        <a:srgbClr val="E2E6E3"/>
+                      </a:solidFill>
+                      <a:prstDash val="solid"/>
+                    </a:lnT>
+                    <a:lnB w="6350" cap="flat" cmpd="sng" algn="ctr">
+                      <a:solidFill>
+                        <a:srgbClr val="E2E6E3"/>
+                      </a:solidFill>
+                      <a:prstDash val="solid"/>
+                    </a:lnB>
+                  </a:tcPr>
+                </a:tc>
+                <a:tc>
+                  <a:txBody>
+                    <a:bodyPr/>
+                    <a:lstStyle/>
+                    <a:p>
+                      <a:r>
+                        <a:rPr sz="1000" b="0">
+                          <a:solidFill>
+                            <a:srgbClr val="5B6670"/>
+                          </a:solidFill>
+                          <a:latin typeface="Arial"/>
+                        </a:rPr>
+                        <a:t/>
+                      </a:r>
+                    </a:p>
+                  </a:txBody>
+                  <a:tcPr marL="73152" marR="73152" marT="27432" marB="27432" anchor="t">
+                    <a:solidFill>
+                      <a:srgbClr val="FFFFFF"/>
+                    </a:solidFill>
+                    <a:lnL w="6350" cap="flat" cmpd="sng" algn="ctr">
+                      <a:solidFill>
+                        <a:srgbClr val="E2E6E3"/>
+                      </a:solidFill>
+                      <a:prstDash val="solid"/>
+                    </a:lnL>
+                    <a:lnR w="6350" cap="flat" cmpd="sng" algn="ctr">
+                      <a:solidFill>
+                        <a:srgbClr val="E2E6E3"/>
+                      </a:solidFill>
+                      <a:prstDash val="solid"/>
+                    </a:lnR>
+                    <a:lnT w="6350" cap="flat" cmpd="sng" algn="ctr">
+                      <a:solidFill>
+                        <a:srgbClr val="E2E6E3"/>
+                      </a:solidFill>
+                      <a:prstDash val="solid"/>
+                    </a:lnT>
+                    <a:lnB w="6350" cap="flat" cmpd="sng" algn="ctr">
+                      <a:solidFill>
+                        <a:srgbClr val="E2E6E3"/>
+                      </a:solidFill>
+                      <a:prstDash val="solid"/>
+                    </a:lnB>
+                  </a:tcPr>
+                </a:tc>
+                <a:tc>
+                  <a:txBody>
+                    <a:bodyPr/>
+                    <a:lstStyle/>
+                    <a:p>
+                      <a:r>
+                        <a:rPr sz="1000" b="0">
+                          <a:solidFill>
+                            <a:srgbClr val="5B6670"/>
+                          </a:solidFill>
+                          <a:latin typeface="Arial"/>
+                        </a:rPr>
+                        <a:t/>
+                      </a:r>
+                    </a:p>
+                  </a:txBody>
+                  <a:tcPr marL="73152" marR="73152" marT="27432" marB="27432" anchor="t">
+                    <a:solidFill>
+                      <a:srgbClr val="FFFFFF"/>
+                    </a:solidFill>
+                    <a:lnL w="6350" cap="flat" cmpd="sng" algn="ctr">
+                      <a:solidFill>
+                        <a:srgbClr val="E2E6E3"/>
+                      </a:solidFill>
+                      <a:prstDash val="solid"/>
+                    </a:lnL>
+                    <a:lnR w="6350" cap="flat" cmpd="sng" algn="ctr">
+                      <a:solidFill>
+                        <a:srgbClr val="E2E6E3"/>
+                      </a:solidFill>
+                      <a:prstDash val="solid"/>
+                    </a:lnR>
+                    <a:lnT w="6350" cap="flat" cmpd="sng" algn="ctr">
+                      <a:solidFill>
+                        <a:srgbClr val="E2E6E3"/>
+                      </a:solidFill>
+                      <a:prstDash val="solid"/>
+                    </a:lnT>
+                    <a:lnB w="6350" cap="flat" cmpd="sng" algn="ctr">
+                      <a:solidFill>
+                        <a:srgbClr val="E2E6E3"/>
+                      </a:solidFill>
+                      <a:prstDash val="solid"/>
+                    </a:lnB>
+                  </a:tcPr>
+                </a:tc>
+                <a:tc>
+                  <a:txBody>
+                    <a:bodyPr/>
+                    <a:lstStyle/>
+                    <a:p>
+                      <a:r>
+                        <a:rPr sz="1000" b="0">
+                          <a:solidFill>
+                            <a:srgbClr val="5B6670"/>
+                          </a:solidFill>
+                          <a:latin typeface="Arial"/>
+                        </a:rPr>
+                        <a:t/>
+                      </a:r>
+                    </a:p>
+                  </a:txBody>
+                  <a:tcPr marL="73152" marR="73152" marT="27432" marB="27432" anchor="t">
+                    <a:solidFill>
+                      <a:srgbClr val="FFFFFF"/>
+                    </a:solidFill>
+                    <a:lnL w="6350" cap="flat" cmpd="sng" algn="ctr">
+                      <a:solidFill>
+                        <a:srgbClr val="E2E6E3"/>
+                      </a:solidFill>
+                      <a:prstDash val="solid"/>
+                    </a:lnL>
+                    <a:lnR w="6350" cap="flat" cmpd="sng" algn="ctr">
+                      <a:solidFill>
+                        <a:srgbClr val="E2E6E3"/>
+                      </a:solidFill>
+                      <a:prstDash val="solid"/>
+                    </a:lnR>
+                    <a:lnT w="6350" cap="flat" cmpd="sng" algn="ctr">
+                      <a:solidFill>
+                        <a:srgbClr val="E2E6E3"/>
+                      </a:solidFill>
+                      <a:prstDash val="solid"/>
+                    </a:lnT>
+                    <a:lnB w="6350" cap="flat" cmpd="sng" algn="ctr">
+                      <a:solidFill>
+                        <a:srgbClr val="E2E6E3"/>
+                      </a:solidFill>
+                      <a:prstDash val="solid"/>
+                    </a:lnB>
+                  </a:tcPr>
+                </a:tc>
+              </a:tr>
+            </a:tbl>
+          </a:graphicData>
+        </a:graphic>
+      </p:graphicFrame>
+      <p:sp>
+        <p:nvSpPr>
+          <p:cNvPr id="9" name="TextBox 8"/>
+          <p:cNvSpPr txBox="1"/>
+          <p:nvPr/>
+        </p:nvSpPr>
+        <p:spPr>
+          <a:xfrm>
+            <a:off x="731520" y="4041648"/>
+            <a:ext cx="10725912" cy="237744"/>
+          </a:xfrm>
+          <a:prstGeom prst="rect">
+            <a:avLst/>
+          </a:prstGeom>
+          <a:noFill/>
+        </p:spPr>
+        <p:txBody>
+          <a:bodyPr wrap="square" anchor="t" lIns="0" rIns="0" tIns="0" bIns="0">
+            <a:noAutofit/>
+          </a:bodyPr>
           <a:lstStyle/>
           <a:p>
             <a:r>
-              <a:t>Job: [dealer, account, job name]</a:t>
-            </a:r>
-          </a:p>
-          <a:p>
-            <a:r>
-              <a:t>Size: [$ and product]</a:t>
-            </a:r>
-          </a:p>
-          <a:p>
-            <a:r>
-              <a:t>Why we won on product: [ ]</a:t>
-            </a:r>
-          </a:p>
-          <a:p>
-            <a:r>
-              <a:t>Repeatable: [yes or no, and why]</a:t>
-            </a:r>
-          </a:p>
-        </p:txBody>
-      </p:sp>
-      <p:sp>
-        <p:nvSpPr>
-          <p:cNvPr id="9" name="Text Placeholder 8"/>
-          <p:cNvSpPr>
-            <a:spLocks noGrp="1"/>
-          </p:cNvSpPr>
-          <p:nvPr>
-            <p:ph type="body" idx="116"/>
-          </p:nvPr>
-        </p:nvSpPr>
-        <p:spPr/>
-        <p:txBody>
-          <a:bodyPr/>
-          <a:lstStyle/>
-          <a:p>
-            <a:r>
-              <a:t>Speed and support</a:t>
-            </a:r>
-          </a:p>
-        </p:txBody>
-      </p:sp>
-      <p:sp>
-        <p:nvSpPr>
-          <p:cNvPr id="10" name="Text Placeholder 9"/>
-          <p:cNvSpPr>
-            <a:spLocks noGrp="1"/>
-          </p:cNvSpPr>
-          <p:nvPr>
-            <p:ph type="body" idx="117"/>
-          </p:nvPr>
-        </p:nvSpPr>
-        <p:spPr/>
-        <p:txBody>
-          <a:bodyPr/>
-          <a:lstStyle/>
-          <a:p>
-            <a:r>
-              <a:t>Job: [dealer, account, job name]</a:t>
-            </a:r>
-          </a:p>
-          <a:p>
-            <a:r>
-              <a:t>Size: [$ and product]</a:t>
-            </a:r>
-          </a:p>
-          <a:p>
-            <a:r>
-              <a:t>Why we won on speed or support: [ ]</a:t>
-            </a:r>
-          </a:p>
-          <a:p>
-            <a:r>
-              <a:t>Repeatable: [yes or no, and why]</a:t>
-            </a:r>
-          </a:p>
-        </p:txBody>
-      </p:sp>
+              <a:rPr sz="1100" b="1">
+                <a:solidFill>
+                  <a:srgbClr val="3C7D4D"/>
+                </a:solidFill>
+                <a:latin typeface="Arial"/>
+              </a:rPr>
+              <a:t>LARGE PROJECTS IN THE PIPE  ·  ADD ROWS AS NEEDED</a:t>
+            </a:r>
+          </a:p>
+        </p:txBody>
+      </p:sp>
+      <p:graphicFrame>
+        <p:nvGraphicFramePr>
+          <p:cNvPr id="10" name="Table 9"/>
+          <p:cNvGraphicFramePr>
+            <a:graphicFrameLocks noGrp="1"/>
+          </p:cNvGraphicFramePr>
+          <p:nvPr/>
+        </p:nvGraphicFramePr>
+        <p:xfrm>
+          <a:off x="731520" y="4297680"/>
+          <a:ext cx="10725912" cy="1069848"/>
+        </p:xfrm>
+        <a:graphic>
+          <a:graphicData uri="http://schemas.openxmlformats.org/drawingml/2006/table">
+            <a:tbl>
+              <a:tblPr firstRow="0" bandRow="0"/>
+              <a:tblGrid>
+                <a:gridCol w="2926080"/>
+                <a:gridCol w="1828800"/>
+                <a:gridCol w="1371600"/>
+                <a:gridCol w="1645920"/>
+                <a:gridCol w="2953512"/>
+              </a:tblGrid>
+              <a:tr h="274320">
+                <a:tc>
+                  <a:txBody>
+                    <a:bodyPr/>
+                    <a:lstStyle/>
+                    <a:p>
+                      <a:r>
+                        <a:rPr sz="1000" b="1">
+                          <a:solidFill>
+                            <a:srgbClr val="FFFFFF"/>
+                          </a:solidFill>
+                          <a:latin typeface="Arial"/>
+                        </a:rPr>
+                        <a:t>Project</a:t>
+                      </a:r>
+                    </a:p>
+                  </a:txBody>
+                  <a:tcPr marL="73152" marR="73152" marT="27432" marB="27432" anchor="ctr">
+                    <a:solidFill>
+                      <a:srgbClr val="3C7D4D"/>
+                    </a:solidFill>
+                    <a:lnL w="6350" cap="flat" cmpd="sng" algn="ctr">
+                      <a:solidFill>
+                        <a:srgbClr val="3C7D4D"/>
+                      </a:solidFill>
+                      <a:prstDash val="solid"/>
+                    </a:lnL>
+                    <a:lnR w="6350" cap="flat" cmpd="sng" algn="ctr">
+                      <a:solidFill>
+                        <a:srgbClr val="3C7D4D"/>
+                      </a:solidFill>
+                      <a:prstDash val="solid"/>
+                    </a:lnR>
+                    <a:lnT w="6350" cap="flat" cmpd="sng" algn="ctr">
+                      <a:solidFill>
+                        <a:srgbClr val="3C7D4D"/>
+                      </a:solidFill>
+                      <a:prstDash val="solid"/>
+                    </a:lnT>
+                    <a:lnB w="6350" cap="flat" cmpd="sng" algn="ctr">
+                      <a:solidFill>
+                        <a:srgbClr val="3C7D4D"/>
+                      </a:solidFill>
+                      <a:prstDash val="solid"/>
+                    </a:lnB>
+                  </a:tcPr>
+                </a:tc>
+                <a:tc>
+                  <a:txBody>
+                    <a:bodyPr/>
+                    <a:lstStyle/>
+                    <a:p>
+                      <a:r>
+                        <a:rPr sz="1000" b="1">
+                          <a:solidFill>
+                            <a:srgbClr val="FFFFFF"/>
+                          </a:solidFill>
+                          <a:latin typeface="Arial"/>
+                        </a:rPr>
+                        <a:t>Type</a:t>
+                      </a:r>
+                    </a:p>
+                  </a:txBody>
+                  <a:tcPr marL="73152" marR="73152" marT="27432" marB="27432" anchor="ctr">
+                    <a:solidFill>
+                      <a:srgbClr val="3C7D4D"/>
+                    </a:solidFill>
+                    <a:lnL w="6350" cap="flat" cmpd="sng" algn="ctr">
+                      <a:solidFill>
+                        <a:srgbClr val="3C7D4D"/>
+                      </a:solidFill>
+                      <a:prstDash val="solid"/>
+                    </a:lnL>
+                    <a:lnR w="6350" cap="flat" cmpd="sng" algn="ctr">
+                      <a:solidFill>
+                        <a:srgbClr val="3C7D4D"/>
+                      </a:solidFill>
+                      <a:prstDash val="solid"/>
+                    </a:lnR>
+                    <a:lnT w="6350" cap="flat" cmpd="sng" algn="ctr">
+                      <a:solidFill>
+                        <a:srgbClr val="3C7D4D"/>
+                      </a:solidFill>
+                      <a:prstDash val="solid"/>
+                    </a:lnT>
+                    <a:lnB w="6350" cap="flat" cmpd="sng" algn="ctr">
+                      <a:solidFill>
+                        <a:srgbClr val="3C7D4D"/>
+                      </a:solidFill>
+                      <a:prstDash val="solid"/>
+                    </a:lnB>
+                  </a:tcPr>
+                </a:tc>
+                <a:tc>
+                  <a:txBody>
+                    <a:bodyPr/>
+                    <a:lstStyle/>
+                    <a:p>
+                      <a:r>
+                        <a:rPr sz="1000" b="1">
+                          <a:solidFill>
+                            <a:srgbClr val="FFFFFF"/>
+                          </a:solidFill>
+                          <a:latin typeface="Arial"/>
+                        </a:rPr>
+                        <a:t>$</a:t>
+                      </a:r>
+                    </a:p>
+                  </a:txBody>
+                  <a:tcPr marL="73152" marR="73152" marT="27432" marB="27432" anchor="ctr">
+                    <a:solidFill>
+                      <a:srgbClr val="3C7D4D"/>
+                    </a:solidFill>
+                    <a:lnL w="6350" cap="flat" cmpd="sng" algn="ctr">
+                      <a:solidFill>
+                        <a:srgbClr val="3C7D4D"/>
+                      </a:solidFill>
+                      <a:prstDash val="solid"/>
+                    </a:lnL>
+                    <a:lnR w="6350" cap="flat" cmpd="sng" algn="ctr">
+                      <a:solidFill>
+                        <a:srgbClr val="3C7D4D"/>
+                      </a:solidFill>
+                      <a:prstDash val="solid"/>
+                    </a:lnR>
+                    <a:lnT w="6350" cap="flat" cmpd="sng" algn="ctr">
+                      <a:solidFill>
+                        <a:srgbClr val="3C7D4D"/>
+                      </a:solidFill>
+                      <a:prstDash val="solid"/>
+                    </a:lnT>
+                    <a:lnB w="6350" cap="flat" cmpd="sng" algn="ctr">
+                      <a:solidFill>
+                        <a:srgbClr val="3C7D4D"/>
+                      </a:solidFill>
+                      <a:prstDash val="solid"/>
+                    </a:lnB>
+                  </a:tcPr>
+                </a:tc>
+                <a:tc>
+                  <a:txBody>
+                    <a:bodyPr/>
+                    <a:lstStyle/>
+                    <a:p>
+                      <a:r>
+                        <a:rPr sz="1000" b="1">
+                          <a:solidFill>
+                            <a:srgbClr val="FFFFFF"/>
+                          </a:solidFill>
+                          <a:latin typeface="Arial"/>
+                        </a:rPr>
+                        <a:t>Timing</a:t>
+                      </a:r>
+                    </a:p>
+                  </a:txBody>
+                  <a:tcPr marL="73152" marR="73152" marT="27432" marB="27432" anchor="ctr">
+                    <a:solidFill>
+                      <a:srgbClr val="3C7D4D"/>
+                    </a:solidFill>
+                    <a:lnL w="6350" cap="flat" cmpd="sng" algn="ctr">
+                      <a:solidFill>
+                        <a:srgbClr val="3C7D4D"/>
+                      </a:solidFill>
+                      <a:prstDash val="solid"/>
+                    </a:lnL>
+                    <a:lnR w="6350" cap="flat" cmpd="sng" algn="ctr">
+                      <a:solidFill>
+                        <a:srgbClr val="3C7D4D"/>
+                      </a:solidFill>
+                      <a:prstDash val="solid"/>
+                    </a:lnR>
+                    <a:lnT w="6350" cap="flat" cmpd="sng" algn="ctr">
+                      <a:solidFill>
+                        <a:srgbClr val="3C7D4D"/>
+                      </a:solidFill>
+                      <a:prstDash val="solid"/>
+                    </a:lnT>
+                    <a:lnB w="6350" cap="flat" cmpd="sng" algn="ctr">
+                      <a:solidFill>
+                        <a:srgbClr val="3C7D4D"/>
+                      </a:solidFill>
+                      <a:prstDash val="solid"/>
+                    </a:lnB>
+                  </a:tcPr>
+                </a:tc>
+                <a:tc>
+                  <a:txBody>
+                    <a:bodyPr/>
+                    <a:lstStyle/>
+                    <a:p>
+                      <a:r>
+                        <a:rPr sz="1000" b="1">
+                          <a:solidFill>
+                            <a:srgbClr val="FFFFFF"/>
+                          </a:solidFill>
+                          <a:latin typeface="Arial"/>
+                        </a:rPr>
+                        <a:t>Where it stands</a:t>
+                      </a:r>
+                    </a:p>
+                  </a:txBody>
+                  <a:tcPr marL="73152" marR="73152" marT="27432" marB="27432" anchor="ctr">
+                    <a:solidFill>
+                      <a:srgbClr val="3C7D4D"/>
+                    </a:solidFill>
+                    <a:lnL w="6350" cap="flat" cmpd="sng" algn="ctr">
+                      <a:solidFill>
+                        <a:srgbClr val="3C7D4D"/>
+                      </a:solidFill>
+                      <a:prstDash val="solid"/>
+                    </a:lnL>
+                    <a:lnR w="6350" cap="flat" cmpd="sng" algn="ctr">
+                      <a:solidFill>
+                        <a:srgbClr val="3C7D4D"/>
+                      </a:solidFill>
+                      <a:prstDash val="solid"/>
+                    </a:lnR>
+                    <a:lnT w="6350" cap="flat" cmpd="sng" algn="ctr">
+                      <a:solidFill>
+                        <a:srgbClr val="3C7D4D"/>
+                      </a:solidFill>
+                      <a:prstDash val="solid"/>
+                    </a:lnT>
+                    <a:lnB w="6350" cap="flat" cmpd="sng" algn="ctr">
+                      <a:solidFill>
+                        <a:srgbClr val="3C7D4D"/>
+                      </a:solidFill>
+                      <a:prstDash val="solid"/>
+                    </a:lnB>
+                  </a:tcPr>
+                </a:tc>
+              </a:tr>
+              <a:tr h="265176">
+                <a:tc>
+                  <a:txBody>
+                    <a:bodyPr/>
+                    <a:lstStyle/>
+                    <a:p>
+                      <a:r>
+                        <a:rPr sz="1000" b="1">
+                          <a:solidFill>
+                            <a:srgbClr val="15181A"/>
+                          </a:solidFill>
+                          <a:latin typeface="Arial"/>
+                        </a:rPr>
+                        <a:t>1.  </a:t>
+                      </a:r>
+                    </a:p>
+                  </a:txBody>
+                  <a:tcPr marL="73152" marR="73152" marT="27432" marB="27432" anchor="t">
+                    <a:solidFill>
+                      <a:srgbClr val="FFFFFF"/>
+                    </a:solidFill>
+                    <a:lnL w="6350" cap="flat" cmpd="sng" algn="ctr">
+                      <a:solidFill>
+                        <a:srgbClr val="E2E6E3"/>
+                      </a:solidFill>
+                      <a:prstDash val="solid"/>
+                    </a:lnL>
+                    <a:lnR w="6350" cap="flat" cmpd="sng" algn="ctr">
+                      <a:solidFill>
+                        <a:srgbClr val="E2E6E3"/>
+                      </a:solidFill>
+                      <a:prstDash val="solid"/>
+                    </a:lnR>
+                    <a:lnT w="6350" cap="flat" cmpd="sng" algn="ctr">
+                      <a:solidFill>
+                        <a:srgbClr val="E2E6E3"/>
+                      </a:solidFill>
+                      <a:prstDash val="solid"/>
+                    </a:lnT>
+                    <a:lnB w="6350" cap="flat" cmpd="sng" algn="ctr">
+                      <a:solidFill>
+                        <a:srgbClr val="E2E6E3"/>
+                      </a:solidFill>
+                      <a:prstDash val="solid"/>
+                    </a:lnB>
+                  </a:tcPr>
+                </a:tc>
+                <a:tc>
+                  <a:txBody>
+                    <a:bodyPr/>
+                    <a:lstStyle/>
+                    <a:p>
+                      <a:r>
+                        <a:rPr sz="1000" b="0">
+                          <a:solidFill>
+                            <a:srgbClr val="5B6670"/>
+                          </a:solidFill>
+                          <a:latin typeface="Arial"/>
+                        </a:rPr>
+                        <a:t/>
+                      </a:r>
+                    </a:p>
+                  </a:txBody>
+                  <a:tcPr marL="73152" marR="73152" marT="27432" marB="27432" anchor="t">
+                    <a:solidFill>
+                      <a:srgbClr val="FFFFFF"/>
+                    </a:solidFill>
+                    <a:lnL w="6350" cap="flat" cmpd="sng" algn="ctr">
+                      <a:solidFill>
+                        <a:srgbClr val="E2E6E3"/>
+                      </a:solidFill>
+                      <a:prstDash val="solid"/>
+                    </a:lnL>
+                    <a:lnR w="6350" cap="flat" cmpd="sng" algn="ctr">
+                      <a:solidFill>
+                        <a:srgbClr val="E2E6E3"/>
+                      </a:solidFill>
+                      <a:prstDash val="solid"/>
+                    </a:lnR>
+                    <a:lnT w="6350" cap="flat" cmpd="sng" algn="ctr">
+                      <a:solidFill>
+                        <a:srgbClr val="E2E6E3"/>
+                      </a:solidFill>
+                      <a:prstDash val="solid"/>
+                    </a:lnT>
+                    <a:lnB w="6350" cap="flat" cmpd="sng" algn="ctr">
+                      <a:solidFill>
+                        <a:srgbClr val="E2E6E3"/>
+                      </a:solidFill>
+                      <a:prstDash val="solid"/>
+                    </a:lnB>
+                  </a:tcPr>
+                </a:tc>
+                <a:tc>
+                  <a:txBody>
+                    <a:bodyPr/>
+                    <a:lstStyle/>
+                    <a:p>
+                      <a:r>
+                        <a:rPr sz="1000" b="0">
+                          <a:solidFill>
+                            <a:srgbClr val="5B6670"/>
+                          </a:solidFill>
+                          <a:latin typeface="Arial"/>
+                        </a:rPr>
+                        <a:t/>
+                      </a:r>
+                    </a:p>
+                  </a:txBody>
+                  <a:tcPr marL="73152" marR="73152" marT="27432" marB="27432" anchor="t">
+                    <a:solidFill>
+                      <a:srgbClr val="FFFFFF"/>
+                    </a:solidFill>
+                    <a:lnL w="6350" cap="flat" cmpd="sng" algn="ctr">
+                      <a:solidFill>
+                        <a:srgbClr val="E2E6E3"/>
+                      </a:solidFill>
+                      <a:prstDash val="solid"/>
+                    </a:lnL>
+                    <a:lnR w="6350" cap="flat" cmpd="sng" algn="ctr">
+                      <a:solidFill>
+                        <a:srgbClr val="E2E6E3"/>
+                      </a:solidFill>
+                      <a:prstDash val="solid"/>
+                    </a:lnR>
+                    <a:lnT w="6350" cap="flat" cmpd="sng" algn="ctr">
+                      <a:solidFill>
+                        <a:srgbClr val="E2E6E3"/>
+                      </a:solidFill>
+                      <a:prstDash val="solid"/>
+                    </a:lnT>
+                    <a:lnB w="6350" cap="flat" cmpd="sng" algn="ctr">
+                      <a:solidFill>
+                        <a:srgbClr val="E2E6E3"/>
+                      </a:solidFill>
+                      <a:prstDash val="solid"/>
+                    </a:lnB>
+                  </a:tcPr>
+                </a:tc>
+                <a:tc>
+                  <a:txBody>
+                    <a:bodyPr/>
+                    <a:lstStyle/>
+                    <a:p>
+                      <a:r>
+                        <a:rPr sz="1000" b="0">
+                          <a:solidFill>
+                            <a:srgbClr val="5B6670"/>
+                          </a:solidFill>
+                          <a:latin typeface="Arial"/>
+                        </a:rPr>
+                        <a:t/>
+                      </a:r>
+                    </a:p>
+                  </a:txBody>
+                  <a:tcPr marL="73152" marR="73152" marT="27432" marB="27432" anchor="t">
+                    <a:solidFill>
+                      <a:srgbClr val="FFFFFF"/>
+                    </a:solidFill>
+                    <a:lnL w="6350" cap="flat" cmpd="sng" algn="ctr">
+                      <a:solidFill>
+                        <a:srgbClr val="E2E6E3"/>
+                      </a:solidFill>
+                      <a:prstDash val="solid"/>
+                    </a:lnL>
+                    <a:lnR w="6350" cap="flat" cmpd="sng" algn="ctr">
+                      <a:solidFill>
+                        <a:srgbClr val="E2E6E3"/>
+                      </a:solidFill>
+                      <a:prstDash val="solid"/>
+                    </a:lnR>
+                    <a:lnT w="6350" cap="flat" cmpd="sng" algn="ctr">
+                      <a:solidFill>
+                        <a:srgbClr val="E2E6E3"/>
+                      </a:solidFill>
+                      <a:prstDash val="solid"/>
+                    </a:lnT>
+                    <a:lnB w="6350" cap="flat" cmpd="sng" algn="ctr">
+                      <a:solidFill>
+                        <a:srgbClr val="E2E6E3"/>
+                      </a:solidFill>
+                      <a:prstDash val="solid"/>
+                    </a:lnB>
+                  </a:tcPr>
+                </a:tc>
+                <a:tc>
+                  <a:txBody>
+                    <a:bodyPr/>
+                    <a:lstStyle/>
+                    <a:p>
+                      <a:r>
+                        <a:rPr sz="1000" b="0">
+                          <a:solidFill>
+                            <a:srgbClr val="5B6670"/>
+                          </a:solidFill>
+                          <a:latin typeface="Arial"/>
+                        </a:rPr>
+                        <a:t/>
+                      </a:r>
+                    </a:p>
+                  </a:txBody>
+                  <a:tcPr marL="73152" marR="73152" marT="27432" marB="27432" anchor="t">
+                    <a:solidFill>
+                      <a:srgbClr val="FFFFFF"/>
+                    </a:solidFill>
+                    <a:lnL w="6350" cap="flat" cmpd="sng" algn="ctr">
+                      <a:solidFill>
+                        <a:srgbClr val="E2E6E3"/>
+                      </a:solidFill>
+                      <a:prstDash val="solid"/>
+                    </a:lnL>
+                    <a:lnR w="6350" cap="flat" cmpd="sng" algn="ctr">
+                      <a:solidFill>
+                        <a:srgbClr val="E2E6E3"/>
+                      </a:solidFill>
+                      <a:prstDash val="solid"/>
+                    </a:lnR>
+                    <a:lnT w="6350" cap="flat" cmpd="sng" algn="ctr">
+                      <a:solidFill>
+                        <a:srgbClr val="E2E6E3"/>
+                      </a:solidFill>
+                      <a:prstDash val="solid"/>
+                    </a:lnT>
+                    <a:lnB w="6350" cap="flat" cmpd="sng" algn="ctr">
+                      <a:solidFill>
+                        <a:srgbClr val="E2E6E3"/>
+                      </a:solidFill>
+                      <a:prstDash val="solid"/>
+                    </a:lnB>
+                  </a:tcPr>
+                </a:tc>
+              </a:tr>
+              <a:tr h="265176">
+                <a:tc>
+                  <a:txBody>
+                    <a:bodyPr/>
+                    <a:lstStyle/>
+                    <a:p>
+                      <a:r>
+                        <a:rPr sz="1000" b="1">
+                          <a:solidFill>
+                            <a:srgbClr val="15181A"/>
+                          </a:solidFill>
+                          <a:latin typeface="Arial"/>
+                        </a:rPr>
+                        <a:t>2.  </a:t>
+                      </a:r>
+                    </a:p>
+                  </a:txBody>
+                  <a:tcPr marL="73152" marR="73152" marT="27432" marB="27432" anchor="t">
+                    <a:solidFill>
+                      <a:srgbClr val="FFFFFF"/>
+                    </a:solidFill>
+                    <a:lnL w="6350" cap="flat" cmpd="sng" algn="ctr">
+                      <a:solidFill>
+                        <a:srgbClr val="E2E6E3"/>
+                      </a:solidFill>
+                      <a:prstDash val="solid"/>
+                    </a:lnL>
+                    <a:lnR w="6350" cap="flat" cmpd="sng" algn="ctr">
+                      <a:solidFill>
+                        <a:srgbClr val="E2E6E3"/>
+                      </a:solidFill>
+                      <a:prstDash val="solid"/>
+                    </a:lnR>
+                    <a:lnT w="6350" cap="flat" cmpd="sng" algn="ctr">
+                      <a:solidFill>
+                        <a:srgbClr val="E2E6E3"/>
+                      </a:solidFill>
+                      <a:prstDash val="solid"/>
+                    </a:lnT>
+                    <a:lnB w="6350" cap="flat" cmpd="sng" algn="ctr">
+                      <a:solidFill>
+                        <a:srgbClr val="E2E6E3"/>
+                      </a:solidFill>
+                      <a:prstDash val="solid"/>
+                    </a:lnB>
+                  </a:tcPr>
+                </a:tc>
+                <a:tc>
+                  <a:txBody>
+                    <a:bodyPr/>
+                    <a:lstStyle/>
+                    <a:p>
+                      <a:r>
+                        <a:rPr sz="1000" b="0">
+                          <a:solidFill>
+                            <a:srgbClr val="5B6670"/>
+                          </a:solidFill>
+                          <a:latin typeface="Arial"/>
+                        </a:rPr>
+                        <a:t/>
+                      </a:r>
+                    </a:p>
+                  </a:txBody>
+                  <a:tcPr marL="73152" marR="73152" marT="27432" marB="27432" anchor="t">
+                    <a:solidFill>
+                      <a:srgbClr val="FFFFFF"/>
+                    </a:solidFill>
+                    <a:lnL w="6350" cap="flat" cmpd="sng" algn="ctr">
+                      <a:solidFill>
+                        <a:srgbClr val="E2E6E3"/>
+                      </a:solidFill>
+                      <a:prstDash val="solid"/>
+                    </a:lnL>
+                    <a:lnR w="6350" cap="flat" cmpd="sng" algn="ctr">
+                      <a:solidFill>
+                        <a:srgbClr val="E2E6E3"/>
+                      </a:solidFill>
+                      <a:prstDash val="solid"/>
+                    </a:lnR>
+                    <a:lnT w="6350" cap="flat" cmpd="sng" algn="ctr">
+                      <a:solidFill>
+                        <a:srgbClr val="E2E6E3"/>
+                      </a:solidFill>
+                      <a:prstDash val="solid"/>
+                    </a:lnT>
+                    <a:lnB w="6350" cap="flat" cmpd="sng" algn="ctr">
+                      <a:solidFill>
+                        <a:srgbClr val="E2E6E3"/>
+                      </a:solidFill>
+                      <a:prstDash val="solid"/>
+                    </a:lnB>
+                  </a:tcPr>
+                </a:tc>
+                <a:tc>
+                  <a:txBody>
+                    <a:bodyPr/>
+                    <a:lstStyle/>
+                    <a:p>
+                      <a:r>
+                        <a:rPr sz="1000" b="0">
+                          <a:solidFill>
+                            <a:srgbClr val="5B6670"/>
+                          </a:solidFill>
+                          <a:latin typeface="Arial"/>
+                        </a:rPr>
+                        <a:t/>
+                      </a:r>
+                    </a:p>
+                  </a:txBody>
+                  <a:tcPr marL="73152" marR="73152" marT="27432" marB="27432" anchor="t">
+                    <a:solidFill>
+                      <a:srgbClr val="FFFFFF"/>
+                    </a:solidFill>
+                    <a:lnL w="6350" cap="flat" cmpd="sng" algn="ctr">
+                      <a:solidFill>
+                        <a:srgbClr val="E2E6E3"/>
+                      </a:solidFill>
+                      <a:prstDash val="solid"/>
+                    </a:lnL>
+                    <a:lnR w="6350" cap="flat" cmpd="sng" algn="ctr">
+                      <a:solidFill>
+                        <a:srgbClr val="E2E6E3"/>
+                      </a:solidFill>
+                      <a:prstDash val="solid"/>
+                    </a:lnR>
+                    <a:lnT w="6350" cap="flat" cmpd="sng" algn="ctr">
+                      <a:solidFill>
+                        <a:srgbClr val="E2E6E3"/>
+                      </a:solidFill>
+                      <a:prstDash val="solid"/>
+                    </a:lnT>
+                    <a:lnB w="6350" cap="flat" cmpd="sng" algn="ctr">
+                      <a:solidFill>
+                        <a:srgbClr val="E2E6E3"/>
+                      </a:solidFill>
+                      <a:prstDash val="solid"/>
+                    </a:lnB>
+                  </a:tcPr>
+                </a:tc>
+                <a:tc>
+                  <a:txBody>
+                    <a:bodyPr/>
+                    <a:lstStyle/>
+                    <a:p>
+                      <a:r>
+                        <a:rPr sz="1000" b="0">
+                          <a:solidFill>
+                            <a:srgbClr val="5B6670"/>
+                          </a:solidFill>
+                          <a:latin typeface="Arial"/>
+                        </a:rPr>
+                        <a:t/>
+                      </a:r>
+                    </a:p>
+                  </a:txBody>
+                  <a:tcPr marL="73152" marR="73152" marT="27432" marB="27432" anchor="t">
+                    <a:solidFill>
+                      <a:srgbClr val="FFFFFF"/>
+                    </a:solidFill>
+                    <a:lnL w="6350" cap="flat" cmpd="sng" algn="ctr">
+                      <a:solidFill>
+                        <a:srgbClr val="E2E6E3"/>
+                      </a:solidFill>
+                      <a:prstDash val="solid"/>
+                    </a:lnL>
+                    <a:lnR w="6350" cap="flat" cmpd="sng" algn="ctr">
+                      <a:solidFill>
+                        <a:srgbClr val="E2E6E3"/>
+                      </a:solidFill>
+                      <a:prstDash val="solid"/>
+                    </a:lnR>
+                    <a:lnT w="6350" cap="flat" cmpd="sng" algn="ctr">
+                      <a:solidFill>
+                        <a:srgbClr val="E2E6E3"/>
+                      </a:solidFill>
+                      <a:prstDash val="solid"/>
+                    </a:lnT>
+                    <a:lnB w="6350" cap="flat" cmpd="sng" algn="ctr">
+                      <a:solidFill>
+                        <a:srgbClr val="E2E6E3"/>
+                      </a:solidFill>
+                      <a:prstDash val="solid"/>
+                    </a:lnB>
+                  </a:tcPr>
+                </a:tc>
+                <a:tc>
+                  <a:txBody>
+                    <a:bodyPr/>
+                    <a:lstStyle/>
+                    <a:p>
+                      <a:r>
+                        <a:rPr sz="1000" b="0">
+                          <a:solidFill>
+                            <a:srgbClr val="5B6670"/>
+                          </a:solidFill>
+                          <a:latin typeface="Arial"/>
+                        </a:rPr>
+                        <a:t/>
+                      </a:r>
+                    </a:p>
+                  </a:txBody>
+                  <a:tcPr marL="73152" marR="73152" marT="27432" marB="27432" anchor="t">
+                    <a:solidFill>
+                      <a:srgbClr val="FFFFFF"/>
+                    </a:solidFill>
+                    <a:lnL w="6350" cap="flat" cmpd="sng" algn="ctr">
+                      <a:solidFill>
+                        <a:srgbClr val="E2E6E3"/>
+                      </a:solidFill>
+                      <a:prstDash val="solid"/>
+                    </a:lnL>
+                    <a:lnR w="6350" cap="flat" cmpd="sng" algn="ctr">
+                      <a:solidFill>
+                        <a:srgbClr val="E2E6E3"/>
+                      </a:solidFill>
+                      <a:prstDash val="solid"/>
+                    </a:lnR>
+                    <a:lnT w="6350" cap="flat" cmpd="sng" algn="ctr">
+                      <a:solidFill>
+                        <a:srgbClr val="E2E6E3"/>
+                      </a:solidFill>
+                      <a:prstDash val="solid"/>
+                    </a:lnT>
+                    <a:lnB w="6350" cap="flat" cmpd="sng" algn="ctr">
+                      <a:solidFill>
+                        <a:srgbClr val="E2E6E3"/>
+                      </a:solidFill>
+                      <a:prstDash val="solid"/>
+                    </a:lnB>
+                  </a:tcPr>
+                </a:tc>
+              </a:tr>
+              <a:tr h="265176">
+                <a:tc>
+                  <a:txBody>
+                    <a:bodyPr/>
+                    <a:lstStyle/>
+                    <a:p>
+                      <a:r>
+                        <a:rPr sz="1000" b="1">
+                          <a:solidFill>
+                            <a:srgbClr val="15181A"/>
+                          </a:solidFill>
+                          <a:latin typeface="Arial"/>
+                        </a:rPr>
+                        <a:t>3.  </a:t>
+                      </a:r>
+                    </a:p>
+                  </a:txBody>
+                  <a:tcPr marL="73152" marR="73152" marT="27432" marB="27432" anchor="t">
+                    <a:solidFill>
+                      <a:srgbClr val="FFFFFF"/>
+                    </a:solidFill>
+                    <a:lnL w="6350" cap="flat" cmpd="sng" algn="ctr">
+                      <a:solidFill>
+                        <a:srgbClr val="E2E6E3"/>
+                      </a:solidFill>
+                      <a:prstDash val="solid"/>
+                    </a:lnL>
+                    <a:lnR w="6350" cap="flat" cmpd="sng" algn="ctr">
+                      <a:solidFill>
+                        <a:srgbClr val="E2E6E3"/>
+                      </a:solidFill>
+                      <a:prstDash val="solid"/>
+                    </a:lnR>
+                    <a:lnT w="6350" cap="flat" cmpd="sng" algn="ctr">
+                      <a:solidFill>
+                        <a:srgbClr val="E2E6E3"/>
+                      </a:solidFill>
+                      <a:prstDash val="solid"/>
+                    </a:lnT>
+                    <a:lnB w="6350" cap="flat" cmpd="sng" algn="ctr">
+                      <a:solidFill>
+                        <a:srgbClr val="E2E6E3"/>
+                      </a:solidFill>
+                      <a:prstDash val="solid"/>
+                    </a:lnB>
+                  </a:tcPr>
+                </a:tc>
+                <a:tc>
+                  <a:txBody>
+                    <a:bodyPr/>
+                    <a:lstStyle/>
+                    <a:p>
+                      <a:r>
+                        <a:rPr sz="1000" b="0">
+                          <a:solidFill>
+                            <a:srgbClr val="5B6670"/>
+                          </a:solidFill>
+                          <a:latin typeface="Arial"/>
+                        </a:rPr>
+                        <a:t/>
+                      </a:r>
+                    </a:p>
+                  </a:txBody>
+                  <a:tcPr marL="73152" marR="73152" marT="27432" marB="27432" anchor="t">
+                    <a:solidFill>
+                      <a:srgbClr val="FFFFFF"/>
+                    </a:solidFill>
+                    <a:lnL w="6350" cap="flat" cmpd="sng" algn="ctr">
+                      <a:solidFill>
+                        <a:srgbClr val="E2E6E3"/>
+                      </a:solidFill>
+                      <a:prstDash val="solid"/>
+                    </a:lnL>
+                    <a:lnR w="6350" cap="flat" cmpd="sng" algn="ctr">
+                      <a:solidFill>
+                        <a:srgbClr val="E2E6E3"/>
+                      </a:solidFill>
+                      <a:prstDash val="solid"/>
+                    </a:lnR>
+                    <a:lnT w="6350" cap="flat" cmpd="sng" algn="ctr">
+                      <a:solidFill>
+                        <a:srgbClr val="E2E6E3"/>
+                      </a:solidFill>
+                      <a:prstDash val="solid"/>
+                    </a:lnT>
+                    <a:lnB w="6350" cap="flat" cmpd="sng" algn="ctr">
+                      <a:solidFill>
+                        <a:srgbClr val="E2E6E3"/>
+                      </a:solidFill>
+                      <a:prstDash val="solid"/>
+                    </a:lnB>
+                  </a:tcPr>
+                </a:tc>
+                <a:tc>
+                  <a:txBody>
+                    <a:bodyPr/>
+                    <a:lstStyle/>
+                    <a:p>
+                      <a:r>
+                        <a:rPr sz="1000" b="0">
+                          <a:solidFill>
+                            <a:srgbClr val="5B6670"/>
+                          </a:solidFill>
+                          <a:latin typeface="Arial"/>
+                        </a:rPr>
+                        <a:t/>
+                      </a:r>
+                    </a:p>
+                  </a:txBody>
+                  <a:tcPr marL="73152" marR="73152" marT="27432" marB="27432" anchor="t">
+                    <a:solidFill>
+                      <a:srgbClr val="FFFFFF"/>
+                    </a:solidFill>
+                    <a:lnL w="6350" cap="flat" cmpd="sng" algn="ctr">
+                      <a:solidFill>
+                        <a:srgbClr val="E2E6E3"/>
+                      </a:solidFill>
+                      <a:prstDash val="solid"/>
+                    </a:lnL>
+                    <a:lnR w="6350" cap="flat" cmpd="sng" algn="ctr">
+                      <a:solidFill>
+                        <a:srgbClr val="E2E6E3"/>
+                      </a:solidFill>
+                      <a:prstDash val="solid"/>
+                    </a:lnR>
+                    <a:lnT w="6350" cap="flat" cmpd="sng" algn="ctr">
+                      <a:solidFill>
+                        <a:srgbClr val="E2E6E3"/>
+                      </a:solidFill>
+                      <a:prstDash val="solid"/>
+                    </a:lnT>
+                    <a:lnB w="6350" cap="flat" cmpd="sng" algn="ctr">
+                      <a:solidFill>
+                        <a:srgbClr val="E2E6E3"/>
+                      </a:solidFill>
+                      <a:prstDash val="solid"/>
+                    </a:lnB>
+                  </a:tcPr>
+                </a:tc>
+                <a:tc>
+                  <a:txBody>
+                    <a:bodyPr/>
+                    <a:lstStyle/>
+                    <a:p>
+                      <a:r>
+                        <a:rPr sz="1000" b="0">
+                          <a:solidFill>
+                            <a:srgbClr val="5B6670"/>
+                          </a:solidFill>
+                          <a:latin typeface="Arial"/>
+                        </a:rPr>
+                        <a:t/>
+                      </a:r>
+                    </a:p>
+                  </a:txBody>
+                  <a:tcPr marL="73152" marR="73152" marT="27432" marB="27432" anchor="t">
+                    <a:solidFill>
+                      <a:srgbClr val="FFFFFF"/>
+                    </a:solidFill>
+                    <a:lnL w="6350" cap="flat" cmpd="sng" algn="ctr">
+                      <a:solidFill>
+                        <a:srgbClr val="E2E6E3"/>
+                      </a:solidFill>
+                      <a:prstDash val="solid"/>
+                    </a:lnL>
+                    <a:lnR w="6350" cap="flat" cmpd="sng" algn="ctr">
+                      <a:solidFill>
+                        <a:srgbClr val="E2E6E3"/>
+                      </a:solidFill>
+                      <a:prstDash val="solid"/>
+                    </a:lnR>
+                    <a:lnT w="6350" cap="flat" cmpd="sng" algn="ctr">
+                      <a:solidFill>
+                        <a:srgbClr val="E2E6E3"/>
+                      </a:solidFill>
+                      <a:prstDash val="solid"/>
+                    </a:lnT>
+                    <a:lnB w="6350" cap="flat" cmpd="sng" algn="ctr">
+                      <a:solidFill>
+                        <a:srgbClr val="E2E6E3"/>
+                      </a:solidFill>
+                      <a:prstDash val="solid"/>
+                    </a:lnB>
+                  </a:tcPr>
+                </a:tc>
+                <a:tc>
+                  <a:txBody>
+                    <a:bodyPr/>
+                    <a:lstStyle/>
+                    <a:p>
+                      <a:r>
+                        <a:rPr sz="1000" b="0">
+                          <a:solidFill>
+                            <a:srgbClr val="5B6670"/>
+                          </a:solidFill>
+                          <a:latin typeface="Arial"/>
+                        </a:rPr>
+                        <a:t/>
+                      </a:r>
+                    </a:p>
+                  </a:txBody>
+                  <a:tcPr marL="73152" marR="73152" marT="27432" marB="27432" anchor="t">
+                    <a:solidFill>
+                      <a:srgbClr val="FFFFFF"/>
+                    </a:solidFill>
+                    <a:lnL w="6350" cap="flat" cmpd="sng" algn="ctr">
+                      <a:solidFill>
+                        <a:srgbClr val="E2E6E3"/>
+                      </a:solidFill>
+                      <a:prstDash val="solid"/>
+                    </a:lnL>
+                    <a:lnR w="6350" cap="flat" cmpd="sng" algn="ctr">
+                      <a:solidFill>
+                        <a:srgbClr val="E2E6E3"/>
+                      </a:solidFill>
+                      <a:prstDash val="solid"/>
+                    </a:lnR>
+                    <a:lnT w="6350" cap="flat" cmpd="sng" algn="ctr">
+                      <a:solidFill>
+                        <a:srgbClr val="E2E6E3"/>
+                      </a:solidFill>
+                      <a:prstDash val="solid"/>
+                    </a:lnT>
+                    <a:lnB w="6350" cap="flat" cmpd="sng" algn="ctr">
+                      <a:solidFill>
+                        <a:srgbClr val="E2E6E3"/>
+                      </a:solidFill>
+                      <a:prstDash val="solid"/>
+                    </a:lnB>
+                  </a:tcPr>
+                </a:tc>
+              </a:tr>
+            </a:tbl>
+          </a:graphicData>
+        </a:graphic>
+      </p:graphicFrame>
     </p:spTree>
   </p:cSld>
   <p:clrMapOvr>
@@ -13562,7 +15377,7 @@
           <a:lstStyle/>
           <a:p>
             <a:r>
-              <a:t>TERRITORY REVIEW  ·  4 OF 6  ·  LOSSES</a:t>
+              <a:t>TERRITORY REVIEW  ·  4 OF 7  ·  WINS</a:t>
             </a:r>
           </a:p>
         </p:txBody>
@@ -13583,7 +15398,7 @@
           <a:lstStyle/>
           <a:p>
             <a:r>
-              <a:t>Three losses</a:t>
+              <a:t>Three wins</a:t>
             </a:r>
           </a:p>
         </p:txBody>
@@ -13604,7 +15419,7 @@
           <a:lstStyle/>
           <a:p>
             <a:r>
-              <a:t>[One line. Which loss hurt most and whether we'd lose it again today.]</a:t>
+              <a:t>[One line. The pattern across the three, or the one we should be copying.]</a:t>
             </a:r>
           </a:p>
         </p:txBody>
@@ -13646,38 +15461,22 @@
           <a:lstStyle/>
           <a:p>
             <a:r>
-              <a:rPr sz="1400"/>
-              <a:t>Job: [dealer, account, job]</a:t>
-            </a:r>
-          </a:p>
-          <a:p>
-            <a:r>
-              <a:rPr sz="1400"/>
-              <a:t>Who won: [competitor]</a:t>
-            </a:r>
-          </a:p>
-          <a:p>
-            <a:r>
-              <a:rPr sz="1400"/>
-              <a:t>Their price: [$ or unknown]</a:t>
-            </a:r>
-          </a:p>
-          <a:p>
-            <a:r>
-              <a:rPr sz="1400"/>
-              <a:t>Lead time: ours / theirs [wks]</a:t>
-            </a:r>
-          </a:p>
-          <a:p>
-            <a:r>
-              <a:rPr sz="1400"/>
-              <a:t>Why: [ ]</a:t>
-            </a:r>
-          </a:p>
-          <a:p>
-            <a:r>
-              <a:rPr sz="1400"/>
-              <a:t>Lose it again today: [yes/no]</a:t>
+              <a:t>Job: [dealer, account, job name]</a:t>
+            </a:r>
+          </a:p>
+          <a:p>
+            <a:r>
+              <a:t>Size: [$ and product]</a:t>
+            </a:r>
+          </a:p>
+          <a:p>
+            <a:r>
+              <a:t>Why we won on price: [ ]</a:t>
+            </a:r>
+          </a:p>
+          <a:p>
+            <a:r>
+              <a:t>Repeatable: [yes or no, and why]</a:t>
             </a:r>
           </a:p>
         </p:txBody>
@@ -13719,38 +15518,22 @@
           <a:lstStyle/>
           <a:p>
             <a:r>
-              <a:rPr sz="1400"/>
-              <a:t>Job: [dealer, account, job]</a:t>
-            </a:r>
-          </a:p>
-          <a:p>
-            <a:r>
-              <a:rPr sz="1400"/>
-              <a:t>Who won: [competitor]</a:t>
-            </a:r>
-          </a:p>
-          <a:p>
-            <a:r>
-              <a:rPr sz="1400"/>
-              <a:t>Why: [what they had, we didn't]</a:t>
-            </a:r>
-          </a:p>
-          <a:p>
-            <a:r>
-              <a:rPr sz="1400"/>
-              <a:t>Lead time: ours / theirs [wks]</a:t>
-            </a:r>
-          </a:p>
-          <a:p>
-            <a:r>
-              <a:rPr sz="1400"/>
-              <a:t>Lose it again today: [yes/no]</a:t>
-            </a:r>
-          </a:p>
-          <a:p>
-            <a:r>
-              <a:rPr sz="1400"/>
-              <a:t>No product loss? Say so here.</a:t>
+              <a:t>Job: [dealer, account, job name]</a:t>
+            </a:r>
+          </a:p>
+          <a:p>
+            <a:r>
+              <a:t>Size: [$ and product]</a:t>
+            </a:r>
+          </a:p>
+          <a:p>
+            <a:r>
+              <a:t>Why we won on product: [ ]</a:t>
+            </a:r>
+          </a:p>
+          <a:p>
+            <a:r>
+              <a:t>Repeatable: [yes or no, and why]</a:t>
             </a:r>
           </a:p>
         </p:txBody>
@@ -13792,38 +15575,22 @@
           <a:lstStyle/>
           <a:p>
             <a:r>
-              <a:rPr sz="1400"/>
-              <a:t>Job: [dealer, account, job]</a:t>
-            </a:r>
-          </a:p>
-          <a:p>
-            <a:r>
-              <a:rPr sz="1400"/>
-              <a:t>Who won: [competitor]</a:t>
-            </a:r>
-          </a:p>
-          <a:p>
-            <a:r>
-              <a:rPr sz="1400"/>
-              <a:t>Lead time: ours / theirs [wks]</a:t>
-            </a:r>
-          </a:p>
-          <a:p>
-            <a:r>
-              <a:rPr sz="1400"/>
-              <a:t>Why: [quoting or service]</a:t>
-            </a:r>
-          </a:p>
-          <a:p>
-            <a:r>
-              <a:rPr sz="1400"/>
-              <a:t>Lose it again today: [yes/no]</a:t>
-            </a:r>
-          </a:p>
-          <a:p>
-            <a:r>
-              <a:rPr sz="1400"/>
-              <a:t>No speed loss? Say so here.</a:t>
+              <a:t>Job: [dealer, account, job name]</a:t>
+            </a:r>
+          </a:p>
+          <a:p>
+            <a:r>
+              <a:t>Size: [$ and product]</a:t>
+            </a:r>
+          </a:p>
+          <a:p>
+            <a:r>
+              <a:t>Why we won on speed or support: [ ]</a:t>
+            </a:r>
+          </a:p>
+          <a:p>
+            <a:r>
+              <a:t>Repeatable: [yes or no, and why]</a:t>
             </a:r>
           </a:p>
         </p:txBody>
@@ -13862,7 +15629,307 @@
           <a:lstStyle/>
           <a:p>
             <a:r>
-              <a:t>TERRITORY REVIEW  ·  5 OF 6  ·  STRAIGHT TALK</a:t>
+              <a:t>TERRITORY REVIEW  ·  5 OF 7  ·  LOSSES</a:t>
+            </a:r>
+          </a:p>
+        </p:txBody>
+      </p:sp>
+      <p:sp>
+        <p:nvSpPr>
+          <p:cNvPr id="3" name="Title 2"/>
+          <p:cNvSpPr>
+            <a:spLocks noGrp="1"/>
+          </p:cNvSpPr>
+          <p:nvPr>
+            <p:ph type="title" idx="101"/>
+          </p:nvPr>
+        </p:nvSpPr>
+        <p:spPr/>
+        <p:txBody>
+          <a:bodyPr/>
+          <a:lstStyle/>
+          <a:p>
+            <a:r>
+              <a:t>Three losses</a:t>
+            </a:r>
+          </a:p>
+        </p:txBody>
+      </p:sp>
+      <p:sp>
+        <p:nvSpPr>
+          <p:cNvPr id="4" name="Text Placeholder 3"/>
+          <p:cNvSpPr>
+            <a:spLocks noGrp="1"/>
+          </p:cNvSpPr>
+          <p:nvPr>
+            <p:ph type="body" idx="102"/>
+          </p:nvPr>
+        </p:nvSpPr>
+        <p:spPr/>
+        <p:txBody>
+          <a:bodyPr/>
+          <a:lstStyle/>
+          <a:p>
+            <a:r>
+              <a:t>[One line. Which loss hurt most and whether we'd lose it again today.]</a:t>
+            </a:r>
+          </a:p>
+        </p:txBody>
+      </p:sp>
+      <p:sp>
+        <p:nvSpPr>
+          <p:cNvPr id="5" name="Text Placeholder 4"/>
+          <p:cNvSpPr>
+            <a:spLocks noGrp="1"/>
+          </p:cNvSpPr>
+          <p:nvPr>
+            <p:ph type="body" idx="106"/>
+          </p:nvPr>
+        </p:nvSpPr>
+        <p:spPr/>
+        <p:txBody>
+          <a:bodyPr/>
+          <a:lstStyle/>
+          <a:p>
+            <a:r>
+              <a:t>Price</a:t>
+            </a:r>
+          </a:p>
+        </p:txBody>
+      </p:sp>
+      <p:sp>
+        <p:nvSpPr>
+          <p:cNvPr id="6" name="Text Placeholder 5"/>
+          <p:cNvSpPr>
+            <a:spLocks noGrp="1"/>
+          </p:cNvSpPr>
+          <p:nvPr>
+            <p:ph type="body" idx="107"/>
+          </p:nvPr>
+        </p:nvSpPr>
+        <p:spPr/>
+        <p:txBody>
+          <a:bodyPr/>
+          <a:lstStyle/>
+          <a:p>
+            <a:r>
+              <a:rPr sz="1400"/>
+              <a:t>Job: [dealer, account, job]</a:t>
+            </a:r>
+          </a:p>
+          <a:p>
+            <a:r>
+              <a:rPr sz="1400"/>
+              <a:t>Who won: [competitor]</a:t>
+            </a:r>
+          </a:p>
+          <a:p>
+            <a:r>
+              <a:rPr sz="1400"/>
+              <a:t>Their price: [$ or unknown]</a:t>
+            </a:r>
+          </a:p>
+          <a:p>
+            <a:r>
+              <a:rPr sz="1400"/>
+              <a:t>Lead time: ours / theirs [wks]</a:t>
+            </a:r>
+          </a:p>
+          <a:p>
+            <a:r>
+              <a:rPr sz="1400"/>
+              <a:t>Why: [ ]</a:t>
+            </a:r>
+          </a:p>
+          <a:p>
+            <a:r>
+              <a:rPr sz="1400"/>
+              <a:t>Lose it again today: [yes/no]</a:t>
+            </a:r>
+          </a:p>
+        </p:txBody>
+      </p:sp>
+      <p:sp>
+        <p:nvSpPr>
+          <p:cNvPr id="7" name="Text Placeholder 6"/>
+          <p:cNvSpPr>
+            <a:spLocks noGrp="1"/>
+          </p:cNvSpPr>
+          <p:nvPr>
+            <p:ph type="body" idx="111"/>
+          </p:nvPr>
+        </p:nvSpPr>
+        <p:spPr/>
+        <p:txBody>
+          <a:bodyPr/>
+          <a:lstStyle/>
+          <a:p>
+            <a:r>
+              <a:t>Product</a:t>
+            </a:r>
+          </a:p>
+        </p:txBody>
+      </p:sp>
+      <p:sp>
+        <p:nvSpPr>
+          <p:cNvPr id="8" name="Text Placeholder 7"/>
+          <p:cNvSpPr>
+            <a:spLocks noGrp="1"/>
+          </p:cNvSpPr>
+          <p:nvPr>
+            <p:ph type="body" idx="112"/>
+          </p:nvPr>
+        </p:nvSpPr>
+        <p:spPr/>
+        <p:txBody>
+          <a:bodyPr/>
+          <a:lstStyle/>
+          <a:p>
+            <a:r>
+              <a:rPr sz="1400"/>
+              <a:t>Job: [dealer, account, job]</a:t>
+            </a:r>
+          </a:p>
+          <a:p>
+            <a:r>
+              <a:rPr sz="1400"/>
+              <a:t>Who won: [competitor]</a:t>
+            </a:r>
+          </a:p>
+          <a:p>
+            <a:r>
+              <a:rPr sz="1400"/>
+              <a:t>Why: [what they had, we didn't]</a:t>
+            </a:r>
+          </a:p>
+          <a:p>
+            <a:r>
+              <a:rPr sz="1400"/>
+              <a:t>Lead time: ours / theirs [wks]</a:t>
+            </a:r>
+          </a:p>
+          <a:p>
+            <a:r>
+              <a:rPr sz="1400"/>
+              <a:t>Lose it again today: [yes/no]</a:t>
+            </a:r>
+          </a:p>
+          <a:p>
+            <a:r>
+              <a:rPr sz="1400"/>
+              <a:t>No product loss? Say so here.</a:t>
+            </a:r>
+          </a:p>
+        </p:txBody>
+      </p:sp>
+      <p:sp>
+        <p:nvSpPr>
+          <p:cNvPr id="9" name="Text Placeholder 8"/>
+          <p:cNvSpPr>
+            <a:spLocks noGrp="1"/>
+          </p:cNvSpPr>
+          <p:nvPr>
+            <p:ph type="body" idx="116"/>
+          </p:nvPr>
+        </p:nvSpPr>
+        <p:spPr/>
+        <p:txBody>
+          <a:bodyPr/>
+          <a:lstStyle/>
+          <a:p>
+            <a:r>
+              <a:t>Speed and support</a:t>
+            </a:r>
+          </a:p>
+        </p:txBody>
+      </p:sp>
+      <p:sp>
+        <p:nvSpPr>
+          <p:cNvPr id="10" name="Text Placeholder 9"/>
+          <p:cNvSpPr>
+            <a:spLocks noGrp="1"/>
+          </p:cNvSpPr>
+          <p:nvPr>
+            <p:ph type="body" idx="117"/>
+          </p:nvPr>
+        </p:nvSpPr>
+        <p:spPr/>
+        <p:txBody>
+          <a:bodyPr/>
+          <a:lstStyle/>
+          <a:p>
+            <a:r>
+              <a:rPr sz="1400"/>
+              <a:t>Job: [dealer, account, job]</a:t>
+            </a:r>
+          </a:p>
+          <a:p>
+            <a:r>
+              <a:rPr sz="1400"/>
+              <a:t>Who won: [competitor]</a:t>
+            </a:r>
+          </a:p>
+          <a:p>
+            <a:r>
+              <a:rPr sz="1400"/>
+              <a:t>Lead time: ours / theirs [wks]</a:t>
+            </a:r>
+          </a:p>
+          <a:p>
+            <a:r>
+              <a:rPr sz="1400"/>
+              <a:t>Why: [quoting or service]</a:t>
+            </a:r>
+          </a:p>
+          <a:p>
+            <a:r>
+              <a:rPr sz="1400"/>
+              <a:t>Lose it again today: [yes/no]</a:t>
+            </a:r>
+          </a:p>
+          <a:p>
+            <a:r>
+              <a:rPr sz="1400"/>
+              <a:t>No speed loss? Say so here.</a:t>
+            </a:r>
+          </a:p>
+        </p:txBody>
+      </p:sp>
+    </p:spTree>
+  </p:cSld>
+  <p:clrMapOvr>
+    <a:masterClrMapping/>
+  </p:clrMapOvr>
+</p:sld>
+</file>
+
+<file path=ppt/slides/slide7.xml><?xml version="1.0" encoding="utf-8"?>
+<p:sld xmlns:a="http://schemas.openxmlformats.org/drawingml/2006/main" xmlns:p="http://schemas.openxmlformats.org/presentationml/2006/main" xmlns:r="http://schemas.openxmlformats.org/officeDocument/2006/relationships">
+  <p:cSld>
+    <p:spTree>
+      <p:nvGrpSpPr>
+        <p:cNvPr id="1" name=""/>
+        <p:cNvGrpSpPr/>
+        <p:nvPr/>
+      </p:nvGrpSpPr>
+      <p:grpSpPr/>
+      <p:sp>
+        <p:nvSpPr>
+          <p:cNvPr id="2" name="Text Placeholder 1"/>
+          <p:cNvSpPr>
+            <a:spLocks noGrp="1"/>
+          </p:cNvSpPr>
+          <p:nvPr>
+            <p:ph type="body" idx="100"/>
+          </p:nvPr>
+        </p:nvSpPr>
+        <p:spPr/>
+        <p:txBody>
+          <a:bodyPr/>
+          <a:lstStyle/>
+          <a:p>
+            <a:r>
+              <a:t>TERRITORY REVIEW  ·  6 OF 7  ·  STRAIGHT TALK</a:t>
             </a:r>
           </a:p>
         </p:txBody>
@@ -14502,7 +16569,7 @@
 </p:sld>
 </file>
 
-<file path=ppt/slides/slide7.xml><?xml version="1.0" encoding="utf-8"?>
+<file path=ppt/slides/slide8.xml><?xml version="1.0" encoding="utf-8"?>
 <p:sld xmlns:a="http://schemas.openxmlformats.org/drawingml/2006/main" xmlns:p="http://schemas.openxmlformats.org/presentationml/2006/main" xmlns:r="http://schemas.openxmlformats.org/officeDocument/2006/relationships">
   <p:cSld>
     <p:spTree>
@@ -14528,7 +16595,7 @@
           <a:lstStyle/>
           <a:p>
             <a:r>
-              <a:t>TERRITORY REVIEW  ·  6 OF 6  ·  2027</a:t>
+              <a:t>TERRITORY REVIEW  ·  7 OF 7  ·  2027</a:t>
             </a:r>
           </a:p>
         </p:txBody>
@@ -14731,7 +16798,7 @@
           </a:p>
           <a:p>
             <a:r>
-              <a:t>What I need from Steel King: [ ]</a:t>
+              <a:t>What I need from Nate: [ ]</a:t>
             </a:r>
           </a:p>
         </p:txBody>
